--- a/SnapshotScreener_핵심기술_해설.pptx
+++ b/SnapshotScreener_핵심기술_해설.pptx
@@ -2014,7 +2014,7 @@
     <p:bg>
       <p:bgPr>
         <a:solidFill>
-          <a:srgbClr val="0F1117"/>
+          <a:srgbClr val="FFFFFF"/>
         </a:solidFill>
       </p:bgPr>
     </p:bg>
@@ -2047,7 +2047,7 @@
             <a:avLst/>
           </a:prstGeom>
           <a:solidFill>
-            <a:srgbClr val="4E8CFF"/>
+            <a:srgbClr val="2563EB"/>
           </a:solidFill>
           <a:ln/>
         </p:spPr>
@@ -2079,7 +2079,7 @@
             <a:r>
               <a:rPr lang="en-US" sz="4400" b="1" dirty="0">
                 <a:solidFill>
-                  <a:srgbClr val="E4E6ED"/>
+                  <a:srgbClr val="1E2030"/>
                 </a:solidFill>
                 <a:latin typeface="Apple SD Gothic Neo" pitchFamily="34" charset="0"/>
                 <a:ea typeface="Apple SD Gothic Neo" pitchFamily="34" charset="-122"/>
@@ -2118,7 +2118,7 @@
             <a:r>
               <a:rPr lang="en-US" sz="2800" dirty="0">
                 <a:solidFill>
-                  <a:srgbClr val="4E8CFF"/>
+                  <a:srgbClr val="2563EB"/>
                 </a:solidFill>
                 <a:latin typeface="Apple SD Gothic Neo" pitchFamily="34" charset="0"/>
                 <a:ea typeface="Apple SD Gothic Neo" pitchFamily="34" charset="-122"/>
@@ -2145,7 +2145,7 @@
             <a:avLst/>
           </a:prstGeom>
           <a:solidFill>
-            <a:srgbClr val="4E8CFF">
+            <a:srgbClr val="2563EB">
               <a:alpha val="50000"/>
             </a:srgbClr>
           </a:solidFill>
@@ -2182,7 +2182,7 @@
             <a:r>
               <a:rPr lang="en-US" sz="1400" dirty="0">
                 <a:solidFill>
-                  <a:srgbClr val="E4E6ED"/>
+                  <a:srgbClr val="1E2030"/>
                 </a:solidFill>
                 <a:latin typeface="Apple SD Gothic Neo" pitchFamily="34" charset="0"/>
                 <a:ea typeface="Apple SD Gothic Neo" pitchFamily="34" charset="-122"/>
@@ -2202,7 +2202,7 @@
             <a:r>
               <a:rPr lang="en-US" sz="1400" dirty="0">
                 <a:solidFill>
-                  <a:srgbClr val="E4E6ED"/>
+                  <a:srgbClr val="1E2030"/>
                 </a:solidFill>
                 <a:latin typeface="Apple SD Gothic Neo" pitchFamily="34" charset="0"/>
                 <a:ea typeface="Apple SD Gothic Neo" pitchFamily="34" charset="-122"/>
@@ -2241,7 +2241,7 @@
             <a:r>
               <a:rPr lang="en-US" sz="1200" dirty="0">
                 <a:solidFill>
-                  <a:srgbClr val="5C6072"/>
+                  <a:srgbClr val="9CA3AF"/>
                 </a:solidFill>
                 <a:latin typeface="Apple SD Gothic Neo" pitchFamily="34" charset="0"/>
                 <a:ea typeface="Apple SD Gothic Neo" pitchFamily="34" charset="-122"/>
@@ -2267,7 +2267,7 @@
     <p:bg>
       <p:bgPr>
         <a:solidFill>
-          <a:srgbClr val="0F1117"/>
+          <a:srgbClr val="FFFFFF"/>
         </a:solidFill>
       </p:bgPr>
     </p:bg>
@@ -2300,7 +2300,7 @@
             <a:avLst/>
           </a:prstGeom>
           <a:solidFill>
-            <a:srgbClr val="38BDF8"/>
+            <a:srgbClr val="0891B2"/>
           </a:solidFill>
           <a:ln/>
         </p:spPr>
@@ -2332,7 +2332,7 @@
             <a:r>
               <a:rPr lang="en-US" sz="2400" b="1" dirty="0">
                 <a:solidFill>
-                  <a:srgbClr val="E4E6ED"/>
+                  <a:srgbClr val="1E2030"/>
                 </a:solidFill>
                 <a:latin typeface="Apple SD Gothic Neo" pitchFamily="34" charset="0"/>
                 <a:ea typeface="Apple SD Gothic Neo" pitchFamily="34" charset="-122"/>
@@ -2371,7 +2371,7 @@
             <a:r>
               <a:rPr lang="en-US" sz="1300" dirty="0">
                 <a:solidFill>
-                  <a:srgbClr val="38BDF8"/>
+                  <a:srgbClr val="0891B2"/>
                 </a:solidFill>
                 <a:latin typeface="Apple SD Gothic Neo" pitchFamily="34" charset="0"/>
                 <a:ea typeface="Apple SD Gothic Neo" pitchFamily="34" charset="-122"/>
@@ -2410,7 +2410,7 @@
             <a:r>
               <a:rPr lang="en-US" sz="1200" b="1" dirty="0">
                 <a:solidFill>
-                  <a:srgbClr val="4E8CFF"/>
+                  <a:srgbClr val="2563EB"/>
                 </a:solidFill>
                 <a:latin typeface="Apple SD Gothic Neo" pitchFamily="34" charset="0"/>
                 <a:ea typeface="Apple SD Gothic Neo" pitchFamily="34" charset="-122"/>
@@ -2437,11 +2437,13 @@
             <a:avLst/>
           </a:prstGeom>
           <a:solidFill>
-            <a:srgbClr val="1A1D27"/>
+            <a:srgbClr val="059669">
+              <a:alpha val="8000"/>
+            </a:srgbClr>
           </a:solidFill>
           <a:ln w="19050">
             <a:solidFill>
-              <a:srgbClr val="34D399"/>
+              <a:srgbClr val="059669"/>
             </a:solidFill>
             <a:prstDash val="solid"/>
           </a:ln>
@@ -2474,7 +2476,7 @@
             <a:r>
               <a:rPr lang="en-US" sz="1200" b="1" dirty="0">
                 <a:solidFill>
-                  <a:srgbClr val="34D399"/>
+                  <a:srgbClr val="059669"/>
                 </a:solidFill>
                 <a:latin typeface="Apple SD Gothic Neo" pitchFamily="34" charset="0"/>
                 <a:ea typeface="Apple SD Gothic Neo" pitchFamily="34" charset="-122"/>
@@ -2513,7 +2515,7 @@
             <a:r>
               <a:rPr lang="en-US" sz="1600" dirty="0">
                 <a:solidFill>
-                  <a:srgbClr val="4E8CFF"/>
+                  <a:srgbClr val="2563EB"/>
                 </a:solidFill>
                 <a:latin typeface="Apple SD Gothic Neo" pitchFamily="34" charset="0"/>
                 <a:ea typeface="Apple SD Gothic Neo" pitchFamily="34" charset="-122"/>
@@ -2540,11 +2542,13 @@
             <a:avLst/>
           </a:prstGeom>
           <a:solidFill>
-            <a:srgbClr val="1A1D27"/>
+            <a:srgbClr val="7C3AED">
+              <a:alpha val="8000"/>
+            </a:srgbClr>
           </a:solidFill>
           <a:ln w="19050">
             <a:solidFill>
-              <a:srgbClr val="A78BFA"/>
+              <a:srgbClr val="7C3AED"/>
             </a:solidFill>
             <a:prstDash val="solid"/>
           </a:ln>
@@ -2577,7 +2581,7 @@
             <a:r>
               <a:rPr lang="en-US" sz="1200" b="1" dirty="0">
                 <a:solidFill>
-                  <a:srgbClr val="A78BFA"/>
+                  <a:srgbClr val="7C3AED"/>
                 </a:solidFill>
                 <a:latin typeface="Apple SD Gothic Neo" pitchFamily="34" charset="0"/>
                 <a:ea typeface="Apple SD Gothic Neo" pitchFamily="34" charset="-122"/>
@@ -2616,7 +2620,7 @@
             <a:r>
               <a:rPr lang="en-US" sz="1600" dirty="0">
                 <a:solidFill>
-                  <a:srgbClr val="4E8CFF"/>
+                  <a:srgbClr val="2563EB"/>
                 </a:solidFill>
                 <a:latin typeface="Apple SD Gothic Neo" pitchFamily="34" charset="0"/>
                 <a:ea typeface="Apple SD Gothic Neo" pitchFamily="34" charset="-122"/>
@@ -2643,11 +2647,13 @@
             <a:avLst/>
           </a:prstGeom>
           <a:solidFill>
-            <a:srgbClr val="1A1D27"/>
+            <a:srgbClr val="D97706">
+              <a:alpha val="8000"/>
+            </a:srgbClr>
           </a:solidFill>
           <a:ln w="19050">
             <a:solidFill>
-              <a:srgbClr val="FBBF24"/>
+              <a:srgbClr val="D97706"/>
             </a:solidFill>
             <a:prstDash val="solid"/>
           </a:ln>
@@ -2680,7 +2686,7 @@
             <a:r>
               <a:rPr lang="en-US" sz="1200" b="1" dirty="0">
                 <a:solidFill>
-                  <a:srgbClr val="FBBF24"/>
+                  <a:srgbClr val="D97706"/>
                 </a:solidFill>
                 <a:latin typeface="Apple SD Gothic Neo" pitchFamily="34" charset="0"/>
                 <a:ea typeface="Apple SD Gothic Neo" pitchFamily="34" charset="-122"/>
@@ -2719,7 +2725,7 @@
             <a:r>
               <a:rPr lang="en-US" sz="1600" dirty="0">
                 <a:solidFill>
-                  <a:srgbClr val="4E8CFF"/>
+                  <a:srgbClr val="2563EB"/>
                 </a:solidFill>
                 <a:latin typeface="Apple SD Gothic Neo" pitchFamily="34" charset="0"/>
                 <a:ea typeface="Apple SD Gothic Neo" pitchFamily="34" charset="-122"/>
@@ -2746,11 +2752,13 @@
             <a:avLst/>
           </a:prstGeom>
           <a:solidFill>
-            <a:srgbClr val="1A1D27"/>
+            <a:srgbClr val="0891B2">
+              <a:alpha val="8000"/>
+            </a:srgbClr>
           </a:solidFill>
           <a:ln w="19050">
             <a:solidFill>
-              <a:srgbClr val="38BDF8"/>
+              <a:srgbClr val="0891B2"/>
             </a:solidFill>
             <a:prstDash val="solid"/>
           </a:ln>
@@ -2783,7 +2791,7 @@
             <a:r>
               <a:rPr lang="en-US" sz="1200" b="1" dirty="0">
                 <a:solidFill>
-                  <a:srgbClr val="38BDF8"/>
+                  <a:srgbClr val="0891B2"/>
                 </a:solidFill>
                 <a:latin typeface="Apple SD Gothic Neo" pitchFamily="34" charset="0"/>
                 <a:ea typeface="Apple SD Gothic Neo" pitchFamily="34" charset="-122"/>
@@ -2822,7 +2830,7 @@
             <a:r>
               <a:rPr lang="en-US" sz="1600" dirty="0">
                 <a:solidFill>
-                  <a:srgbClr val="4E8CFF"/>
+                  <a:srgbClr val="2563EB"/>
                 </a:solidFill>
                 <a:latin typeface="Apple SD Gothic Neo" pitchFamily="34" charset="0"/>
                 <a:ea typeface="Apple SD Gothic Neo" pitchFamily="34" charset="-122"/>
@@ -2849,11 +2857,13 @@
             <a:avLst/>
           </a:prstGeom>
           <a:solidFill>
-            <a:srgbClr val="1A1D27"/>
+            <a:srgbClr val="EA580C">
+              <a:alpha val="8000"/>
+            </a:srgbClr>
           </a:solidFill>
           <a:ln w="19050">
             <a:solidFill>
-              <a:srgbClr val="FB923C"/>
+              <a:srgbClr val="EA580C"/>
             </a:solidFill>
             <a:prstDash val="solid"/>
           </a:ln>
@@ -2886,7 +2896,7 @@
             <a:r>
               <a:rPr lang="en-US" sz="1200" b="1" dirty="0">
                 <a:solidFill>
-                  <a:srgbClr val="FB923C"/>
+                  <a:srgbClr val="EA580C"/>
                 </a:solidFill>
                 <a:latin typeface="Apple SD Gothic Neo" pitchFamily="34" charset="0"/>
                 <a:ea typeface="Apple SD Gothic Neo" pitchFamily="34" charset="-122"/>
@@ -2925,7 +2935,7 @@
             <a:r>
               <a:rPr lang="en-US" sz="1200" b="1" dirty="0">
                 <a:solidFill>
-                  <a:srgbClr val="34D399"/>
+                  <a:srgbClr val="059669"/>
                 </a:solidFill>
                 <a:latin typeface="Apple SD Gothic Neo" pitchFamily="34" charset="0"/>
                 <a:ea typeface="Apple SD Gothic Neo" pitchFamily="34" charset="-122"/>
@@ -2952,11 +2962,13 @@
             <a:avLst/>
           </a:prstGeom>
           <a:solidFill>
-            <a:srgbClr val="1A1D27"/>
+            <a:srgbClr val="059669">
+              <a:alpha val="8000"/>
+            </a:srgbClr>
           </a:solidFill>
           <a:ln w="19050">
             <a:solidFill>
-              <a:srgbClr val="34D399"/>
+              <a:srgbClr val="059669"/>
             </a:solidFill>
             <a:prstDash val="solid"/>
           </a:ln>
@@ -2989,7 +3001,7 @@
             <a:r>
               <a:rPr lang="en-US" sz="1200" b="1" dirty="0">
                 <a:solidFill>
-                  <a:srgbClr val="34D399"/>
+                  <a:srgbClr val="059669"/>
                 </a:solidFill>
                 <a:latin typeface="Apple SD Gothic Neo" pitchFamily="34" charset="0"/>
                 <a:ea typeface="Apple SD Gothic Neo" pitchFamily="34" charset="-122"/>
@@ -3028,7 +3040,7 @@
             <a:r>
               <a:rPr lang="en-US" sz="1600" dirty="0">
                 <a:solidFill>
-                  <a:srgbClr val="4E8CFF"/>
+                  <a:srgbClr val="2563EB"/>
                 </a:solidFill>
                 <a:latin typeface="Apple SD Gothic Neo" pitchFamily="34" charset="0"/>
                 <a:ea typeface="Apple SD Gothic Neo" pitchFamily="34" charset="-122"/>
@@ -3055,11 +3067,13 @@
             <a:avLst/>
           </a:prstGeom>
           <a:solidFill>
-            <a:srgbClr val="1A1D27"/>
+            <a:srgbClr val="7C3AED">
+              <a:alpha val="8000"/>
+            </a:srgbClr>
           </a:solidFill>
           <a:ln w="19050">
             <a:solidFill>
-              <a:srgbClr val="A78BFA"/>
+              <a:srgbClr val="7C3AED"/>
             </a:solidFill>
             <a:prstDash val="solid"/>
           </a:ln>
@@ -3092,7 +3106,7 @@
             <a:r>
               <a:rPr lang="en-US" sz="1200" b="1" dirty="0">
                 <a:solidFill>
-                  <a:srgbClr val="A78BFA"/>
+                  <a:srgbClr val="7C3AED"/>
                 </a:solidFill>
                 <a:latin typeface="Apple SD Gothic Neo" pitchFamily="34" charset="0"/>
                 <a:ea typeface="Apple SD Gothic Neo" pitchFamily="34" charset="-122"/>
@@ -3131,7 +3145,7 @@
             <a:r>
               <a:rPr lang="en-US" sz="1600" dirty="0">
                 <a:solidFill>
-                  <a:srgbClr val="4E8CFF"/>
+                  <a:srgbClr val="2563EB"/>
                 </a:solidFill>
                 <a:latin typeface="Apple SD Gothic Neo" pitchFamily="34" charset="0"/>
                 <a:ea typeface="Apple SD Gothic Neo" pitchFamily="34" charset="-122"/>
@@ -3158,11 +3172,13 @@
             <a:avLst/>
           </a:prstGeom>
           <a:solidFill>
-            <a:srgbClr val="1A1D27"/>
+            <a:srgbClr val="D97706">
+              <a:alpha val="8000"/>
+            </a:srgbClr>
           </a:solidFill>
           <a:ln w="19050">
             <a:solidFill>
-              <a:srgbClr val="FBBF24"/>
+              <a:srgbClr val="D97706"/>
             </a:solidFill>
             <a:prstDash val="solid"/>
           </a:ln>
@@ -3195,7 +3211,7 @@
             <a:r>
               <a:rPr lang="en-US" sz="1200" b="1" dirty="0">
                 <a:solidFill>
-                  <a:srgbClr val="FBBF24"/>
+                  <a:srgbClr val="D97706"/>
                 </a:solidFill>
                 <a:latin typeface="Apple SD Gothic Neo" pitchFamily="34" charset="0"/>
                 <a:ea typeface="Apple SD Gothic Neo" pitchFamily="34" charset="-122"/>
@@ -3234,7 +3250,7 @@
             <a:r>
               <a:rPr lang="en-US" sz="1600" dirty="0">
                 <a:solidFill>
-                  <a:srgbClr val="4E8CFF"/>
+                  <a:srgbClr val="2563EB"/>
                 </a:solidFill>
                 <a:latin typeface="Apple SD Gothic Neo" pitchFamily="34" charset="0"/>
                 <a:ea typeface="Apple SD Gothic Neo" pitchFamily="34" charset="-122"/>
@@ -3261,11 +3277,13 @@
             <a:avLst/>
           </a:prstGeom>
           <a:solidFill>
-            <a:srgbClr val="1A1D27"/>
+            <a:srgbClr val="EA580C">
+              <a:alpha val="8000"/>
+            </a:srgbClr>
           </a:solidFill>
           <a:ln w="19050">
             <a:solidFill>
-              <a:srgbClr val="FB923C"/>
+              <a:srgbClr val="EA580C"/>
             </a:solidFill>
             <a:prstDash val="solid"/>
           </a:ln>
@@ -3298,7 +3316,7 @@
             <a:r>
               <a:rPr lang="en-US" sz="1200" b="1" dirty="0">
                 <a:solidFill>
-                  <a:srgbClr val="FB923C"/>
+                  <a:srgbClr val="EA580C"/>
                 </a:solidFill>
                 <a:latin typeface="Apple SD Gothic Neo" pitchFamily="34" charset="0"/>
                 <a:ea typeface="Apple SD Gothic Neo" pitchFamily="34" charset="-122"/>
@@ -3327,7 +3345,7 @@
           <a:noFill/>
           <a:ln w="12700">
             <a:solidFill>
-              <a:srgbClr val="2A2D3A"/>
+              <a:srgbClr val="D1D5E0"/>
             </a:solidFill>
             <a:prstDash val="solid"/>
           </a:ln>
@@ -3360,7 +3378,7 @@
             <a:r>
               <a:rPr lang="en-US" sz="1400" b="1" dirty="0">
                 <a:solidFill>
-                  <a:srgbClr val="E4E6ED"/>
+                  <a:srgbClr val="1E2030"/>
                 </a:solidFill>
                 <a:latin typeface="Apple SD Gothic Neo" pitchFamily="34" charset="0"/>
                 <a:ea typeface="Apple SD Gothic Neo" pitchFamily="34" charset="-122"/>
@@ -3399,7 +3417,7 @@
             <a:r>
               <a:rPr lang="en-US" sz="1200" dirty="0">
                 <a:solidFill>
-                  <a:srgbClr val="8B8FA3"/>
+                  <a:srgbClr val="4B5068"/>
                 </a:solidFill>
                 <a:latin typeface="Apple SD Gothic Neo" pitchFamily="34" charset="0"/>
                 <a:ea typeface="Apple SD Gothic Neo" pitchFamily="34" charset="-122"/>
@@ -3426,9 +3444,14 @@
             <a:avLst/>
           </a:prstGeom>
           <a:solidFill>
-            <a:srgbClr val="0D3320"/>
+            <a:srgbClr val="ECFDF5"/>
           </a:solidFill>
-          <a:ln/>
+          <a:ln w="9525">
+            <a:solidFill>
+              <a:srgbClr val="D1D5E0"/>
+            </a:solidFill>
+            <a:prstDash val="solid"/>
+          </a:ln>
         </p:spPr>
       </p:sp>
       <p:sp>
@@ -3458,7 +3481,7 @@
             <a:r>
               <a:rPr lang="en-US" sz="1500" b="1" dirty="0">
                 <a:solidFill>
-                  <a:srgbClr val="34D399"/>
+                  <a:srgbClr val="059669"/>
                 </a:solidFill>
                 <a:latin typeface="Apple SD Gothic Neo" pitchFamily="34" charset="0"/>
                 <a:ea typeface="Apple SD Gothic Neo" pitchFamily="34" charset="-122"/>
@@ -3484,7 +3507,7 @@
     <p:bg>
       <p:bgPr>
         <a:solidFill>
-          <a:srgbClr val="0F1117"/>
+          <a:srgbClr val="FFFFFF"/>
         </a:solidFill>
       </p:bgPr>
     </p:bg>
@@ -3517,7 +3540,7 @@
             <a:avLst/>
           </a:prstGeom>
           <a:solidFill>
-            <a:srgbClr val="FBBF24"/>
+            <a:srgbClr val="D97706"/>
           </a:solidFill>
           <a:ln/>
         </p:spPr>
@@ -3549,7 +3572,7 @@
             <a:r>
               <a:rPr lang="en-US" sz="2400" b="1" dirty="0">
                 <a:solidFill>
-                  <a:srgbClr val="E4E6ED"/>
+                  <a:srgbClr val="1E2030"/>
                 </a:solidFill>
                 <a:latin typeface="Apple SD Gothic Neo" pitchFamily="34" charset="0"/>
                 <a:ea typeface="Apple SD Gothic Neo" pitchFamily="34" charset="-122"/>
@@ -3588,7 +3611,7 @@
             <a:r>
               <a:rPr lang="en-US" sz="1300" dirty="0">
                 <a:solidFill>
-                  <a:srgbClr val="FBBF24"/>
+                  <a:srgbClr val="D97706"/>
                 </a:solidFill>
                 <a:latin typeface="Apple SD Gothic Neo" pitchFamily="34" charset="0"/>
                 <a:ea typeface="Apple SD Gothic Neo" pitchFamily="34" charset="-122"/>
@@ -3627,7 +3650,7 @@
             <a:r>
               <a:rPr lang="en-US" sz="1300" b="1" dirty="0">
                 <a:solidFill>
-                  <a:srgbClr val="34D399"/>
+                  <a:srgbClr val="059669"/>
                 </a:solidFill>
                 <a:latin typeface="Apple SD Gothic Neo" pitchFamily="34" charset="0"/>
                 <a:ea typeface="Apple SD Gothic Neo" pitchFamily="34" charset="-122"/>
@@ -3654,7 +3677,7 @@
             <a:avLst/>
           </a:prstGeom>
           <a:solidFill>
-            <a:srgbClr val="34D399">
+            <a:srgbClr val="059669">
               <a:alpha val="70000"/>
             </a:srgbClr>
           </a:solidFill>
@@ -3688,7 +3711,7 @@
             <a:r>
               <a:rPr lang="en-US" sz="800" dirty="0">
                 <a:solidFill>
-                  <a:srgbClr val="8B8FA3"/>
+                  <a:srgbClr val="4B5068"/>
                 </a:solidFill>
                 <a:latin typeface="Apple SD Gothic Neo" pitchFamily="34" charset="0"/>
                 <a:ea typeface="Apple SD Gothic Neo" pitchFamily="34" charset="-122"/>
@@ -3727,7 +3750,7 @@
             <a:r>
               <a:rPr lang="en-US" sz="800" dirty="0">
                 <a:solidFill>
-                  <a:srgbClr val="8B8FA3"/>
+                  <a:srgbClr val="4B5068"/>
                 </a:solidFill>
                 <a:latin typeface="Apple SD Gothic Neo" pitchFamily="34" charset="0"/>
                 <a:ea typeface="Apple SD Gothic Neo" pitchFamily="34" charset="-122"/>
@@ -3754,7 +3777,7 @@
             <a:avLst/>
           </a:prstGeom>
           <a:solidFill>
-            <a:srgbClr val="34D399">
+            <a:srgbClr val="059669">
               <a:alpha val="70000"/>
             </a:srgbClr>
           </a:solidFill>
@@ -3788,7 +3811,7 @@
             <a:r>
               <a:rPr lang="en-US" sz="800" dirty="0">
                 <a:solidFill>
-                  <a:srgbClr val="8B8FA3"/>
+                  <a:srgbClr val="4B5068"/>
                 </a:solidFill>
                 <a:latin typeface="Apple SD Gothic Neo" pitchFamily="34" charset="0"/>
                 <a:ea typeface="Apple SD Gothic Neo" pitchFamily="34" charset="-122"/>
@@ -3827,7 +3850,7 @@
             <a:r>
               <a:rPr lang="en-US" sz="800" dirty="0">
                 <a:solidFill>
-                  <a:srgbClr val="8B8FA3"/>
+                  <a:srgbClr val="4B5068"/>
                 </a:solidFill>
                 <a:latin typeface="Apple SD Gothic Neo" pitchFamily="34" charset="0"/>
                 <a:ea typeface="Apple SD Gothic Neo" pitchFamily="34" charset="-122"/>
@@ -3854,7 +3877,7 @@
             <a:avLst/>
           </a:prstGeom>
           <a:solidFill>
-            <a:srgbClr val="34D399">
+            <a:srgbClr val="059669">
               <a:alpha val="70000"/>
             </a:srgbClr>
           </a:solidFill>
@@ -3888,7 +3911,7 @@
             <a:r>
               <a:rPr lang="en-US" sz="800" dirty="0">
                 <a:solidFill>
-                  <a:srgbClr val="8B8FA3"/>
+                  <a:srgbClr val="4B5068"/>
                 </a:solidFill>
                 <a:latin typeface="Apple SD Gothic Neo" pitchFamily="34" charset="0"/>
                 <a:ea typeface="Apple SD Gothic Neo" pitchFamily="34" charset="-122"/>
@@ -3927,7 +3950,7 @@
             <a:r>
               <a:rPr lang="en-US" sz="800" dirty="0">
                 <a:solidFill>
-                  <a:srgbClr val="8B8FA3"/>
+                  <a:srgbClr val="4B5068"/>
                 </a:solidFill>
                 <a:latin typeface="Apple SD Gothic Neo" pitchFamily="34" charset="0"/>
                 <a:ea typeface="Apple SD Gothic Neo" pitchFamily="34" charset="-122"/>
@@ -3954,7 +3977,7 @@
             <a:avLst/>
           </a:prstGeom>
           <a:solidFill>
-            <a:srgbClr val="34D399">
+            <a:srgbClr val="059669">
               <a:alpha val="70000"/>
             </a:srgbClr>
           </a:solidFill>
@@ -3988,7 +4011,7 @@
             <a:r>
               <a:rPr lang="en-US" sz="800" dirty="0">
                 <a:solidFill>
-                  <a:srgbClr val="8B8FA3"/>
+                  <a:srgbClr val="4B5068"/>
                 </a:solidFill>
                 <a:latin typeface="Apple SD Gothic Neo" pitchFamily="34" charset="0"/>
                 <a:ea typeface="Apple SD Gothic Neo" pitchFamily="34" charset="-122"/>
@@ -4027,7 +4050,7 @@
             <a:r>
               <a:rPr lang="en-US" sz="800" dirty="0">
                 <a:solidFill>
-                  <a:srgbClr val="8B8FA3"/>
+                  <a:srgbClr val="4B5068"/>
                 </a:solidFill>
                 <a:latin typeface="Apple SD Gothic Neo" pitchFamily="34" charset="0"/>
                 <a:ea typeface="Apple SD Gothic Neo" pitchFamily="34" charset="-122"/>
@@ -4054,7 +4077,7 @@
             <a:avLst/>
           </a:prstGeom>
           <a:solidFill>
-            <a:srgbClr val="34D399">
+            <a:srgbClr val="059669">
               <a:alpha val="70000"/>
             </a:srgbClr>
           </a:solidFill>
@@ -4088,7 +4111,7 @@
             <a:r>
               <a:rPr lang="en-US" sz="800" dirty="0">
                 <a:solidFill>
-                  <a:srgbClr val="8B8FA3"/>
+                  <a:srgbClr val="4B5068"/>
                 </a:solidFill>
                 <a:latin typeface="Apple SD Gothic Neo" pitchFamily="34" charset="0"/>
                 <a:ea typeface="Apple SD Gothic Neo" pitchFamily="34" charset="-122"/>
@@ -4127,7 +4150,7 @@
             <a:r>
               <a:rPr lang="en-US" sz="800" dirty="0">
                 <a:solidFill>
-                  <a:srgbClr val="8B8FA3"/>
+                  <a:srgbClr val="4B5068"/>
                 </a:solidFill>
                 <a:latin typeface="Apple SD Gothic Neo" pitchFamily="34" charset="0"/>
                 <a:ea typeface="Apple SD Gothic Neo" pitchFamily="34" charset="-122"/>
@@ -4154,7 +4177,7 @@
             <a:avLst/>
           </a:prstGeom>
           <a:solidFill>
-            <a:srgbClr val="34D399">
+            <a:srgbClr val="059669">
               <a:alpha val="70000"/>
             </a:srgbClr>
           </a:solidFill>
@@ -4188,7 +4211,7 @@
             <a:r>
               <a:rPr lang="en-US" sz="800" dirty="0">
                 <a:solidFill>
-                  <a:srgbClr val="8B8FA3"/>
+                  <a:srgbClr val="4B5068"/>
                 </a:solidFill>
                 <a:latin typeface="Apple SD Gothic Neo" pitchFamily="34" charset="0"/>
                 <a:ea typeface="Apple SD Gothic Neo" pitchFamily="34" charset="-122"/>
@@ -4227,7 +4250,7 @@
             <a:r>
               <a:rPr lang="en-US" sz="800" dirty="0">
                 <a:solidFill>
-                  <a:srgbClr val="8B8FA3"/>
+                  <a:srgbClr val="4B5068"/>
                 </a:solidFill>
                 <a:latin typeface="Apple SD Gothic Neo" pitchFamily="34" charset="0"/>
                 <a:ea typeface="Apple SD Gothic Neo" pitchFamily="34" charset="-122"/>
@@ -4266,7 +4289,7 @@
             <a:r>
               <a:rPr lang="en-US" sz="1300" b="1" dirty="0">
                 <a:solidFill>
-                  <a:srgbClr val="F87171"/>
+                  <a:srgbClr val="DC2626"/>
                 </a:solidFill>
                 <a:latin typeface="Apple SD Gothic Neo" pitchFamily="34" charset="0"/>
                 <a:ea typeface="Apple SD Gothic Neo" pitchFamily="34" charset="-122"/>
@@ -4293,7 +4316,7 @@
             <a:avLst/>
           </a:prstGeom>
           <a:solidFill>
-            <a:srgbClr val="F87171">
+            <a:srgbClr val="DC2626">
               <a:alpha val="70000"/>
             </a:srgbClr>
           </a:solidFill>
@@ -4327,7 +4350,7 @@
             <a:r>
               <a:rPr lang="en-US" sz="800" dirty="0">
                 <a:solidFill>
-                  <a:srgbClr val="8B8FA3"/>
+                  <a:srgbClr val="4B5068"/>
                 </a:solidFill>
                 <a:latin typeface="Apple SD Gothic Neo" pitchFamily="34" charset="0"/>
                 <a:ea typeface="Apple SD Gothic Neo" pitchFamily="34" charset="-122"/>
@@ -4366,7 +4389,7 @@
             <a:r>
               <a:rPr lang="en-US" sz="800" dirty="0">
                 <a:solidFill>
-                  <a:srgbClr val="8B8FA3"/>
+                  <a:srgbClr val="4B5068"/>
                 </a:solidFill>
                 <a:latin typeface="Apple SD Gothic Neo" pitchFamily="34" charset="0"/>
                 <a:ea typeface="Apple SD Gothic Neo" pitchFamily="34" charset="-122"/>
@@ -4393,7 +4416,7 @@
             <a:avLst/>
           </a:prstGeom>
           <a:solidFill>
-            <a:srgbClr val="F87171">
+            <a:srgbClr val="DC2626">
               <a:alpha val="70000"/>
             </a:srgbClr>
           </a:solidFill>
@@ -4427,7 +4450,7 @@
             <a:r>
               <a:rPr lang="en-US" sz="800" dirty="0">
                 <a:solidFill>
-                  <a:srgbClr val="8B8FA3"/>
+                  <a:srgbClr val="4B5068"/>
                 </a:solidFill>
                 <a:latin typeface="Apple SD Gothic Neo" pitchFamily="34" charset="0"/>
                 <a:ea typeface="Apple SD Gothic Neo" pitchFamily="34" charset="-122"/>
@@ -4466,7 +4489,7 @@
             <a:r>
               <a:rPr lang="en-US" sz="800" dirty="0">
                 <a:solidFill>
-                  <a:srgbClr val="8B8FA3"/>
+                  <a:srgbClr val="4B5068"/>
                 </a:solidFill>
                 <a:latin typeface="Apple SD Gothic Neo" pitchFamily="34" charset="0"/>
                 <a:ea typeface="Apple SD Gothic Neo" pitchFamily="34" charset="-122"/>
@@ -4493,7 +4516,7 @@
             <a:avLst/>
           </a:prstGeom>
           <a:solidFill>
-            <a:srgbClr val="F87171">
+            <a:srgbClr val="DC2626">
               <a:alpha val="70000"/>
             </a:srgbClr>
           </a:solidFill>
@@ -4527,7 +4550,7 @@
             <a:r>
               <a:rPr lang="en-US" sz="800" dirty="0">
                 <a:solidFill>
-                  <a:srgbClr val="8B8FA3"/>
+                  <a:srgbClr val="4B5068"/>
                 </a:solidFill>
                 <a:latin typeface="Apple SD Gothic Neo" pitchFamily="34" charset="0"/>
                 <a:ea typeface="Apple SD Gothic Neo" pitchFamily="34" charset="-122"/>
@@ -4566,7 +4589,7 @@
             <a:r>
               <a:rPr lang="en-US" sz="800" dirty="0">
                 <a:solidFill>
-                  <a:srgbClr val="8B8FA3"/>
+                  <a:srgbClr val="4B5068"/>
                 </a:solidFill>
                 <a:latin typeface="Apple SD Gothic Neo" pitchFamily="34" charset="0"/>
                 <a:ea typeface="Apple SD Gothic Neo" pitchFamily="34" charset="-122"/>
@@ -4593,7 +4616,7 @@
             <a:avLst/>
           </a:prstGeom>
           <a:solidFill>
-            <a:srgbClr val="F87171">
+            <a:srgbClr val="DC2626">
               <a:alpha val="70000"/>
             </a:srgbClr>
           </a:solidFill>
@@ -4627,7 +4650,7 @@
             <a:r>
               <a:rPr lang="en-US" sz="800" dirty="0">
                 <a:solidFill>
-                  <a:srgbClr val="8B8FA3"/>
+                  <a:srgbClr val="4B5068"/>
                 </a:solidFill>
                 <a:latin typeface="Apple SD Gothic Neo" pitchFamily="34" charset="0"/>
                 <a:ea typeface="Apple SD Gothic Neo" pitchFamily="34" charset="-122"/>
@@ -4666,7 +4689,7 @@
             <a:r>
               <a:rPr lang="en-US" sz="800" dirty="0">
                 <a:solidFill>
-                  <a:srgbClr val="8B8FA3"/>
+                  <a:srgbClr val="4B5068"/>
                 </a:solidFill>
                 <a:latin typeface="Apple SD Gothic Neo" pitchFamily="34" charset="0"/>
                 <a:ea typeface="Apple SD Gothic Neo" pitchFamily="34" charset="-122"/>
@@ -4693,7 +4716,7 @@
             <a:avLst/>
           </a:prstGeom>
           <a:solidFill>
-            <a:srgbClr val="F87171">
+            <a:srgbClr val="DC2626">
               <a:alpha val="70000"/>
             </a:srgbClr>
           </a:solidFill>
@@ -4727,7 +4750,7 @@
             <a:r>
               <a:rPr lang="en-US" sz="800" dirty="0">
                 <a:solidFill>
-                  <a:srgbClr val="8B8FA3"/>
+                  <a:srgbClr val="4B5068"/>
                 </a:solidFill>
                 <a:latin typeface="Apple SD Gothic Neo" pitchFamily="34" charset="0"/>
                 <a:ea typeface="Apple SD Gothic Neo" pitchFamily="34" charset="-122"/>
@@ -4766,7 +4789,7 @@
             <a:r>
               <a:rPr lang="en-US" sz="800" dirty="0">
                 <a:solidFill>
-                  <a:srgbClr val="8B8FA3"/>
+                  <a:srgbClr val="4B5068"/>
                 </a:solidFill>
                 <a:latin typeface="Apple SD Gothic Neo" pitchFamily="34" charset="0"/>
                 <a:ea typeface="Apple SD Gothic Neo" pitchFamily="34" charset="-122"/>
@@ -4793,7 +4816,7 @@
             <a:avLst/>
           </a:prstGeom>
           <a:solidFill>
-            <a:srgbClr val="F87171">
+            <a:srgbClr val="DC2626">
               <a:alpha val="70000"/>
             </a:srgbClr>
           </a:solidFill>
@@ -4827,7 +4850,7 @@
             <a:r>
               <a:rPr lang="en-US" sz="800" dirty="0">
                 <a:solidFill>
-                  <a:srgbClr val="8B8FA3"/>
+                  <a:srgbClr val="4B5068"/>
                 </a:solidFill>
                 <a:latin typeface="Apple SD Gothic Neo" pitchFamily="34" charset="0"/>
                 <a:ea typeface="Apple SD Gothic Neo" pitchFamily="34" charset="-122"/>
@@ -4866,7 +4889,7 @@
             <a:r>
               <a:rPr lang="en-US" sz="800" dirty="0">
                 <a:solidFill>
-                  <a:srgbClr val="8B8FA3"/>
+                  <a:srgbClr val="4B5068"/>
                 </a:solidFill>
                 <a:latin typeface="Apple SD Gothic Neo" pitchFamily="34" charset="0"/>
                 <a:ea typeface="Apple SD Gothic Neo" pitchFamily="34" charset="-122"/>
@@ -4895,7 +4918,7 @@
           <a:noFill/>
           <a:ln w="12700">
             <a:solidFill>
-              <a:srgbClr val="2A2D3A"/>
+              <a:srgbClr val="D1D5E0"/>
             </a:solidFill>
             <a:prstDash val="solid"/>
           </a:ln>
@@ -4928,7 +4951,7 @@
             <a:r>
               <a:rPr lang="en-US" sz="1400" b="1" dirty="0">
                 <a:solidFill>
-                  <a:srgbClr val="E4E6ED"/>
+                  <a:srgbClr val="1E2030"/>
                 </a:solidFill>
                 <a:latin typeface="Apple SD Gothic Neo" pitchFamily="34" charset="0"/>
                 <a:ea typeface="Apple SD Gothic Neo" pitchFamily="34" charset="-122"/>
@@ -4967,7 +4990,7 @@
             <a:r>
               <a:rPr lang="en-US" sz="1200" dirty="0">
                 <a:solidFill>
-                  <a:srgbClr val="34D399"/>
+                  <a:srgbClr val="059669"/>
                 </a:solidFill>
                 <a:latin typeface="Apple SD Gothic Neo" pitchFamily="34" charset="0"/>
                 <a:ea typeface="Apple SD Gothic Neo" pitchFamily="34" charset="-122"/>
@@ -5006,7 +5029,7 @@
             <a:r>
               <a:rPr lang="en-US" sz="1200" dirty="0">
                 <a:solidFill>
-                  <a:srgbClr val="F87171"/>
+                  <a:srgbClr val="DC2626"/>
                 </a:solidFill>
                 <a:latin typeface="Apple SD Gothic Neo" pitchFamily="34" charset="0"/>
                 <a:ea typeface="Apple SD Gothic Neo" pitchFamily="34" charset="-122"/>
@@ -5032,7 +5055,7 @@
     <p:bg>
       <p:bgPr>
         <a:solidFill>
-          <a:srgbClr val="0F1117"/>
+          <a:srgbClr val="FFFFFF"/>
         </a:solidFill>
       </p:bgPr>
     </p:bg>
@@ -5065,7 +5088,7 @@
             <a:avLst/>
           </a:prstGeom>
           <a:solidFill>
-            <a:srgbClr val="F87171"/>
+            <a:srgbClr val="DC2626"/>
           </a:solidFill>
           <a:ln/>
         </p:spPr>
@@ -5097,7 +5120,7 @@
             <a:r>
               <a:rPr lang="en-US" sz="2400" b="1" dirty="0">
                 <a:solidFill>
-                  <a:srgbClr val="E4E6ED"/>
+                  <a:srgbClr val="1E2030"/>
                 </a:solidFill>
                 <a:latin typeface="Apple SD Gothic Neo" pitchFamily="34" charset="0"/>
                 <a:ea typeface="Apple SD Gothic Neo" pitchFamily="34" charset="-122"/>
@@ -5136,7 +5159,7 @@
             <a:r>
               <a:rPr lang="en-US" sz="1300" dirty="0">
                 <a:solidFill>
-                  <a:srgbClr val="F87171"/>
+                  <a:srgbClr val="DC2626"/>
                 </a:solidFill>
                 <a:latin typeface="Apple SD Gothic Neo" pitchFamily="34" charset="0"/>
                 <a:ea typeface="Apple SD Gothic Neo" pitchFamily="34" charset="-122"/>
@@ -5175,7 +5198,7 @@
             <a:r>
               <a:rPr lang="en-US" sz="1200" b="1" dirty="0">
                 <a:solidFill>
-                  <a:srgbClr val="4E8CFF"/>
+                  <a:srgbClr val="2563EB"/>
                 </a:solidFill>
                 <a:latin typeface="Apple SD Gothic Neo" pitchFamily="34" charset="0"/>
                 <a:ea typeface="Apple SD Gothic Neo" pitchFamily="34" charset="-122"/>
@@ -5202,13 +5225,13 @@
             <a:avLst/>
           </a:prstGeom>
           <a:solidFill>
-            <a:srgbClr val="4E8CFF">
+            <a:srgbClr val="2563EB">
               <a:alpha val="12000"/>
             </a:srgbClr>
           </a:solidFill>
           <a:ln w="25400">
             <a:solidFill>
-              <a:srgbClr val="4E8CFF"/>
+              <a:srgbClr val="2563EB"/>
             </a:solidFill>
             <a:prstDash val="solid"/>
           </a:ln>
@@ -5244,7 +5267,7 @@
             <a:r>
               <a:rPr lang="en-US" sz="900" dirty="0">
                 <a:solidFill>
-                  <a:srgbClr val="4E8CFF"/>
+                  <a:srgbClr val="2563EB"/>
                 </a:solidFill>
                 <a:latin typeface="Apple SD Gothic Neo" pitchFamily="34" charset="0"/>
                 <a:ea typeface="Apple SD Gothic Neo" pitchFamily="34" charset="-122"/>
@@ -5264,7 +5287,7 @@
             <a:r>
               <a:rPr lang="en-US" sz="900" dirty="0">
                 <a:solidFill>
-                  <a:srgbClr val="4E8CFF"/>
+                  <a:srgbClr val="2563EB"/>
                 </a:solidFill>
                 <a:latin typeface="Apple SD Gothic Neo" pitchFamily="34" charset="0"/>
                 <a:ea typeface="Apple SD Gothic Neo" pitchFamily="34" charset="-122"/>
@@ -5303,7 +5326,7 @@
             <a:r>
               <a:rPr lang="en-US" sz="1200" b="1" dirty="0">
                 <a:solidFill>
-                  <a:srgbClr val="34D399"/>
+                  <a:srgbClr val="059669"/>
                 </a:solidFill>
                 <a:latin typeface="Apple SD Gothic Neo" pitchFamily="34" charset="0"/>
                 <a:ea typeface="Apple SD Gothic Neo" pitchFamily="34" charset="-122"/>
@@ -5330,13 +5353,13 @@
             <a:avLst/>
           </a:prstGeom>
           <a:solidFill>
-            <a:srgbClr val="34D399">
+            <a:srgbClr val="059669">
               <a:alpha val="12000"/>
             </a:srgbClr>
           </a:solidFill>
           <a:ln w="25400">
             <a:solidFill>
-              <a:srgbClr val="34D399"/>
+              <a:srgbClr val="059669"/>
             </a:solidFill>
             <a:prstDash val="solid"/>
           </a:ln>
@@ -5372,7 +5395,7 @@
             <a:r>
               <a:rPr lang="en-US" sz="900" dirty="0">
                 <a:solidFill>
-                  <a:srgbClr val="34D399"/>
+                  <a:srgbClr val="059669"/>
                 </a:solidFill>
                 <a:latin typeface="Apple SD Gothic Neo" pitchFamily="34" charset="0"/>
                 <a:ea typeface="Apple SD Gothic Neo" pitchFamily="34" charset="-122"/>
@@ -5392,7 +5415,7 @@
             <a:r>
               <a:rPr lang="en-US" sz="900" dirty="0">
                 <a:solidFill>
-                  <a:srgbClr val="34D399"/>
+                  <a:srgbClr val="059669"/>
                 </a:solidFill>
                 <a:latin typeface="Apple SD Gothic Neo" pitchFamily="34" charset="0"/>
                 <a:ea typeface="Apple SD Gothic Neo" pitchFamily="34" charset="-122"/>
@@ -5434,7 +5457,7 @@
             <a:r>
               <a:rPr lang="en-US" sz="900" dirty="0">
                 <a:solidFill>
-                  <a:srgbClr val="FBBF24"/>
+                  <a:srgbClr val="D97706"/>
                 </a:solidFill>
                 <a:latin typeface="Apple SD Gothic Neo" pitchFamily="34" charset="0"/>
                 <a:ea typeface="Apple SD Gothic Neo" pitchFamily="34" charset="-122"/>
@@ -5454,7 +5477,7 @@
             <a:r>
               <a:rPr lang="en-US" sz="900" dirty="0">
                 <a:solidFill>
-                  <a:srgbClr val="FBBF24"/>
+                  <a:srgbClr val="D97706"/>
                 </a:solidFill>
                 <a:latin typeface="Apple SD Gothic Neo" pitchFamily="34" charset="0"/>
                 <a:ea typeface="Apple SD Gothic Neo" pitchFamily="34" charset="-122"/>
@@ -5474,7 +5497,7 @@
             <a:r>
               <a:rPr lang="en-US" sz="900" dirty="0">
                 <a:solidFill>
-                  <a:srgbClr val="FBBF24"/>
+                  <a:srgbClr val="D97706"/>
                 </a:solidFill>
                 <a:latin typeface="Apple SD Gothic Neo" pitchFamily="34" charset="0"/>
                 <a:ea typeface="Apple SD Gothic Neo" pitchFamily="34" charset="-122"/>
@@ -5494,7 +5517,7 @@
             <a:r>
               <a:rPr lang="en-US" sz="900" dirty="0">
                 <a:solidFill>
-                  <a:srgbClr val="FBBF24"/>
+                  <a:srgbClr val="D97706"/>
                 </a:solidFill>
                 <a:latin typeface="Apple SD Gothic Neo" pitchFamily="34" charset="0"/>
                 <a:ea typeface="Apple SD Gothic Neo" pitchFamily="34" charset="-122"/>
@@ -5514,7 +5537,7 @@
             <a:r>
               <a:rPr lang="en-US" sz="900" dirty="0">
                 <a:solidFill>
-                  <a:srgbClr val="FBBF24"/>
+                  <a:srgbClr val="D97706"/>
                 </a:solidFill>
                 <a:latin typeface="Apple SD Gothic Neo" pitchFamily="34" charset="0"/>
                 <a:ea typeface="Apple SD Gothic Neo" pitchFamily="34" charset="-122"/>
@@ -5553,7 +5576,7 @@
             <a:r>
               <a:rPr lang="en-US" sz="900" dirty="0">
                 <a:solidFill>
-                  <a:srgbClr val="FBBF24"/>
+                  <a:srgbClr val="D97706"/>
                 </a:solidFill>
                 <a:latin typeface="Apple SD Gothic Neo" pitchFamily="34" charset="0"/>
                 <a:ea typeface="Apple SD Gothic Neo" pitchFamily="34" charset="-122"/>
@@ -5580,13 +5603,18 @@
             <a:avLst/>
           </a:prstGeom>
           <a:solidFill>
-            <a:srgbClr val="1A1D27"/>
+            <a:srgbClr val="F3F4F8"/>
           </a:solidFill>
-          <a:ln/>
+          <a:ln w="9525">
+            <a:solidFill>
+              <a:srgbClr val="D1D5E0"/>
+            </a:solidFill>
+            <a:prstDash val="solid"/>
+          </a:ln>
           <a:effectLst>
-            <a:outerShdw sx="100000" sy="100000" kx="0" ky="0" algn="bl" rotWithShape="0" blurRad="76200" dist="25400" dir="8100000">
-              <a:srgbClr val="000000">
-                <a:alpha val="20000"/>
+            <a:outerShdw sx="100000" sy="100000" kx="0" ky="0" algn="bl" rotWithShape="0" blurRad="50800" dist="12700" dir="8100000">
+              <a:srgbClr val="B0B8C8">
+                <a:alpha val="15000"/>
               </a:srgbClr>
             </a:outerShdw>
           </a:effectLst>
@@ -5619,7 +5647,7 @@
             <a:r>
               <a:rPr lang="en-US" sz="1400" b="1" dirty="0">
                 <a:solidFill>
-                  <a:srgbClr val="FBBF24"/>
+                  <a:srgbClr val="D97706"/>
                 </a:solidFill>
                 <a:latin typeface="Apple SD Gothic Neo" pitchFamily="34" charset="0"/>
                 <a:ea typeface="Apple SD Gothic Neo" pitchFamily="34" charset="-122"/>
@@ -5658,7 +5686,7 @@
             <a:r>
               <a:rPr lang="en-US" sz="2200" b="1" dirty="0">
                 <a:solidFill>
-                  <a:srgbClr val="E4E6ED"/>
+                  <a:srgbClr val="1E2030"/>
                 </a:solidFill>
                 <a:latin typeface="Apple SD Gothic Neo" pitchFamily="34" charset="0"/>
                 <a:ea typeface="Apple SD Gothic Neo" pitchFamily="34" charset="-122"/>
@@ -5697,7 +5725,7 @@
             <a:r>
               <a:rPr lang="en-US" sz="1000" dirty="0">
                 <a:solidFill>
-                  <a:srgbClr val="FBBF24"/>
+                  <a:srgbClr val="D97706"/>
                 </a:solidFill>
                 <a:latin typeface="Apple SD Gothic Neo" pitchFamily="34" charset="0"/>
                 <a:ea typeface="Apple SD Gothic Neo" pitchFamily="34" charset="-122"/>
@@ -5724,9 +5752,14 @@
             <a:avLst/>
           </a:prstGeom>
           <a:solidFill>
-            <a:srgbClr val="0D3320"/>
+            <a:srgbClr val="ECFDF5"/>
           </a:solidFill>
-          <a:ln/>
+          <a:ln w="9525">
+            <a:solidFill>
+              <a:srgbClr val="D1D5E0"/>
+            </a:solidFill>
+            <a:prstDash val="solid"/>
+          </a:ln>
         </p:spPr>
       </p:sp>
       <p:sp>
@@ -5756,7 +5789,7 @@
             <a:r>
               <a:rPr lang="en-US" sz="1200" b="1" dirty="0">
                 <a:solidFill>
-                  <a:srgbClr val="34D399"/>
+                  <a:srgbClr val="059669"/>
                 </a:solidFill>
                 <a:latin typeface="Apple SD Gothic Neo" pitchFamily="34" charset="0"/>
                 <a:ea typeface="Apple SD Gothic Neo" pitchFamily="34" charset="-122"/>
@@ -5798,7 +5831,7 @@
             <a:r>
               <a:rPr lang="en-US" sz="1000" dirty="0">
                 <a:solidFill>
-                  <a:srgbClr val="8B8FA3"/>
+                  <a:srgbClr val="4B5068"/>
                 </a:solidFill>
                 <a:latin typeface="Apple SD Gothic Neo" pitchFamily="34" charset="0"/>
                 <a:ea typeface="Apple SD Gothic Neo" pitchFamily="34" charset="-122"/>
@@ -5818,7 +5851,7 @@
             <a:r>
               <a:rPr lang="en-US" sz="1000" dirty="0">
                 <a:solidFill>
-                  <a:srgbClr val="8B8FA3"/>
+                  <a:srgbClr val="4B5068"/>
                 </a:solidFill>
                 <a:latin typeface="Apple SD Gothic Neo" pitchFamily="34" charset="0"/>
                 <a:ea typeface="Apple SD Gothic Neo" pitchFamily="34" charset="-122"/>
@@ -5845,9 +5878,14 @@
             <a:avLst/>
           </a:prstGeom>
           <a:solidFill>
-            <a:srgbClr val="3D2E0D"/>
+            <a:srgbClr val="FFFBEB"/>
           </a:solidFill>
-          <a:ln/>
+          <a:ln w="9525">
+            <a:solidFill>
+              <a:srgbClr val="D1D5E0"/>
+            </a:solidFill>
+            <a:prstDash val="solid"/>
+          </a:ln>
         </p:spPr>
       </p:sp>
       <p:sp>
@@ -5877,7 +5915,7 @@
             <a:r>
               <a:rPr lang="en-US" sz="1200" b="1" dirty="0">
                 <a:solidFill>
-                  <a:srgbClr val="FBBF24"/>
+                  <a:srgbClr val="D97706"/>
                 </a:solidFill>
                 <a:latin typeface="Apple SD Gothic Neo" pitchFamily="34" charset="0"/>
                 <a:ea typeface="Apple SD Gothic Neo" pitchFamily="34" charset="-122"/>
@@ -5919,7 +5957,7 @@
             <a:r>
               <a:rPr lang="en-US" sz="1000" dirty="0">
                 <a:solidFill>
-                  <a:srgbClr val="8B8FA3"/>
+                  <a:srgbClr val="4B5068"/>
                 </a:solidFill>
                 <a:latin typeface="Apple SD Gothic Neo" pitchFamily="34" charset="0"/>
                 <a:ea typeface="Apple SD Gothic Neo" pitchFamily="34" charset="-122"/>
@@ -5939,7 +5977,7 @@
             <a:r>
               <a:rPr lang="en-US" sz="1000" dirty="0">
                 <a:solidFill>
-                  <a:srgbClr val="8B8FA3"/>
+                  <a:srgbClr val="4B5068"/>
                 </a:solidFill>
                 <a:latin typeface="Apple SD Gothic Neo" pitchFamily="34" charset="0"/>
                 <a:ea typeface="Apple SD Gothic Neo" pitchFamily="34" charset="-122"/>
@@ -5966,9 +6004,14 @@
             <a:avLst/>
           </a:prstGeom>
           <a:solidFill>
-            <a:srgbClr val="3D1515"/>
+            <a:srgbClr val="FEF2F2"/>
           </a:solidFill>
-          <a:ln/>
+          <a:ln w="9525">
+            <a:solidFill>
+              <a:srgbClr val="D1D5E0"/>
+            </a:solidFill>
+            <a:prstDash val="solid"/>
+          </a:ln>
         </p:spPr>
       </p:sp>
       <p:sp>
@@ -5998,7 +6041,7 @@
             <a:r>
               <a:rPr lang="en-US" sz="1200" b="1" dirty="0">
                 <a:solidFill>
-                  <a:srgbClr val="F87171"/>
+                  <a:srgbClr val="DC2626"/>
                 </a:solidFill>
                 <a:latin typeface="Apple SD Gothic Neo" pitchFamily="34" charset="0"/>
                 <a:ea typeface="Apple SD Gothic Neo" pitchFamily="34" charset="-122"/>
@@ -6040,7 +6083,7 @@
             <a:r>
               <a:rPr lang="en-US" sz="1000" dirty="0">
                 <a:solidFill>
-                  <a:srgbClr val="8B8FA3"/>
+                  <a:srgbClr val="4B5068"/>
                 </a:solidFill>
                 <a:latin typeface="Apple SD Gothic Neo" pitchFamily="34" charset="0"/>
                 <a:ea typeface="Apple SD Gothic Neo" pitchFamily="34" charset="-122"/>
@@ -6060,7 +6103,7 @@
             <a:r>
               <a:rPr lang="en-US" sz="1000" dirty="0">
                 <a:solidFill>
-                  <a:srgbClr val="8B8FA3"/>
+                  <a:srgbClr val="4B5068"/>
                 </a:solidFill>
                 <a:latin typeface="Apple SD Gothic Neo" pitchFamily="34" charset="0"/>
                 <a:ea typeface="Apple SD Gothic Neo" pitchFamily="34" charset="-122"/>
@@ -6086,7 +6129,7 @@
     <p:bg>
       <p:bgPr>
         <a:solidFill>
-          <a:srgbClr val="0F1117"/>
+          <a:srgbClr val="FFFFFF"/>
         </a:solidFill>
       </p:bgPr>
     </p:bg>
@@ -6119,7 +6162,7 @@
             <a:avLst/>
           </a:prstGeom>
           <a:solidFill>
-            <a:srgbClr val="4E8CFF"/>
+            <a:srgbClr val="2563EB"/>
           </a:solidFill>
           <a:ln/>
         </p:spPr>
@@ -6151,7 +6194,7 @@
             <a:r>
               <a:rPr lang="en-US" sz="2000" b="1" dirty="0">
                 <a:solidFill>
-                  <a:srgbClr val="E4E6ED"/>
+                  <a:srgbClr val="1E2030"/>
                 </a:solidFill>
                 <a:latin typeface="Apple SD Gothic Neo" pitchFamily="34" charset="0"/>
                 <a:ea typeface="Apple SD Gothic Neo" pitchFamily="34" charset="-122"/>
@@ -6178,11 +6221,13 @@
             <a:avLst/>
           </a:prstGeom>
           <a:solidFill>
-            <a:srgbClr val="1A1D27"/>
+            <a:srgbClr val="2563EB">
+              <a:alpha val="8000"/>
+            </a:srgbClr>
           </a:solidFill>
           <a:ln w="19050">
             <a:solidFill>
-              <a:srgbClr val="4E8CFF"/>
+              <a:srgbClr val="2563EB"/>
             </a:solidFill>
             <a:prstDash val="solid"/>
           </a:ln>
@@ -6215,7 +6260,7 @@
             <a:r>
               <a:rPr lang="en-US" sz="1000" b="1" dirty="0">
                 <a:solidFill>
-                  <a:srgbClr val="4E8CFF"/>
+                  <a:srgbClr val="2563EB"/>
                 </a:solidFill>
                 <a:latin typeface="Apple SD Gothic Neo" pitchFamily="34" charset="0"/>
                 <a:ea typeface="Apple SD Gothic Neo" pitchFamily="34" charset="-122"/>
@@ -6257,7 +6302,7 @@
             <a:r>
               <a:rPr lang="en-US" sz="900" dirty="0">
                 <a:solidFill>
-                  <a:srgbClr val="8B8FA3"/>
+                  <a:srgbClr val="4B5068"/>
                 </a:solidFill>
                 <a:latin typeface="Apple SD Gothic Neo" pitchFamily="34" charset="0"/>
                 <a:ea typeface="Apple SD Gothic Neo" pitchFamily="34" charset="-122"/>
@@ -6277,7 +6322,7 @@
             <a:r>
               <a:rPr lang="en-US" sz="900" dirty="0">
                 <a:solidFill>
-                  <a:srgbClr val="8B8FA3"/>
+                  <a:srgbClr val="4B5068"/>
                 </a:solidFill>
                 <a:latin typeface="Apple SD Gothic Neo" pitchFamily="34" charset="0"/>
                 <a:ea typeface="Apple SD Gothic Neo" pitchFamily="34" charset="-122"/>
@@ -6316,7 +6361,7 @@
             <a:r>
               <a:rPr lang="en-US" sz="1600" dirty="0">
                 <a:solidFill>
-                  <a:srgbClr val="4E8CFF"/>
+                  <a:srgbClr val="2563EB"/>
                 </a:solidFill>
                 <a:latin typeface="Apple SD Gothic Neo" pitchFamily="34" charset="0"/>
                 <a:ea typeface="Apple SD Gothic Neo" pitchFamily="34" charset="-122"/>
@@ -6343,11 +6388,13 @@
             <a:avLst/>
           </a:prstGeom>
           <a:solidFill>
-            <a:srgbClr val="1A1D27"/>
+            <a:srgbClr val="7C3AED">
+              <a:alpha val="8000"/>
+            </a:srgbClr>
           </a:solidFill>
           <a:ln w="19050">
             <a:solidFill>
-              <a:srgbClr val="A78BFA"/>
+              <a:srgbClr val="7C3AED"/>
             </a:solidFill>
             <a:prstDash val="solid"/>
           </a:ln>
@@ -6380,7 +6427,7 @@
             <a:r>
               <a:rPr lang="en-US" sz="1000" b="1" dirty="0">
                 <a:solidFill>
-                  <a:srgbClr val="A78BFA"/>
+                  <a:srgbClr val="7C3AED"/>
                 </a:solidFill>
                 <a:latin typeface="Apple SD Gothic Neo" pitchFamily="34" charset="0"/>
                 <a:ea typeface="Apple SD Gothic Neo" pitchFamily="34" charset="-122"/>
@@ -6422,7 +6469,7 @@
             <a:r>
               <a:rPr lang="en-US" sz="900" dirty="0">
                 <a:solidFill>
-                  <a:srgbClr val="8B8FA3"/>
+                  <a:srgbClr val="4B5068"/>
                 </a:solidFill>
                 <a:latin typeface="Apple SD Gothic Neo" pitchFamily="34" charset="0"/>
                 <a:ea typeface="Apple SD Gothic Neo" pitchFamily="34" charset="-122"/>
@@ -6442,7 +6489,7 @@
             <a:r>
               <a:rPr lang="en-US" sz="900" dirty="0">
                 <a:solidFill>
-                  <a:srgbClr val="8B8FA3"/>
+                  <a:srgbClr val="4B5068"/>
                 </a:solidFill>
                 <a:latin typeface="Apple SD Gothic Neo" pitchFamily="34" charset="0"/>
                 <a:ea typeface="Apple SD Gothic Neo" pitchFamily="34" charset="-122"/>
@@ -6481,7 +6528,7 @@
             <a:r>
               <a:rPr lang="en-US" sz="1600" dirty="0">
                 <a:solidFill>
-                  <a:srgbClr val="4E8CFF"/>
+                  <a:srgbClr val="2563EB"/>
                 </a:solidFill>
                 <a:latin typeface="Apple SD Gothic Neo" pitchFamily="34" charset="0"/>
                 <a:ea typeface="Apple SD Gothic Neo" pitchFamily="34" charset="-122"/>
@@ -6508,11 +6555,13 @@
             <a:avLst/>
           </a:prstGeom>
           <a:solidFill>
-            <a:srgbClr val="1A1D27"/>
+            <a:srgbClr val="059669">
+              <a:alpha val="8000"/>
+            </a:srgbClr>
           </a:solidFill>
           <a:ln w="19050">
             <a:solidFill>
-              <a:srgbClr val="34D399"/>
+              <a:srgbClr val="059669"/>
             </a:solidFill>
             <a:prstDash val="solid"/>
           </a:ln>
@@ -6545,7 +6594,7 @@
             <a:r>
               <a:rPr lang="en-US" sz="1000" b="1" dirty="0">
                 <a:solidFill>
-                  <a:srgbClr val="34D399"/>
+                  <a:srgbClr val="059669"/>
                 </a:solidFill>
                 <a:latin typeface="Apple SD Gothic Neo" pitchFamily="34" charset="0"/>
                 <a:ea typeface="Apple SD Gothic Neo" pitchFamily="34" charset="-122"/>
@@ -6587,7 +6636,7 @@
             <a:r>
               <a:rPr lang="en-US" sz="900" dirty="0">
                 <a:solidFill>
-                  <a:srgbClr val="8B8FA3"/>
+                  <a:srgbClr val="4B5068"/>
                 </a:solidFill>
                 <a:latin typeface="Apple SD Gothic Neo" pitchFamily="34" charset="0"/>
                 <a:ea typeface="Apple SD Gothic Neo" pitchFamily="34" charset="-122"/>
@@ -6607,7 +6656,7 @@
             <a:r>
               <a:rPr lang="en-US" sz="900" dirty="0">
                 <a:solidFill>
-                  <a:srgbClr val="8B8FA3"/>
+                  <a:srgbClr val="4B5068"/>
                 </a:solidFill>
                 <a:latin typeface="Apple SD Gothic Neo" pitchFamily="34" charset="0"/>
                 <a:ea typeface="Apple SD Gothic Neo" pitchFamily="34" charset="-122"/>
@@ -6646,7 +6695,7 @@
             <a:r>
               <a:rPr lang="en-US" sz="1600" dirty="0">
                 <a:solidFill>
-                  <a:srgbClr val="4E8CFF"/>
+                  <a:srgbClr val="2563EB"/>
                 </a:solidFill>
                 <a:latin typeface="Apple SD Gothic Neo" pitchFamily="34" charset="0"/>
                 <a:ea typeface="Apple SD Gothic Neo" pitchFamily="34" charset="-122"/>
@@ -6673,11 +6722,13 @@
             <a:avLst/>
           </a:prstGeom>
           <a:solidFill>
-            <a:srgbClr val="1A1D27"/>
+            <a:srgbClr val="D97706">
+              <a:alpha val="8000"/>
+            </a:srgbClr>
           </a:solidFill>
           <a:ln w="19050">
             <a:solidFill>
-              <a:srgbClr val="FBBF24"/>
+              <a:srgbClr val="D97706"/>
             </a:solidFill>
             <a:prstDash val="solid"/>
           </a:ln>
@@ -6710,7 +6761,7 @@
             <a:r>
               <a:rPr lang="en-US" sz="1000" b="1" dirty="0">
                 <a:solidFill>
-                  <a:srgbClr val="FBBF24"/>
+                  <a:srgbClr val="D97706"/>
                 </a:solidFill>
                 <a:latin typeface="Apple SD Gothic Neo" pitchFamily="34" charset="0"/>
                 <a:ea typeface="Apple SD Gothic Neo" pitchFamily="34" charset="-122"/>
@@ -6752,7 +6803,7 @@
             <a:r>
               <a:rPr lang="en-US" sz="900" dirty="0">
                 <a:solidFill>
-                  <a:srgbClr val="8B8FA3"/>
+                  <a:srgbClr val="4B5068"/>
                 </a:solidFill>
                 <a:latin typeface="Apple SD Gothic Neo" pitchFamily="34" charset="0"/>
                 <a:ea typeface="Apple SD Gothic Neo" pitchFamily="34" charset="-122"/>
@@ -6772,7 +6823,7 @@
             <a:r>
               <a:rPr lang="en-US" sz="900" dirty="0">
                 <a:solidFill>
-                  <a:srgbClr val="8B8FA3"/>
+                  <a:srgbClr val="4B5068"/>
                 </a:solidFill>
                 <a:latin typeface="Apple SD Gothic Neo" pitchFamily="34" charset="0"/>
                 <a:ea typeface="Apple SD Gothic Neo" pitchFamily="34" charset="-122"/>
@@ -6811,7 +6862,7 @@
             <a:r>
               <a:rPr lang="en-US" sz="1600" dirty="0">
                 <a:solidFill>
-                  <a:srgbClr val="4E8CFF"/>
+                  <a:srgbClr val="2563EB"/>
                 </a:solidFill>
                 <a:latin typeface="Apple SD Gothic Neo" pitchFamily="34" charset="0"/>
                 <a:ea typeface="Apple SD Gothic Neo" pitchFamily="34" charset="-122"/>
@@ -6838,11 +6889,13 @@
             <a:avLst/>
           </a:prstGeom>
           <a:solidFill>
-            <a:srgbClr val="1A1D27"/>
+            <a:srgbClr val="DC2626">
+              <a:alpha val="8000"/>
+            </a:srgbClr>
           </a:solidFill>
           <a:ln w="19050">
             <a:solidFill>
-              <a:srgbClr val="F87171"/>
+              <a:srgbClr val="DC2626"/>
             </a:solidFill>
             <a:prstDash val="solid"/>
           </a:ln>
@@ -6875,7 +6928,7 @@
             <a:r>
               <a:rPr lang="en-US" sz="1000" b="1" dirty="0">
                 <a:solidFill>
-                  <a:srgbClr val="F87171"/>
+                  <a:srgbClr val="DC2626"/>
                 </a:solidFill>
                 <a:latin typeface="Apple SD Gothic Neo" pitchFamily="34" charset="0"/>
                 <a:ea typeface="Apple SD Gothic Neo" pitchFamily="34" charset="-122"/>
@@ -6917,7 +6970,7 @@
             <a:r>
               <a:rPr lang="en-US" sz="900" dirty="0">
                 <a:solidFill>
-                  <a:srgbClr val="8B8FA3"/>
+                  <a:srgbClr val="4B5068"/>
                 </a:solidFill>
                 <a:latin typeface="Apple SD Gothic Neo" pitchFamily="34" charset="0"/>
                 <a:ea typeface="Apple SD Gothic Neo" pitchFamily="34" charset="-122"/>
@@ -6937,7 +6990,7 @@
             <a:r>
               <a:rPr lang="en-US" sz="900" dirty="0">
                 <a:solidFill>
-                  <a:srgbClr val="8B8FA3"/>
+                  <a:srgbClr val="4B5068"/>
                 </a:solidFill>
                 <a:latin typeface="Apple SD Gothic Neo" pitchFamily="34" charset="0"/>
                 <a:ea typeface="Apple SD Gothic Neo" pitchFamily="34" charset="-122"/>
@@ -6976,7 +7029,7 @@
             <a:r>
               <a:rPr lang="en-US" sz="1600" dirty="0">
                 <a:solidFill>
-                  <a:srgbClr val="4E8CFF"/>
+                  <a:srgbClr val="2563EB"/>
                 </a:solidFill>
                 <a:latin typeface="Apple SD Gothic Neo" pitchFamily="34" charset="0"/>
                 <a:ea typeface="Apple SD Gothic Neo" pitchFamily="34" charset="-122"/>
@@ -7003,11 +7056,13 @@
             <a:avLst/>
           </a:prstGeom>
           <a:solidFill>
-            <a:srgbClr val="1A1D27"/>
+            <a:srgbClr val="0891B2">
+              <a:alpha val="8000"/>
+            </a:srgbClr>
           </a:solidFill>
           <a:ln w="19050">
             <a:solidFill>
-              <a:srgbClr val="38BDF8"/>
+              <a:srgbClr val="0891B2"/>
             </a:solidFill>
             <a:prstDash val="solid"/>
           </a:ln>
@@ -7040,7 +7095,7 @@
             <a:r>
               <a:rPr lang="en-US" sz="1000" b="1" dirty="0">
                 <a:solidFill>
-                  <a:srgbClr val="38BDF8"/>
+                  <a:srgbClr val="0891B2"/>
                 </a:solidFill>
                 <a:latin typeface="Apple SD Gothic Neo" pitchFamily="34" charset="0"/>
                 <a:ea typeface="Apple SD Gothic Neo" pitchFamily="34" charset="-122"/>
@@ -7082,7 +7137,7 @@
             <a:r>
               <a:rPr lang="en-US" sz="900" dirty="0">
                 <a:solidFill>
-                  <a:srgbClr val="8B8FA3"/>
+                  <a:srgbClr val="4B5068"/>
                 </a:solidFill>
                 <a:latin typeface="Apple SD Gothic Neo" pitchFamily="34" charset="0"/>
                 <a:ea typeface="Apple SD Gothic Neo" pitchFamily="34" charset="-122"/>
@@ -7102,7 +7157,7 @@
             <a:r>
               <a:rPr lang="en-US" sz="900" dirty="0">
                 <a:solidFill>
-                  <a:srgbClr val="8B8FA3"/>
+                  <a:srgbClr val="4B5068"/>
                 </a:solidFill>
                 <a:latin typeface="Apple SD Gothic Neo" pitchFamily="34" charset="0"/>
                 <a:ea typeface="Apple SD Gothic Neo" pitchFamily="34" charset="-122"/>
@@ -7141,7 +7196,7 @@
             <a:r>
               <a:rPr lang="en-US" sz="1600" dirty="0">
                 <a:solidFill>
-                  <a:srgbClr val="4E8CFF"/>
+                  <a:srgbClr val="2563EB"/>
                 </a:solidFill>
                 <a:latin typeface="Apple SD Gothic Neo" pitchFamily="34" charset="0"/>
                 <a:ea typeface="Apple SD Gothic Neo" pitchFamily="34" charset="-122"/>
@@ -7168,11 +7223,13 @@
             <a:avLst/>
           </a:prstGeom>
           <a:solidFill>
-            <a:srgbClr val="1A1D27"/>
+            <a:srgbClr val="EA580C">
+              <a:alpha val="8000"/>
+            </a:srgbClr>
           </a:solidFill>
           <a:ln w="19050">
             <a:solidFill>
-              <a:srgbClr val="FB923C"/>
+              <a:srgbClr val="EA580C"/>
             </a:solidFill>
             <a:prstDash val="solid"/>
           </a:ln>
@@ -7205,7 +7262,7 @@
             <a:r>
               <a:rPr lang="en-US" sz="1000" b="1" dirty="0">
                 <a:solidFill>
-                  <a:srgbClr val="FB923C"/>
+                  <a:srgbClr val="EA580C"/>
                 </a:solidFill>
                 <a:latin typeface="Apple SD Gothic Neo" pitchFamily="34" charset="0"/>
                 <a:ea typeface="Apple SD Gothic Neo" pitchFamily="34" charset="-122"/>
@@ -7247,7 +7304,7 @@
             <a:r>
               <a:rPr lang="en-US" sz="900" dirty="0">
                 <a:solidFill>
-                  <a:srgbClr val="8B8FA3"/>
+                  <a:srgbClr val="4B5068"/>
                 </a:solidFill>
                 <a:latin typeface="Apple SD Gothic Neo" pitchFamily="34" charset="0"/>
                 <a:ea typeface="Apple SD Gothic Neo" pitchFamily="34" charset="-122"/>
@@ -7267,7 +7324,7 @@
             <a:r>
               <a:rPr lang="en-US" sz="900" dirty="0">
                 <a:solidFill>
-                  <a:srgbClr val="8B8FA3"/>
+                  <a:srgbClr val="4B5068"/>
                 </a:solidFill>
                 <a:latin typeface="Apple SD Gothic Neo" pitchFamily="34" charset="0"/>
                 <a:ea typeface="Apple SD Gothic Neo" pitchFamily="34" charset="-122"/>
@@ -7306,7 +7363,7 @@
             <a:r>
               <a:rPr lang="en-US" sz="1600" dirty="0">
                 <a:solidFill>
-                  <a:srgbClr val="4E8CFF"/>
+                  <a:srgbClr val="2563EB"/>
                 </a:solidFill>
                 <a:latin typeface="Apple SD Gothic Neo" pitchFamily="34" charset="0"/>
                 <a:ea typeface="Apple SD Gothic Neo" pitchFamily="34" charset="-122"/>
@@ -7333,11 +7390,11 @@
             <a:avLst/>
           </a:prstGeom>
           <a:solidFill>
-            <a:srgbClr val="161822"/>
+            <a:srgbClr val="E8EAF0"/>
           </a:solidFill>
           <a:ln w="19050">
             <a:solidFill>
-              <a:srgbClr val="4E8CFF"/>
+              <a:srgbClr val="2563EB"/>
             </a:solidFill>
             <a:prstDash val="dash"/>
           </a:ln>
@@ -7370,7 +7427,7 @@
             <a:r>
               <a:rPr lang="en-US" sz="1200" b="1" dirty="0">
                 <a:solidFill>
-                  <a:srgbClr val="4E8CFF"/>
+                  <a:srgbClr val="2563EB"/>
                 </a:solidFill>
                 <a:latin typeface="Apple SD Gothic Neo" pitchFamily="34" charset="0"/>
                 <a:ea typeface="Apple SD Gothic Neo" pitchFamily="34" charset="-122"/>
@@ -7397,9 +7454,14 @@
             <a:avLst/>
           </a:prstGeom>
           <a:solidFill>
-            <a:srgbClr val="1A1D27"/>
+            <a:srgbClr val="F3F4F8"/>
           </a:solidFill>
-          <a:ln/>
+          <a:ln w="9525">
+            <a:solidFill>
+              <a:srgbClr val="D1D5E0"/>
+            </a:solidFill>
+            <a:prstDash val="solid"/>
+          </a:ln>
         </p:spPr>
       </p:sp>
       <p:sp>
@@ -7429,7 +7491,7 @@
             <a:r>
               <a:rPr lang="en-US" sz="800" dirty="0">
                 <a:solidFill>
-                  <a:srgbClr val="4E8CFF"/>
+                  <a:srgbClr val="2563EB"/>
                 </a:solidFill>
                 <a:latin typeface="Apple SD Gothic Neo" pitchFamily="34" charset="0"/>
                 <a:ea typeface="Apple SD Gothic Neo" pitchFamily="34" charset="-122"/>
@@ -7456,9 +7518,14 @@
             <a:avLst/>
           </a:prstGeom>
           <a:solidFill>
-            <a:srgbClr val="1A1D27"/>
+            <a:srgbClr val="F3F4F8"/>
           </a:solidFill>
-          <a:ln/>
+          <a:ln w="9525">
+            <a:solidFill>
+              <a:srgbClr val="D1D5E0"/>
+            </a:solidFill>
+            <a:prstDash val="solid"/>
+          </a:ln>
         </p:spPr>
       </p:sp>
       <p:sp>
@@ -7488,7 +7555,7 @@
             <a:r>
               <a:rPr lang="en-US" sz="800" dirty="0">
                 <a:solidFill>
-                  <a:srgbClr val="4E8CFF"/>
+                  <a:srgbClr val="2563EB"/>
                 </a:solidFill>
                 <a:latin typeface="Apple SD Gothic Neo" pitchFamily="34" charset="0"/>
                 <a:ea typeface="Apple SD Gothic Neo" pitchFamily="34" charset="-122"/>
@@ -7515,9 +7582,14 @@
             <a:avLst/>
           </a:prstGeom>
           <a:solidFill>
-            <a:srgbClr val="1A1D27"/>
+            <a:srgbClr val="F3F4F8"/>
           </a:solidFill>
-          <a:ln/>
+          <a:ln w="9525">
+            <a:solidFill>
+              <a:srgbClr val="D1D5E0"/>
+            </a:solidFill>
+            <a:prstDash val="solid"/>
+          </a:ln>
         </p:spPr>
       </p:sp>
       <p:sp>
@@ -7547,7 +7619,7 @@
             <a:r>
               <a:rPr lang="en-US" sz="800" dirty="0">
                 <a:solidFill>
-                  <a:srgbClr val="4E8CFF"/>
+                  <a:srgbClr val="2563EB"/>
                 </a:solidFill>
                 <a:latin typeface="Apple SD Gothic Neo" pitchFamily="34" charset="0"/>
                 <a:ea typeface="Apple SD Gothic Neo" pitchFamily="34" charset="-122"/>
@@ -7586,7 +7658,7 @@
             <a:r>
               <a:rPr lang="en-US" sz="1000" b="1" dirty="0">
                 <a:solidFill>
-                  <a:srgbClr val="34D399"/>
+                  <a:srgbClr val="059669"/>
                 </a:solidFill>
                 <a:latin typeface="Apple SD Gothic Neo" pitchFamily="34" charset="0"/>
                 <a:ea typeface="Apple SD Gothic Neo" pitchFamily="34" charset="-122"/>
@@ -7613,11 +7685,11 @@
             <a:avLst/>
           </a:prstGeom>
           <a:solidFill>
-            <a:srgbClr val="161822"/>
+            <a:srgbClr val="E8EAF0"/>
           </a:solidFill>
           <a:ln w="19050">
             <a:solidFill>
-              <a:srgbClr val="FBBF24"/>
+              <a:srgbClr val="D97706"/>
             </a:solidFill>
             <a:prstDash val="dash"/>
           </a:ln>
@@ -7650,7 +7722,7 @@
             <a:r>
               <a:rPr lang="en-US" sz="1200" b="1" dirty="0">
                 <a:solidFill>
-                  <a:srgbClr val="FBBF24"/>
+                  <a:srgbClr val="D97706"/>
                 </a:solidFill>
                 <a:latin typeface="Apple SD Gothic Neo" pitchFamily="34" charset="0"/>
                 <a:ea typeface="Apple SD Gothic Neo" pitchFamily="34" charset="-122"/>
@@ -7692,7 +7764,7 @@
             <a:r>
               <a:rPr lang="en-US" sz="1000" dirty="0">
                 <a:solidFill>
-                  <a:srgbClr val="8B8FA3"/>
+                  <a:srgbClr val="4B5068"/>
                 </a:solidFill>
                 <a:latin typeface="Apple SD Gothic Neo" pitchFamily="34" charset="0"/>
                 <a:ea typeface="Apple SD Gothic Neo" pitchFamily="34" charset="-122"/>
@@ -7712,7 +7784,7 @@
             <a:r>
               <a:rPr lang="en-US" sz="1000" dirty="0">
                 <a:solidFill>
-                  <a:srgbClr val="8B8FA3"/>
+                  <a:srgbClr val="4B5068"/>
                 </a:solidFill>
                 <a:latin typeface="Apple SD Gothic Neo" pitchFamily="34" charset="0"/>
                 <a:ea typeface="Apple SD Gothic Neo" pitchFamily="34" charset="-122"/>
@@ -7751,7 +7823,7 @@
             <a:r>
               <a:rPr lang="en-US" sz="1000" b="1" dirty="0">
                 <a:solidFill>
-                  <a:srgbClr val="FBBF24"/>
+                  <a:srgbClr val="D97706"/>
                 </a:solidFill>
                 <a:latin typeface="Apple SD Gothic Neo" pitchFamily="34" charset="0"/>
                 <a:ea typeface="Apple SD Gothic Neo" pitchFamily="34" charset="-122"/>
@@ -7777,7 +7849,7 @@
     <p:bg>
       <p:bgPr>
         <a:solidFill>
-          <a:srgbClr val="0F1117"/>
+          <a:srgbClr val="FFFFFF"/>
         </a:solidFill>
       </p:bgPr>
     </p:bg>
@@ -7810,7 +7882,7 @@
             <a:avLst/>
           </a:prstGeom>
           <a:solidFill>
-            <a:srgbClr val="34D399"/>
+            <a:srgbClr val="059669"/>
           </a:solidFill>
           <a:ln/>
         </p:spPr>
@@ -7842,7 +7914,7 @@
             <a:r>
               <a:rPr lang="en-US" sz="2200" b="1" dirty="0">
                 <a:solidFill>
-                  <a:srgbClr val="E4E6ED"/>
+                  <a:srgbClr val="1E2030"/>
                 </a:solidFill>
                 <a:latin typeface="Apple SD Gothic Neo" pitchFamily="34" charset="0"/>
                 <a:ea typeface="Apple SD Gothic Neo" pitchFamily="34" charset="-122"/>
@@ -7869,9 +7941,14 @@
             <a:avLst/>
           </a:prstGeom>
           <a:solidFill>
-            <a:srgbClr val="1A1D27"/>
+            <a:srgbClr val="F3F4F8"/>
           </a:solidFill>
-          <a:ln/>
+          <a:ln w="9525">
+            <a:solidFill>
+              <a:srgbClr val="D1D5E0"/>
+            </a:solidFill>
+            <a:prstDash val="solid"/>
+          </a:ln>
         </p:spPr>
       </p:sp>
       <p:sp>
@@ -7889,7 +7966,7 @@
             <a:avLst/>
           </a:prstGeom>
           <a:solidFill>
-            <a:srgbClr val="4E8CFF"/>
+            <a:srgbClr val="2563EB"/>
           </a:solidFill>
           <a:ln/>
         </p:spPr>
@@ -7921,7 +7998,7 @@
             <a:r>
               <a:rPr lang="en-US" sz="1200" b="1" dirty="0">
                 <a:solidFill>
-                  <a:srgbClr val="4E8CFF"/>
+                  <a:srgbClr val="2563EB"/>
                 </a:solidFill>
                 <a:latin typeface="Apple SD Gothic Neo" pitchFamily="34" charset="0"/>
                 <a:ea typeface="Apple SD Gothic Neo" pitchFamily="34" charset="-122"/>
@@ -7960,7 +8037,7 @@
             <a:r>
               <a:rPr lang="en-US" sz="1100" dirty="0">
                 <a:solidFill>
-                  <a:srgbClr val="8B8FA3"/>
+                  <a:srgbClr val="4B5068"/>
                 </a:solidFill>
                 <a:latin typeface="Apple SD Gothic Neo" pitchFamily="34" charset="0"/>
                 <a:ea typeface="Apple SD Gothic Neo" pitchFamily="34" charset="-122"/>
@@ -7987,9 +8064,14 @@
             <a:avLst/>
           </a:prstGeom>
           <a:solidFill>
-            <a:srgbClr val="1A1D27"/>
+            <a:srgbClr val="F3F4F8"/>
           </a:solidFill>
-          <a:ln/>
+          <a:ln w="9525">
+            <a:solidFill>
+              <a:srgbClr val="D1D5E0"/>
+            </a:solidFill>
+            <a:prstDash val="solid"/>
+          </a:ln>
         </p:spPr>
       </p:sp>
       <p:sp>
@@ -8007,7 +8089,7 @@
             <a:avLst/>
           </a:prstGeom>
           <a:solidFill>
-            <a:srgbClr val="4E8CFF"/>
+            <a:srgbClr val="2563EB"/>
           </a:solidFill>
           <a:ln/>
         </p:spPr>
@@ -8039,7 +8121,7 @@
             <a:r>
               <a:rPr lang="en-US" sz="1200" b="1" dirty="0">
                 <a:solidFill>
-                  <a:srgbClr val="4E8CFF"/>
+                  <a:srgbClr val="2563EB"/>
                 </a:solidFill>
                 <a:latin typeface="Apple SD Gothic Neo" pitchFamily="34" charset="0"/>
                 <a:ea typeface="Apple SD Gothic Neo" pitchFamily="34" charset="-122"/>
@@ -8078,7 +8160,7 @@
             <a:r>
               <a:rPr lang="en-US" sz="1100" dirty="0">
                 <a:solidFill>
-                  <a:srgbClr val="8B8FA3"/>
+                  <a:srgbClr val="4B5068"/>
                 </a:solidFill>
                 <a:latin typeface="Apple SD Gothic Neo" pitchFamily="34" charset="0"/>
                 <a:ea typeface="Apple SD Gothic Neo" pitchFamily="34" charset="-122"/>
@@ -8105,9 +8187,14 @@
             <a:avLst/>
           </a:prstGeom>
           <a:solidFill>
-            <a:srgbClr val="1A1D27"/>
+            <a:srgbClr val="F3F4F8"/>
           </a:solidFill>
-          <a:ln/>
+          <a:ln w="9525">
+            <a:solidFill>
+              <a:srgbClr val="D1D5E0"/>
+            </a:solidFill>
+            <a:prstDash val="solid"/>
+          </a:ln>
         </p:spPr>
       </p:sp>
       <p:sp>
@@ -8125,7 +8212,7 @@
             <a:avLst/>
           </a:prstGeom>
           <a:solidFill>
-            <a:srgbClr val="FB923C"/>
+            <a:srgbClr val="EA580C"/>
           </a:solidFill>
           <a:ln/>
         </p:spPr>
@@ -8157,7 +8244,7 @@
             <a:r>
               <a:rPr lang="en-US" sz="1200" b="1" dirty="0">
                 <a:solidFill>
-                  <a:srgbClr val="FB923C"/>
+                  <a:srgbClr val="EA580C"/>
                 </a:solidFill>
                 <a:latin typeface="Apple SD Gothic Neo" pitchFamily="34" charset="0"/>
                 <a:ea typeface="Apple SD Gothic Neo" pitchFamily="34" charset="-122"/>
@@ -8196,7 +8283,7 @@
             <a:r>
               <a:rPr lang="en-US" sz="1100" dirty="0">
                 <a:solidFill>
-                  <a:srgbClr val="8B8FA3"/>
+                  <a:srgbClr val="4B5068"/>
                 </a:solidFill>
                 <a:latin typeface="Apple SD Gothic Neo" pitchFamily="34" charset="0"/>
                 <a:ea typeface="Apple SD Gothic Neo" pitchFamily="34" charset="-122"/>
@@ -8223,9 +8310,14 @@
             <a:avLst/>
           </a:prstGeom>
           <a:solidFill>
-            <a:srgbClr val="1A1D27"/>
+            <a:srgbClr val="F3F4F8"/>
           </a:solidFill>
-          <a:ln/>
+          <a:ln w="9525">
+            <a:solidFill>
+              <a:srgbClr val="D1D5E0"/>
+            </a:solidFill>
+            <a:prstDash val="solid"/>
+          </a:ln>
         </p:spPr>
       </p:sp>
       <p:sp>
@@ -8243,7 +8335,7 @@
             <a:avLst/>
           </a:prstGeom>
           <a:solidFill>
-            <a:srgbClr val="A78BFA"/>
+            <a:srgbClr val="7C3AED"/>
           </a:solidFill>
           <a:ln/>
         </p:spPr>
@@ -8275,7 +8367,7 @@
             <a:r>
               <a:rPr lang="en-US" sz="1200" b="1" dirty="0">
                 <a:solidFill>
-                  <a:srgbClr val="A78BFA"/>
+                  <a:srgbClr val="7C3AED"/>
                 </a:solidFill>
                 <a:latin typeface="Apple SD Gothic Neo" pitchFamily="34" charset="0"/>
                 <a:ea typeface="Apple SD Gothic Neo" pitchFamily="34" charset="-122"/>
@@ -8314,7 +8406,7 @@
             <a:r>
               <a:rPr lang="en-US" sz="1100" dirty="0">
                 <a:solidFill>
-                  <a:srgbClr val="8B8FA3"/>
+                  <a:srgbClr val="4B5068"/>
                 </a:solidFill>
                 <a:latin typeface="Apple SD Gothic Neo" pitchFamily="34" charset="0"/>
                 <a:ea typeface="Apple SD Gothic Neo" pitchFamily="34" charset="-122"/>
@@ -8341,9 +8433,14 @@
             <a:avLst/>
           </a:prstGeom>
           <a:solidFill>
-            <a:srgbClr val="1A1D27"/>
+            <a:srgbClr val="F3F4F8"/>
           </a:solidFill>
-          <a:ln/>
+          <a:ln w="9525">
+            <a:solidFill>
+              <a:srgbClr val="D1D5E0"/>
+            </a:solidFill>
+            <a:prstDash val="solid"/>
+          </a:ln>
         </p:spPr>
       </p:sp>
       <p:sp>
@@ -8361,7 +8458,7 @@
             <a:avLst/>
           </a:prstGeom>
           <a:solidFill>
-            <a:srgbClr val="38BDF8"/>
+            <a:srgbClr val="0891B2"/>
           </a:solidFill>
           <a:ln/>
         </p:spPr>
@@ -8393,7 +8490,7 @@
             <a:r>
               <a:rPr lang="en-US" sz="1200" b="1" dirty="0">
                 <a:solidFill>
-                  <a:srgbClr val="38BDF8"/>
+                  <a:srgbClr val="0891B2"/>
                 </a:solidFill>
                 <a:latin typeface="Apple SD Gothic Neo" pitchFamily="34" charset="0"/>
                 <a:ea typeface="Apple SD Gothic Neo" pitchFamily="34" charset="-122"/>
@@ -8432,7 +8529,7 @@
             <a:r>
               <a:rPr lang="en-US" sz="1100" dirty="0">
                 <a:solidFill>
-                  <a:srgbClr val="8B8FA3"/>
+                  <a:srgbClr val="4B5068"/>
                 </a:solidFill>
                 <a:latin typeface="Apple SD Gothic Neo" pitchFamily="34" charset="0"/>
                 <a:ea typeface="Apple SD Gothic Neo" pitchFamily="34" charset="-122"/>
@@ -8459,9 +8556,14 @@
             <a:avLst/>
           </a:prstGeom>
           <a:solidFill>
-            <a:srgbClr val="1A1D27"/>
+            <a:srgbClr val="F3F4F8"/>
           </a:solidFill>
-          <a:ln/>
+          <a:ln w="9525">
+            <a:solidFill>
+              <a:srgbClr val="D1D5E0"/>
+            </a:solidFill>
+            <a:prstDash val="solid"/>
+          </a:ln>
         </p:spPr>
       </p:sp>
       <p:sp>
@@ -8479,7 +8581,7 @@
             <a:avLst/>
           </a:prstGeom>
           <a:solidFill>
-            <a:srgbClr val="FBBF24"/>
+            <a:srgbClr val="D97706"/>
           </a:solidFill>
           <a:ln/>
         </p:spPr>
@@ -8511,7 +8613,7 @@
             <a:r>
               <a:rPr lang="en-US" sz="1200" b="1" dirty="0">
                 <a:solidFill>
-                  <a:srgbClr val="FBBF24"/>
+                  <a:srgbClr val="D97706"/>
                 </a:solidFill>
                 <a:latin typeface="Apple SD Gothic Neo" pitchFamily="34" charset="0"/>
                 <a:ea typeface="Apple SD Gothic Neo" pitchFamily="34" charset="-122"/>
@@ -8550,7 +8652,7 @@
             <a:r>
               <a:rPr lang="en-US" sz="1100" dirty="0">
                 <a:solidFill>
-                  <a:srgbClr val="8B8FA3"/>
+                  <a:srgbClr val="4B5068"/>
                 </a:solidFill>
                 <a:latin typeface="Apple SD Gothic Neo" pitchFamily="34" charset="0"/>
                 <a:ea typeface="Apple SD Gothic Neo" pitchFamily="34" charset="-122"/>
@@ -8577,9 +8679,14 @@
             <a:avLst/>
           </a:prstGeom>
           <a:solidFill>
-            <a:srgbClr val="1A1D27"/>
+            <a:srgbClr val="F3F4F8"/>
           </a:solidFill>
-          <a:ln/>
+          <a:ln w="9525">
+            <a:solidFill>
+              <a:srgbClr val="D1D5E0"/>
+            </a:solidFill>
+            <a:prstDash val="solid"/>
+          </a:ln>
         </p:spPr>
       </p:sp>
       <p:sp>
@@ -8597,7 +8704,7 @@
             <a:avLst/>
           </a:prstGeom>
           <a:solidFill>
-            <a:srgbClr val="F87171"/>
+            <a:srgbClr val="DC2626"/>
           </a:solidFill>
           <a:ln/>
         </p:spPr>
@@ -8629,7 +8736,7 @@
             <a:r>
               <a:rPr lang="en-US" sz="1200" b="1" dirty="0">
                 <a:solidFill>
-                  <a:srgbClr val="F87171"/>
+                  <a:srgbClr val="DC2626"/>
                 </a:solidFill>
                 <a:latin typeface="Apple SD Gothic Neo" pitchFamily="34" charset="0"/>
                 <a:ea typeface="Apple SD Gothic Neo" pitchFamily="34" charset="-122"/>
@@ -8668,7 +8775,7 @@
             <a:r>
               <a:rPr lang="en-US" sz="1100" dirty="0">
                 <a:solidFill>
-                  <a:srgbClr val="8B8FA3"/>
+                  <a:srgbClr val="4B5068"/>
                 </a:solidFill>
                 <a:latin typeface="Apple SD Gothic Neo" pitchFamily="34" charset="0"/>
                 <a:ea typeface="Apple SD Gothic Neo" pitchFamily="34" charset="-122"/>
@@ -8695,9 +8802,14 @@
             <a:avLst/>
           </a:prstGeom>
           <a:solidFill>
-            <a:srgbClr val="161822"/>
+            <a:srgbClr val="E8EAF0"/>
           </a:solidFill>
-          <a:ln/>
+          <a:ln w="9525">
+            <a:solidFill>
+              <a:srgbClr val="D1D5E0"/>
+            </a:solidFill>
+            <a:prstDash val="solid"/>
+          </a:ln>
         </p:spPr>
       </p:sp>
       <p:sp>
@@ -8727,7 +8839,7 @@
             <a:r>
               <a:rPr lang="en-US" sz="1200" dirty="0">
                 <a:solidFill>
-                  <a:srgbClr val="34D399"/>
+                  <a:srgbClr val="059669"/>
                 </a:solidFill>
                 <a:latin typeface="Apple SD Gothic Neo" pitchFamily="34" charset="0"/>
                 <a:ea typeface="Apple SD Gothic Neo" pitchFamily="34" charset="-122"/>
@@ -8753,7 +8865,7 @@
     <p:bg>
       <p:bgPr>
         <a:solidFill>
-          <a:srgbClr val="0F1117"/>
+          <a:srgbClr val="FFFFFF"/>
         </a:solidFill>
       </p:bgPr>
     </p:bg>
@@ -8786,7 +8898,7 @@
             <a:avLst/>
           </a:prstGeom>
           <a:solidFill>
-            <a:srgbClr val="4E8CFF"/>
+            <a:srgbClr val="2563EB"/>
           </a:solidFill>
           <a:ln/>
         </p:spPr>
@@ -8818,7 +8930,7 @@
             <a:r>
               <a:rPr lang="en-US" sz="2400" b="1" dirty="0">
                 <a:solidFill>
-                  <a:srgbClr val="E4E6ED"/>
+                  <a:srgbClr val="1E2030"/>
                 </a:solidFill>
                 <a:latin typeface="Apple SD Gothic Neo" pitchFamily="34" charset="0"/>
                 <a:ea typeface="Apple SD Gothic Neo" pitchFamily="34" charset="-122"/>
@@ -8845,13 +8957,18 @@
             <a:avLst/>
           </a:prstGeom>
           <a:solidFill>
-            <a:srgbClr val="1A1D27"/>
+            <a:srgbClr val="F3F4F8"/>
           </a:solidFill>
-          <a:ln/>
+          <a:ln w="9525">
+            <a:solidFill>
+              <a:srgbClr val="D1D5E0"/>
+            </a:solidFill>
+            <a:prstDash val="solid"/>
+          </a:ln>
           <a:effectLst>
-            <a:outerShdw sx="100000" sy="100000" kx="0" ky="0" algn="bl" rotWithShape="0" blurRad="76200" dist="25400" dir="8100000">
-              <a:srgbClr val="000000">
-                <a:alpha val="20000"/>
+            <a:outerShdw sx="100000" sy="100000" kx="0" ky="0" algn="bl" rotWithShape="0" blurRad="50800" dist="12700" dir="8100000">
+              <a:srgbClr val="B0B8C8">
+                <a:alpha val="15000"/>
               </a:srgbClr>
             </a:outerShdw>
           </a:effectLst>
@@ -8884,7 +9001,7 @@
             <a:r>
               <a:rPr lang="en-US" sz="4200" b="1" dirty="0">
                 <a:solidFill>
-                  <a:srgbClr val="F87171"/>
+                  <a:srgbClr val="DC2626"/>
                 </a:solidFill>
                 <a:latin typeface="Apple SD Gothic Neo" pitchFamily="34" charset="0"/>
                 <a:ea typeface="Apple SD Gothic Neo" pitchFamily="34" charset="-122"/>
@@ -8926,7 +9043,7 @@
             <a:r>
               <a:rPr lang="en-US" sz="1300" dirty="0">
                 <a:solidFill>
-                  <a:srgbClr val="8B8FA3"/>
+                  <a:srgbClr val="4B5068"/>
                 </a:solidFill>
                 <a:latin typeface="Apple SD Gothic Neo" pitchFamily="34" charset="0"/>
                 <a:ea typeface="Apple SD Gothic Neo" pitchFamily="34" charset="-122"/>
@@ -8946,7 +9063,7 @@
             <a:r>
               <a:rPr lang="en-US" sz="1300" dirty="0">
                 <a:solidFill>
-                  <a:srgbClr val="8B8FA3"/>
+                  <a:srgbClr val="4B5068"/>
                 </a:solidFill>
                 <a:latin typeface="Apple SD Gothic Neo" pitchFamily="34" charset="0"/>
                 <a:ea typeface="Apple SD Gothic Neo" pitchFamily="34" charset="-122"/>
@@ -8985,7 +9102,7 @@
             <a:r>
               <a:rPr lang="en-US" sz="3600" dirty="0">
                 <a:solidFill>
-                  <a:srgbClr val="4E8CFF"/>
+                  <a:srgbClr val="2563EB"/>
                 </a:solidFill>
                 <a:latin typeface="Apple SD Gothic Neo" pitchFamily="34" charset="0"/>
                 <a:ea typeface="Apple SD Gothic Neo" pitchFamily="34" charset="-122"/>
@@ -9012,13 +9129,18 @@
             <a:avLst/>
           </a:prstGeom>
           <a:solidFill>
-            <a:srgbClr val="1A1D27"/>
+            <a:srgbClr val="F3F4F8"/>
           </a:solidFill>
-          <a:ln/>
+          <a:ln w="9525">
+            <a:solidFill>
+              <a:srgbClr val="D1D5E0"/>
+            </a:solidFill>
+            <a:prstDash val="solid"/>
+          </a:ln>
           <a:effectLst>
-            <a:outerShdw sx="100000" sy="100000" kx="0" ky="0" algn="bl" rotWithShape="0" blurRad="76200" dist="25400" dir="8100000">
-              <a:srgbClr val="000000">
-                <a:alpha val="20000"/>
+            <a:outerShdw sx="100000" sy="100000" kx="0" ky="0" algn="bl" rotWithShape="0" blurRad="50800" dist="12700" dir="8100000">
+              <a:srgbClr val="B0B8C8">
+                <a:alpha val="15000"/>
               </a:srgbClr>
             </a:outerShdw>
           </a:effectLst>
@@ -9051,7 +9173,7 @@
             <a:r>
               <a:rPr lang="en-US" sz="4200" b="1" dirty="0">
                 <a:solidFill>
-                  <a:srgbClr val="34D399"/>
+                  <a:srgbClr val="059669"/>
                 </a:solidFill>
                 <a:latin typeface="Apple SD Gothic Neo" pitchFamily="34" charset="0"/>
                 <a:ea typeface="Apple SD Gothic Neo" pitchFamily="34" charset="-122"/>
@@ -9093,7 +9215,7 @@
             <a:r>
               <a:rPr lang="en-US" sz="1300" dirty="0">
                 <a:solidFill>
-                  <a:srgbClr val="8B8FA3"/>
+                  <a:srgbClr val="4B5068"/>
                 </a:solidFill>
                 <a:latin typeface="Apple SD Gothic Neo" pitchFamily="34" charset="0"/>
                 <a:ea typeface="Apple SD Gothic Neo" pitchFamily="34" charset="-122"/>
@@ -9113,7 +9235,7 @@
             <a:r>
               <a:rPr lang="en-US" sz="1300" dirty="0">
                 <a:solidFill>
-                  <a:srgbClr val="8B8FA3"/>
+                  <a:srgbClr val="4B5068"/>
                 </a:solidFill>
                 <a:latin typeface="Apple SD Gothic Neo" pitchFamily="34" charset="0"/>
                 <a:ea typeface="Apple SD Gothic Neo" pitchFamily="34" charset="-122"/>
@@ -9140,9 +9262,14 @@
             <a:avLst/>
           </a:prstGeom>
           <a:solidFill>
-            <a:srgbClr val="161822"/>
+            <a:srgbClr val="E8EAF0"/>
           </a:solidFill>
-          <a:ln/>
+          <a:ln w="9525">
+            <a:solidFill>
+              <a:srgbClr val="D1D5E0"/>
+            </a:solidFill>
+            <a:prstDash val="solid"/>
+          </a:ln>
         </p:spPr>
       </p:sp>
       <p:sp>
@@ -9175,7 +9302,7 @@
             <a:r>
               <a:rPr lang="en-US" sz="1400" dirty="0">
                 <a:solidFill>
-                  <a:srgbClr val="E4E6ED"/>
+                  <a:srgbClr val="1E2030"/>
                 </a:solidFill>
                 <a:latin typeface="Apple SD Gothic Neo" pitchFamily="34" charset="0"/>
                 <a:ea typeface="Apple SD Gothic Neo" pitchFamily="34" charset="-122"/>
@@ -9196,7 +9323,7 @@
             <a:r>
               <a:rPr lang="en-US" sz="1300" dirty="0">
                 <a:solidFill>
-                  <a:srgbClr val="8B8FA3"/>
+                  <a:srgbClr val="4B5068"/>
                 </a:solidFill>
                 <a:latin typeface="Apple SD Gothic Neo" pitchFamily="34" charset="0"/>
                 <a:ea typeface="Apple SD Gothic Neo" pitchFamily="34" charset="-122"/>
@@ -9217,7 +9344,7 @@
             <a:r>
               <a:rPr lang="en-US" sz="1300" dirty="0">
                 <a:solidFill>
-                  <a:srgbClr val="8B8FA3"/>
+                  <a:srgbClr val="4B5068"/>
                 </a:solidFill>
                 <a:latin typeface="Apple SD Gothic Neo" pitchFamily="34" charset="0"/>
                 <a:ea typeface="Apple SD Gothic Neo" pitchFamily="34" charset="-122"/>
@@ -9243,7 +9370,7 @@
     <p:bg>
       <p:bgPr>
         <a:solidFill>
-          <a:srgbClr val="0F1117"/>
+          <a:srgbClr val="FFFFFF"/>
         </a:solidFill>
       </p:bgPr>
     </p:bg>
@@ -9276,7 +9403,7 @@
             <a:avLst/>
           </a:prstGeom>
           <a:solidFill>
-            <a:srgbClr val="4E8CFF"/>
+            <a:srgbClr val="2563EB"/>
           </a:solidFill>
           <a:ln/>
         </p:spPr>
@@ -9308,7 +9435,7 @@
             <a:r>
               <a:rPr lang="en-US" sz="2400" b="1" dirty="0">
                 <a:solidFill>
-                  <a:srgbClr val="E4E6ED"/>
+                  <a:srgbClr val="1E2030"/>
                 </a:solidFill>
                 <a:latin typeface="Apple SD Gothic Neo" pitchFamily="34" charset="0"/>
                 <a:ea typeface="Apple SD Gothic Neo" pitchFamily="34" charset="-122"/>
@@ -9347,7 +9474,7 @@
             <a:r>
               <a:rPr lang="en-US" sz="1300" dirty="0">
                 <a:solidFill>
-                  <a:srgbClr val="4E8CFF"/>
+                  <a:srgbClr val="2563EB"/>
                 </a:solidFill>
                 <a:latin typeface="Apple SD Gothic Neo" pitchFamily="34" charset="0"/>
                 <a:ea typeface="Apple SD Gothic Neo" pitchFamily="34" charset="-122"/>
@@ -9374,13 +9501,18 @@
             <a:avLst/>
           </a:prstGeom>
           <a:solidFill>
-            <a:srgbClr val="1A1D27"/>
+            <a:srgbClr val="F3F4F8"/>
           </a:solidFill>
-          <a:ln/>
+          <a:ln w="9525">
+            <a:solidFill>
+              <a:srgbClr val="D1D5E0"/>
+            </a:solidFill>
+            <a:prstDash val="solid"/>
+          </a:ln>
           <a:effectLst>
-            <a:outerShdw sx="100000" sy="100000" kx="0" ky="0" algn="bl" rotWithShape="0" blurRad="76200" dist="25400" dir="8100000">
-              <a:srgbClr val="000000">
-                <a:alpha val="20000"/>
+            <a:outerShdw sx="100000" sy="100000" kx="0" ky="0" algn="bl" rotWithShape="0" blurRad="50800" dist="12700" dir="8100000">
+              <a:srgbClr val="B0B8C8">
+                <a:alpha val="15000"/>
               </a:srgbClr>
             </a:outerShdw>
           </a:effectLst>
@@ -9401,7 +9533,7 @@
             <a:avLst/>
           </a:prstGeom>
           <a:solidFill>
-            <a:srgbClr val="4E8CFF"/>
+            <a:srgbClr val="2563EB"/>
           </a:solidFill>
           <a:ln/>
         </p:spPr>
@@ -9433,7 +9565,7 @@
             <a:r>
               <a:rPr lang="en-US" sz="1800" b="1" dirty="0">
                 <a:solidFill>
-                  <a:srgbClr val="E4E6ED"/>
+                  <a:srgbClr val="1E2030"/>
                 </a:solidFill>
                 <a:latin typeface="Apple SD Gothic Neo" pitchFamily="34" charset="0"/>
                 <a:ea typeface="Apple SD Gothic Neo" pitchFamily="34" charset="-122"/>
@@ -9475,7 +9607,7 @@
             <a:r>
               <a:rPr lang="en-US" sz="1100" dirty="0">
                 <a:solidFill>
-                  <a:srgbClr val="8B8FA3"/>
+                  <a:srgbClr val="4B5068"/>
                 </a:solidFill>
                 <a:latin typeface="Apple SD Gothic Neo" pitchFamily="34" charset="0"/>
                 <a:ea typeface="Apple SD Gothic Neo" pitchFamily="34" charset="-122"/>
@@ -9495,7 +9627,7 @@
             <a:r>
               <a:rPr lang="en-US" sz="1100" dirty="0">
                 <a:solidFill>
-                  <a:srgbClr val="8B8FA3"/>
+                  <a:srgbClr val="4B5068"/>
                 </a:solidFill>
                 <a:latin typeface="Apple SD Gothic Neo" pitchFamily="34" charset="0"/>
                 <a:ea typeface="Apple SD Gothic Neo" pitchFamily="34" charset="-122"/>
@@ -9534,7 +9666,7 @@
             <a:r>
               <a:rPr lang="en-US" sz="900" dirty="0">
                 <a:solidFill>
-                  <a:srgbClr val="5C6072"/>
+                  <a:srgbClr val="9CA3AF"/>
                 </a:solidFill>
                 <a:latin typeface="Apple SD Gothic Neo" pitchFamily="34" charset="0"/>
                 <a:ea typeface="Apple SD Gothic Neo" pitchFamily="34" charset="-122"/>
@@ -9561,13 +9693,18 @@
             <a:avLst/>
           </a:prstGeom>
           <a:solidFill>
-            <a:srgbClr val="1A1D27"/>
+            <a:srgbClr val="F3F4F8"/>
           </a:solidFill>
-          <a:ln/>
+          <a:ln w="9525">
+            <a:solidFill>
+              <a:srgbClr val="D1D5E0"/>
+            </a:solidFill>
+            <a:prstDash val="solid"/>
+          </a:ln>
           <a:effectLst>
-            <a:outerShdw sx="100000" sy="100000" kx="0" ky="0" algn="bl" rotWithShape="0" blurRad="76200" dist="25400" dir="8100000">
-              <a:srgbClr val="000000">
-                <a:alpha val="20000"/>
+            <a:outerShdw sx="100000" sy="100000" kx="0" ky="0" algn="bl" rotWithShape="0" blurRad="50800" dist="12700" dir="8100000">
+              <a:srgbClr val="B0B8C8">
+                <a:alpha val="15000"/>
               </a:srgbClr>
             </a:outerShdw>
           </a:effectLst>
@@ -9588,7 +9725,7 @@
             <a:avLst/>
           </a:prstGeom>
           <a:solidFill>
-            <a:srgbClr val="FB923C"/>
+            <a:srgbClr val="EA580C"/>
           </a:solidFill>
           <a:ln/>
         </p:spPr>
@@ -9620,7 +9757,7 @@
             <a:r>
               <a:rPr lang="en-US" sz="1800" b="1" dirty="0">
                 <a:solidFill>
-                  <a:srgbClr val="E4E6ED"/>
+                  <a:srgbClr val="1E2030"/>
                 </a:solidFill>
                 <a:latin typeface="Apple SD Gothic Neo" pitchFamily="34" charset="0"/>
                 <a:ea typeface="Apple SD Gothic Neo" pitchFamily="34" charset="-122"/>
@@ -9662,7 +9799,7 @@
             <a:r>
               <a:rPr lang="en-US" sz="1100" dirty="0">
                 <a:solidFill>
-                  <a:srgbClr val="8B8FA3"/>
+                  <a:srgbClr val="4B5068"/>
                 </a:solidFill>
                 <a:latin typeface="Apple SD Gothic Neo" pitchFamily="34" charset="0"/>
                 <a:ea typeface="Apple SD Gothic Neo" pitchFamily="34" charset="-122"/>
@@ -9682,7 +9819,7 @@
             <a:r>
               <a:rPr lang="en-US" sz="1100" dirty="0">
                 <a:solidFill>
-                  <a:srgbClr val="8B8FA3"/>
+                  <a:srgbClr val="4B5068"/>
                 </a:solidFill>
                 <a:latin typeface="Apple SD Gothic Neo" pitchFamily="34" charset="0"/>
                 <a:ea typeface="Apple SD Gothic Neo" pitchFamily="34" charset="-122"/>
@@ -9721,7 +9858,7 @@
             <a:r>
               <a:rPr lang="en-US" sz="900" dirty="0">
                 <a:solidFill>
-                  <a:srgbClr val="5C6072"/>
+                  <a:srgbClr val="9CA3AF"/>
                 </a:solidFill>
                 <a:latin typeface="Apple SD Gothic Neo" pitchFamily="34" charset="0"/>
                 <a:ea typeface="Apple SD Gothic Neo" pitchFamily="34" charset="-122"/>
@@ -9748,13 +9885,18 @@
             <a:avLst/>
           </a:prstGeom>
           <a:solidFill>
-            <a:srgbClr val="1A1D27"/>
+            <a:srgbClr val="F3F4F8"/>
           </a:solidFill>
-          <a:ln/>
+          <a:ln w="9525">
+            <a:solidFill>
+              <a:srgbClr val="D1D5E0"/>
+            </a:solidFill>
+            <a:prstDash val="solid"/>
+          </a:ln>
           <a:effectLst>
-            <a:outerShdw sx="100000" sy="100000" kx="0" ky="0" algn="bl" rotWithShape="0" blurRad="76200" dist="25400" dir="8100000">
-              <a:srgbClr val="000000">
-                <a:alpha val="20000"/>
+            <a:outerShdw sx="100000" sy="100000" kx="0" ky="0" algn="bl" rotWithShape="0" blurRad="50800" dist="12700" dir="8100000">
+              <a:srgbClr val="B0B8C8">
+                <a:alpha val="15000"/>
               </a:srgbClr>
             </a:outerShdw>
           </a:effectLst>
@@ -9775,7 +9917,7 @@
             <a:avLst/>
           </a:prstGeom>
           <a:solidFill>
-            <a:srgbClr val="A78BFA"/>
+            <a:srgbClr val="7C3AED"/>
           </a:solidFill>
           <a:ln/>
         </p:spPr>
@@ -9807,7 +9949,7 @@
             <a:r>
               <a:rPr lang="en-US" sz="1800" b="1" dirty="0">
                 <a:solidFill>
-                  <a:srgbClr val="E4E6ED"/>
+                  <a:srgbClr val="1E2030"/>
                 </a:solidFill>
                 <a:latin typeface="Apple SD Gothic Neo" pitchFamily="34" charset="0"/>
                 <a:ea typeface="Apple SD Gothic Neo" pitchFamily="34" charset="-122"/>
@@ -9849,7 +9991,7 @@
             <a:r>
               <a:rPr lang="en-US" sz="1100" dirty="0">
                 <a:solidFill>
-                  <a:srgbClr val="8B8FA3"/>
+                  <a:srgbClr val="4B5068"/>
                 </a:solidFill>
                 <a:latin typeface="Apple SD Gothic Neo" pitchFamily="34" charset="0"/>
                 <a:ea typeface="Apple SD Gothic Neo" pitchFamily="34" charset="-122"/>
@@ -9869,7 +10011,7 @@
             <a:r>
               <a:rPr lang="en-US" sz="1100" dirty="0">
                 <a:solidFill>
-                  <a:srgbClr val="8B8FA3"/>
+                  <a:srgbClr val="4B5068"/>
                 </a:solidFill>
                 <a:latin typeface="Apple SD Gothic Neo" pitchFamily="34" charset="0"/>
                 <a:ea typeface="Apple SD Gothic Neo" pitchFamily="34" charset="-122"/>
@@ -9908,7 +10050,7 @@
             <a:r>
               <a:rPr lang="en-US" sz="900" dirty="0">
                 <a:solidFill>
-                  <a:srgbClr val="5C6072"/>
+                  <a:srgbClr val="9CA3AF"/>
                 </a:solidFill>
                 <a:latin typeface="Apple SD Gothic Neo" pitchFamily="34" charset="0"/>
                 <a:ea typeface="Apple SD Gothic Neo" pitchFamily="34" charset="-122"/>
@@ -9935,13 +10077,18 @@
             <a:avLst/>
           </a:prstGeom>
           <a:solidFill>
-            <a:srgbClr val="1A1D27"/>
+            <a:srgbClr val="F3F4F8"/>
           </a:solidFill>
-          <a:ln/>
+          <a:ln w="9525">
+            <a:solidFill>
+              <a:srgbClr val="D1D5E0"/>
+            </a:solidFill>
+            <a:prstDash val="solid"/>
+          </a:ln>
           <a:effectLst>
-            <a:outerShdw sx="100000" sy="100000" kx="0" ky="0" algn="bl" rotWithShape="0" blurRad="76200" dist="25400" dir="8100000">
-              <a:srgbClr val="000000">
-                <a:alpha val="20000"/>
+            <a:outerShdw sx="100000" sy="100000" kx="0" ky="0" algn="bl" rotWithShape="0" blurRad="50800" dist="12700" dir="8100000">
+              <a:srgbClr val="B0B8C8">
+                <a:alpha val="15000"/>
               </a:srgbClr>
             </a:outerShdw>
           </a:effectLst>
@@ -9962,7 +10109,7 @@
             <a:avLst/>
           </a:prstGeom>
           <a:solidFill>
-            <a:srgbClr val="38BDF8"/>
+            <a:srgbClr val="0891B2"/>
           </a:solidFill>
           <a:ln/>
         </p:spPr>
@@ -9994,7 +10141,7 @@
             <a:r>
               <a:rPr lang="en-US" sz="1800" b="1" dirty="0">
                 <a:solidFill>
-                  <a:srgbClr val="E4E6ED"/>
+                  <a:srgbClr val="1E2030"/>
                 </a:solidFill>
                 <a:latin typeface="Apple SD Gothic Neo" pitchFamily="34" charset="0"/>
                 <a:ea typeface="Apple SD Gothic Neo" pitchFamily="34" charset="-122"/>
@@ -10036,7 +10183,7 @@
             <a:r>
               <a:rPr lang="en-US" sz="1100" dirty="0">
                 <a:solidFill>
-                  <a:srgbClr val="8B8FA3"/>
+                  <a:srgbClr val="4B5068"/>
                 </a:solidFill>
                 <a:latin typeface="Apple SD Gothic Neo" pitchFamily="34" charset="0"/>
                 <a:ea typeface="Apple SD Gothic Neo" pitchFamily="34" charset="-122"/>
@@ -10056,7 +10203,7 @@
             <a:r>
               <a:rPr lang="en-US" sz="1100" dirty="0">
                 <a:solidFill>
-                  <a:srgbClr val="8B8FA3"/>
+                  <a:srgbClr val="4B5068"/>
                 </a:solidFill>
                 <a:latin typeface="Apple SD Gothic Neo" pitchFamily="34" charset="0"/>
                 <a:ea typeface="Apple SD Gothic Neo" pitchFamily="34" charset="-122"/>
@@ -10095,7 +10242,7 @@
             <a:r>
               <a:rPr lang="en-US" sz="900" dirty="0">
                 <a:solidFill>
-                  <a:srgbClr val="5C6072"/>
+                  <a:srgbClr val="9CA3AF"/>
                 </a:solidFill>
                 <a:latin typeface="Apple SD Gothic Neo" pitchFamily="34" charset="0"/>
                 <a:ea typeface="Apple SD Gothic Neo" pitchFamily="34" charset="-122"/>
@@ -10122,13 +10269,18 @@
             <a:avLst/>
           </a:prstGeom>
           <a:solidFill>
-            <a:srgbClr val="1A1D27"/>
+            <a:srgbClr val="F3F4F8"/>
           </a:solidFill>
-          <a:ln/>
+          <a:ln w="9525">
+            <a:solidFill>
+              <a:srgbClr val="D1D5E0"/>
+            </a:solidFill>
+            <a:prstDash val="solid"/>
+          </a:ln>
           <a:effectLst>
-            <a:outerShdw sx="100000" sy="100000" kx="0" ky="0" algn="bl" rotWithShape="0" blurRad="76200" dist="25400" dir="8100000">
-              <a:srgbClr val="000000">
-                <a:alpha val="20000"/>
+            <a:outerShdw sx="100000" sy="100000" kx="0" ky="0" algn="bl" rotWithShape="0" blurRad="50800" dist="12700" dir="8100000">
+              <a:srgbClr val="B0B8C8">
+                <a:alpha val="15000"/>
               </a:srgbClr>
             </a:outerShdw>
           </a:effectLst>
@@ -10149,7 +10301,7 @@
             <a:avLst/>
           </a:prstGeom>
           <a:solidFill>
-            <a:srgbClr val="FBBF24"/>
+            <a:srgbClr val="D97706"/>
           </a:solidFill>
           <a:ln/>
         </p:spPr>
@@ -10181,7 +10333,7 @@
             <a:r>
               <a:rPr lang="en-US" sz="1800" b="1" dirty="0">
                 <a:solidFill>
-                  <a:srgbClr val="E4E6ED"/>
+                  <a:srgbClr val="1E2030"/>
                 </a:solidFill>
                 <a:latin typeface="Apple SD Gothic Neo" pitchFamily="34" charset="0"/>
                 <a:ea typeface="Apple SD Gothic Neo" pitchFamily="34" charset="-122"/>
@@ -10223,7 +10375,7 @@
             <a:r>
               <a:rPr lang="en-US" sz="1100" dirty="0">
                 <a:solidFill>
-                  <a:srgbClr val="8B8FA3"/>
+                  <a:srgbClr val="4B5068"/>
                 </a:solidFill>
                 <a:latin typeface="Apple SD Gothic Neo" pitchFamily="34" charset="0"/>
                 <a:ea typeface="Apple SD Gothic Neo" pitchFamily="34" charset="-122"/>
@@ -10243,7 +10395,7 @@
             <a:r>
               <a:rPr lang="en-US" sz="1100" dirty="0">
                 <a:solidFill>
-                  <a:srgbClr val="8B8FA3"/>
+                  <a:srgbClr val="4B5068"/>
                 </a:solidFill>
                 <a:latin typeface="Apple SD Gothic Neo" pitchFamily="34" charset="0"/>
                 <a:ea typeface="Apple SD Gothic Neo" pitchFamily="34" charset="-122"/>
@@ -10282,7 +10434,7 @@
             <a:r>
               <a:rPr lang="en-US" sz="900" dirty="0">
                 <a:solidFill>
-                  <a:srgbClr val="5C6072"/>
+                  <a:srgbClr val="9CA3AF"/>
                 </a:solidFill>
                 <a:latin typeface="Apple SD Gothic Neo" pitchFamily="34" charset="0"/>
                 <a:ea typeface="Apple SD Gothic Neo" pitchFamily="34" charset="-122"/>
@@ -10309,13 +10461,18 @@
             <a:avLst/>
           </a:prstGeom>
           <a:solidFill>
-            <a:srgbClr val="1A1D27"/>
+            <a:srgbClr val="F3F4F8"/>
           </a:solidFill>
-          <a:ln/>
+          <a:ln w="9525">
+            <a:solidFill>
+              <a:srgbClr val="D1D5E0"/>
+            </a:solidFill>
+            <a:prstDash val="solid"/>
+          </a:ln>
           <a:effectLst>
-            <a:outerShdw sx="100000" sy="100000" kx="0" ky="0" algn="bl" rotWithShape="0" blurRad="76200" dist="25400" dir="8100000">
-              <a:srgbClr val="000000">
-                <a:alpha val="20000"/>
+            <a:outerShdw sx="100000" sy="100000" kx="0" ky="0" algn="bl" rotWithShape="0" blurRad="50800" dist="12700" dir="8100000">
+              <a:srgbClr val="B0B8C8">
+                <a:alpha val="15000"/>
               </a:srgbClr>
             </a:outerShdw>
           </a:effectLst>
@@ -10336,7 +10493,7 @@
             <a:avLst/>
           </a:prstGeom>
           <a:solidFill>
-            <a:srgbClr val="F87171"/>
+            <a:srgbClr val="DC2626"/>
           </a:solidFill>
           <a:ln/>
         </p:spPr>
@@ -10368,7 +10525,7 @@
             <a:r>
               <a:rPr lang="en-US" sz="1800" b="1" dirty="0">
                 <a:solidFill>
-                  <a:srgbClr val="E4E6ED"/>
+                  <a:srgbClr val="1E2030"/>
                 </a:solidFill>
                 <a:latin typeface="Apple SD Gothic Neo" pitchFamily="34" charset="0"/>
                 <a:ea typeface="Apple SD Gothic Neo" pitchFamily="34" charset="-122"/>
@@ -10410,7 +10567,7 @@
             <a:r>
               <a:rPr lang="en-US" sz="1100" dirty="0">
                 <a:solidFill>
-                  <a:srgbClr val="8B8FA3"/>
+                  <a:srgbClr val="4B5068"/>
                 </a:solidFill>
                 <a:latin typeface="Apple SD Gothic Neo" pitchFamily="34" charset="0"/>
                 <a:ea typeface="Apple SD Gothic Neo" pitchFamily="34" charset="-122"/>
@@ -10430,7 +10587,7 @@
             <a:r>
               <a:rPr lang="en-US" sz="1100" dirty="0">
                 <a:solidFill>
-                  <a:srgbClr val="8B8FA3"/>
+                  <a:srgbClr val="4B5068"/>
                 </a:solidFill>
                 <a:latin typeface="Apple SD Gothic Neo" pitchFamily="34" charset="0"/>
                 <a:ea typeface="Apple SD Gothic Neo" pitchFamily="34" charset="-122"/>
@@ -10469,7 +10626,7 @@
             <a:r>
               <a:rPr lang="en-US" sz="900" dirty="0">
                 <a:solidFill>
-                  <a:srgbClr val="5C6072"/>
+                  <a:srgbClr val="9CA3AF"/>
                 </a:solidFill>
                 <a:latin typeface="Apple SD Gothic Neo" pitchFamily="34" charset="0"/>
                 <a:ea typeface="Apple SD Gothic Neo" pitchFamily="34" charset="-122"/>
@@ -10495,7 +10652,7 @@
     <p:bg>
       <p:bgPr>
         <a:solidFill>
-          <a:srgbClr val="0F1117"/>
+          <a:srgbClr val="FFFFFF"/>
         </a:solidFill>
       </p:bgPr>
     </p:bg>
@@ -10528,7 +10685,7 @@
             <a:avLst/>
           </a:prstGeom>
           <a:solidFill>
-            <a:srgbClr val="4E8CFF"/>
+            <a:srgbClr val="2563EB"/>
           </a:solidFill>
           <a:ln/>
         </p:spPr>
@@ -10560,7 +10717,7 @@
             <a:r>
               <a:rPr lang="en-US" sz="2400" b="1" dirty="0">
                 <a:solidFill>
-                  <a:srgbClr val="E4E6ED"/>
+                  <a:srgbClr val="1E2030"/>
                 </a:solidFill>
                 <a:latin typeface="Apple SD Gothic Neo" pitchFamily="34" charset="0"/>
                 <a:ea typeface="Apple SD Gothic Neo" pitchFamily="34" charset="-122"/>
@@ -10599,7 +10756,7 @@
             <a:r>
               <a:rPr lang="en-US" sz="1300" dirty="0">
                 <a:solidFill>
-                  <a:srgbClr val="4E8CFF"/>
+                  <a:srgbClr val="2563EB"/>
                 </a:solidFill>
                 <a:latin typeface="Apple SD Gothic Neo" pitchFamily="34" charset="0"/>
                 <a:ea typeface="Apple SD Gothic Neo" pitchFamily="34" charset="-122"/>
@@ -10626,9 +10783,14 @@
             <a:avLst/>
           </a:prstGeom>
           <a:solidFill>
-            <a:srgbClr val="161822"/>
+            <a:srgbClr val="E8EAF0"/>
           </a:solidFill>
-          <a:ln/>
+          <a:ln w="9525">
+            <a:solidFill>
+              <a:srgbClr val="D1D5E0"/>
+            </a:solidFill>
+            <a:prstDash val="solid"/>
+          </a:ln>
         </p:spPr>
       </p:sp>
       <p:sp>
@@ -10658,7 +10820,7 @@
             <a:r>
               <a:rPr lang="en-US" sz="1300" b="1" dirty="0">
                 <a:solidFill>
-                  <a:srgbClr val="FBBF24"/>
+                  <a:srgbClr val="D97706"/>
                 </a:solidFill>
                 <a:latin typeface="Apple SD Gothic Neo" pitchFamily="34" charset="0"/>
                 <a:ea typeface="Apple SD Gothic Neo" pitchFamily="34" charset="-122"/>
@@ -10672,7 +10834,7 @@
             <a:r>
               <a:rPr lang="en-US" sz="1300" dirty="0">
                 <a:solidFill>
-                  <a:srgbClr val="E4E6ED"/>
+                  <a:srgbClr val="1E2030"/>
                 </a:solidFill>
                 <a:latin typeface="Apple SD Gothic Neo" pitchFamily="34" charset="0"/>
                 <a:ea typeface="Apple SD Gothic Neo" pitchFamily="34" charset="-122"/>
@@ -10711,7 +10873,7 @@
             <a:r>
               <a:rPr lang="en-US" sz="1200" dirty="0">
                 <a:solidFill>
-                  <a:srgbClr val="8B8FA3"/>
+                  <a:srgbClr val="4B5068"/>
                 </a:solidFill>
                 <a:latin typeface="Apple SD Gothic Neo" pitchFamily="34" charset="0"/>
                 <a:ea typeface="Apple SD Gothic Neo" pitchFamily="34" charset="-122"/>
@@ -10725,7 +10887,7 @@
             <a:r>
               <a:rPr lang="en-US" sz="1200" b="1" dirty="0">
                 <a:solidFill>
-                  <a:srgbClr val="34D399"/>
+                  <a:srgbClr val="059669"/>
                 </a:solidFill>
                 <a:latin typeface="Apple SD Gothic Neo" pitchFamily="34" charset="0"/>
                 <a:ea typeface="Apple SD Gothic Neo" pitchFamily="34" charset="-122"/>
@@ -10764,7 +10926,7 @@
             <a:r>
               <a:rPr lang="en-US" sz="1200" dirty="0">
                 <a:solidFill>
-                  <a:srgbClr val="8B8FA3"/>
+                  <a:srgbClr val="4B5068"/>
                 </a:solidFill>
                 <a:latin typeface="Apple SD Gothic Neo" pitchFamily="34" charset="0"/>
                 <a:ea typeface="Apple SD Gothic Neo" pitchFamily="34" charset="-122"/>
@@ -10778,7 +10940,7 @@
             <a:r>
               <a:rPr lang="en-US" sz="1200" b="1" dirty="0">
                 <a:solidFill>
-                  <a:srgbClr val="F87171"/>
+                  <a:srgbClr val="DC2626"/>
                 </a:solidFill>
                 <a:latin typeface="Apple SD Gothic Neo" pitchFamily="34" charset="0"/>
                 <a:ea typeface="Apple SD Gothic Neo" pitchFamily="34" charset="-122"/>
@@ -10805,13 +10967,18 @@
             <a:avLst/>
           </a:prstGeom>
           <a:solidFill>
-            <a:srgbClr val="1A1D27"/>
+            <a:srgbClr val="F3F4F8"/>
           </a:solidFill>
-          <a:ln/>
+          <a:ln w="9525">
+            <a:solidFill>
+              <a:srgbClr val="D1D5E0"/>
+            </a:solidFill>
+            <a:prstDash val="solid"/>
+          </a:ln>
           <a:effectLst>
-            <a:outerShdw sx="100000" sy="100000" kx="0" ky="0" algn="bl" rotWithShape="0" blurRad="76200" dist="25400" dir="8100000">
-              <a:srgbClr val="000000">
-                <a:alpha val="20000"/>
+            <a:outerShdw sx="100000" sy="100000" kx="0" ky="0" algn="bl" rotWithShape="0" blurRad="50800" dist="12700" dir="8100000">
+              <a:srgbClr val="B0B8C8">
+                <a:alpha val="15000"/>
               </a:srgbClr>
             </a:outerShdw>
           </a:effectLst>
@@ -10832,7 +10999,7 @@
             <a:avLst/>
           </a:prstGeom>
           <a:solidFill>
-            <a:srgbClr val="4E8CFF"/>
+            <a:srgbClr val="2563EB"/>
           </a:solidFill>
           <a:ln/>
         </p:spPr>
@@ -10867,7 +11034,7 @@
             <a:r>
               <a:rPr lang="en-US" sz="1100" dirty="0">
                 <a:solidFill>
-                  <a:srgbClr val="E4E6ED"/>
+                  <a:srgbClr val="1E2030"/>
                 </a:solidFill>
                 <a:latin typeface="Apple SD Gothic Neo" pitchFamily="34" charset="0"/>
                 <a:ea typeface="Apple SD Gothic Neo" pitchFamily="34" charset="-122"/>
@@ -10887,7 +11054,7 @@
             <a:r>
               <a:rPr lang="en-US" sz="1100" dirty="0">
                 <a:solidFill>
-                  <a:srgbClr val="E4E6ED"/>
+                  <a:srgbClr val="1E2030"/>
                 </a:solidFill>
                 <a:latin typeface="Apple SD Gothic Neo" pitchFamily="34" charset="0"/>
                 <a:ea typeface="Apple SD Gothic Neo" pitchFamily="34" charset="-122"/>
@@ -10926,7 +11093,7 @@
             <a:r>
               <a:rPr lang="en-US" sz="2000" dirty="0">
                 <a:solidFill>
-                  <a:srgbClr val="4E8CFF"/>
+                  <a:srgbClr val="2563EB"/>
                 </a:solidFill>
                 <a:latin typeface="Apple SD Gothic Neo" pitchFamily="34" charset="0"/>
                 <a:ea typeface="Apple SD Gothic Neo" pitchFamily="34" charset="-122"/>
@@ -10953,13 +11120,18 @@
             <a:avLst/>
           </a:prstGeom>
           <a:solidFill>
-            <a:srgbClr val="1A1D27"/>
+            <a:srgbClr val="F3F4F8"/>
           </a:solidFill>
-          <a:ln/>
+          <a:ln w="9525">
+            <a:solidFill>
+              <a:srgbClr val="D1D5E0"/>
+            </a:solidFill>
+            <a:prstDash val="solid"/>
+          </a:ln>
           <a:effectLst>
-            <a:outerShdw sx="100000" sy="100000" kx="0" ky="0" algn="bl" rotWithShape="0" blurRad="76200" dist="25400" dir="8100000">
-              <a:srgbClr val="000000">
-                <a:alpha val="20000"/>
+            <a:outerShdw sx="100000" sy="100000" kx="0" ky="0" algn="bl" rotWithShape="0" blurRad="50800" dist="12700" dir="8100000">
+              <a:srgbClr val="B0B8C8">
+                <a:alpha val="15000"/>
               </a:srgbClr>
             </a:outerShdw>
           </a:effectLst>
@@ -10980,7 +11152,7 @@
             <a:avLst/>
           </a:prstGeom>
           <a:solidFill>
-            <a:srgbClr val="34D399"/>
+            <a:srgbClr val="059669"/>
           </a:solidFill>
           <a:ln/>
         </p:spPr>
@@ -11015,7 +11187,7 @@
             <a:r>
               <a:rPr lang="en-US" sz="1100" dirty="0">
                 <a:solidFill>
-                  <a:srgbClr val="E4E6ED"/>
+                  <a:srgbClr val="1E2030"/>
                 </a:solidFill>
                 <a:latin typeface="Apple SD Gothic Neo" pitchFamily="34" charset="0"/>
                 <a:ea typeface="Apple SD Gothic Neo" pitchFamily="34" charset="-122"/>
@@ -11035,7 +11207,7 @@
             <a:r>
               <a:rPr lang="en-US" sz="1100" dirty="0">
                 <a:solidFill>
-                  <a:srgbClr val="E4E6ED"/>
+                  <a:srgbClr val="1E2030"/>
                 </a:solidFill>
                 <a:latin typeface="Apple SD Gothic Neo" pitchFamily="34" charset="0"/>
                 <a:ea typeface="Apple SD Gothic Neo" pitchFamily="34" charset="-122"/>
@@ -11074,7 +11246,7 @@
             <a:r>
               <a:rPr lang="en-US" sz="2000" dirty="0">
                 <a:solidFill>
-                  <a:srgbClr val="4E8CFF"/>
+                  <a:srgbClr val="2563EB"/>
                 </a:solidFill>
                 <a:latin typeface="Apple SD Gothic Neo" pitchFamily="34" charset="0"/>
                 <a:ea typeface="Apple SD Gothic Neo" pitchFamily="34" charset="-122"/>
@@ -11101,13 +11273,18 @@
             <a:avLst/>
           </a:prstGeom>
           <a:solidFill>
-            <a:srgbClr val="1A1D27"/>
+            <a:srgbClr val="F3F4F8"/>
           </a:solidFill>
-          <a:ln/>
+          <a:ln w="9525">
+            <a:solidFill>
+              <a:srgbClr val="D1D5E0"/>
+            </a:solidFill>
+            <a:prstDash val="solid"/>
+          </a:ln>
           <a:effectLst>
-            <a:outerShdw sx="100000" sy="100000" kx="0" ky="0" algn="bl" rotWithShape="0" blurRad="76200" dist="25400" dir="8100000">
-              <a:srgbClr val="000000">
-                <a:alpha val="20000"/>
+            <a:outerShdw sx="100000" sy="100000" kx="0" ky="0" algn="bl" rotWithShape="0" blurRad="50800" dist="12700" dir="8100000">
+              <a:srgbClr val="B0B8C8">
+                <a:alpha val="15000"/>
               </a:srgbClr>
             </a:outerShdw>
           </a:effectLst>
@@ -11128,7 +11305,7 @@
             <a:avLst/>
           </a:prstGeom>
           <a:solidFill>
-            <a:srgbClr val="FBBF24"/>
+            <a:srgbClr val="D97706"/>
           </a:solidFill>
           <a:ln/>
         </p:spPr>
@@ -11163,7 +11340,7 @@
             <a:r>
               <a:rPr lang="en-US" sz="1100" dirty="0">
                 <a:solidFill>
-                  <a:srgbClr val="E4E6ED"/>
+                  <a:srgbClr val="1E2030"/>
                 </a:solidFill>
                 <a:latin typeface="Apple SD Gothic Neo" pitchFamily="34" charset="0"/>
                 <a:ea typeface="Apple SD Gothic Neo" pitchFamily="34" charset="-122"/>
@@ -11183,7 +11360,7 @@
             <a:r>
               <a:rPr lang="en-US" sz="1100" dirty="0">
                 <a:solidFill>
-                  <a:srgbClr val="E4E6ED"/>
+                  <a:srgbClr val="1E2030"/>
                 </a:solidFill>
                 <a:latin typeface="Apple SD Gothic Neo" pitchFamily="34" charset="0"/>
                 <a:ea typeface="Apple SD Gothic Neo" pitchFamily="34" charset="-122"/>
@@ -11222,7 +11399,7 @@
             <a:r>
               <a:rPr lang="en-US" sz="2000" dirty="0">
                 <a:solidFill>
-                  <a:srgbClr val="4E8CFF"/>
+                  <a:srgbClr val="2563EB"/>
                 </a:solidFill>
                 <a:latin typeface="Apple SD Gothic Neo" pitchFamily="34" charset="0"/>
                 <a:ea typeface="Apple SD Gothic Neo" pitchFamily="34" charset="-122"/>
@@ -11249,13 +11426,18 @@
             <a:avLst/>
           </a:prstGeom>
           <a:solidFill>
-            <a:srgbClr val="1A1D27"/>
+            <a:srgbClr val="F3F4F8"/>
           </a:solidFill>
-          <a:ln/>
+          <a:ln w="9525">
+            <a:solidFill>
+              <a:srgbClr val="D1D5E0"/>
+            </a:solidFill>
+            <a:prstDash val="solid"/>
+          </a:ln>
           <a:effectLst>
-            <a:outerShdw sx="100000" sy="100000" kx="0" ky="0" algn="bl" rotWithShape="0" blurRad="76200" dist="25400" dir="8100000">
-              <a:srgbClr val="000000">
-                <a:alpha val="20000"/>
+            <a:outerShdw sx="100000" sy="100000" kx="0" ky="0" algn="bl" rotWithShape="0" blurRad="50800" dist="12700" dir="8100000">
+              <a:srgbClr val="B0B8C8">
+                <a:alpha val="15000"/>
               </a:srgbClr>
             </a:outerShdw>
           </a:effectLst>
@@ -11276,7 +11458,7 @@
             <a:avLst/>
           </a:prstGeom>
           <a:solidFill>
-            <a:srgbClr val="F87171"/>
+            <a:srgbClr val="DC2626"/>
           </a:solidFill>
           <a:ln/>
         </p:spPr>
@@ -11311,7 +11493,7 @@
             <a:r>
               <a:rPr lang="en-US" sz="1100" dirty="0">
                 <a:solidFill>
-                  <a:srgbClr val="E4E6ED"/>
+                  <a:srgbClr val="1E2030"/>
                 </a:solidFill>
                 <a:latin typeface="Apple SD Gothic Neo" pitchFamily="34" charset="0"/>
                 <a:ea typeface="Apple SD Gothic Neo" pitchFamily="34" charset="-122"/>
@@ -11331,7 +11513,7 @@
             <a:r>
               <a:rPr lang="en-US" sz="1100" dirty="0">
                 <a:solidFill>
-                  <a:srgbClr val="E4E6ED"/>
+                  <a:srgbClr val="1E2030"/>
                 </a:solidFill>
                 <a:latin typeface="Apple SD Gothic Neo" pitchFamily="34" charset="0"/>
                 <a:ea typeface="Apple SD Gothic Neo" pitchFamily="34" charset="-122"/>
@@ -11370,7 +11552,7 @@
             <a:r>
               <a:rPr lang="en-US" sz="1300" b="1" dirty="0">
                 <a:solidFill>
-                  <a:srgbClr val="34D399"/>
+                  <a:srgbClr val="059669"/>
                 </a:solidFill>
                 <a:latin typeface="Apple SD Gothic Neo" pitchFamily="34" charset="0"/>
                 <a:ea typeface="Apple SD Gothic Neo" pitchFamily="34" charset="-122"/>
@@ -11397,9 +11579,14 @@
             <a:avLst/>
           </a:prstGeom>
           <a:solidFill>
-            <a:srgbClr val="0D3320"/>
+            <a:srgbClr val="ECFDF5"/>
           </a:solidFill>
-          <a:ln/>
+          <a:ln w="9525">
+            <a:solidFill>
+              <a:srgbClr val="D1D5E0"/>
+            </a:solidFill>
+            <a:prstDash val="solid"/>
+          </a:ln>
         </p:spPr>
       </p:sp>
       <p:sp>
@@ -11429,7 +11616,7 @@
             <a:r>
               <a:rPr lang="en-US" sz="1100" dirty="0">
                 <a:solidFill>
-                  <a:srgbClr val="8B8FA3"/>
+                  <a:srgbClr val="4B5068"/>
                 </a:solidFill>
                 <a:latin typeface="Apple SD Gothic Neo" pitchFamily="34" charset="0"/>
                 <a:ea typeface="Apple SD Gothic Neo" pitchFamily="34" charset="-122"/>
@@ -11468,7 +11655,7 @@
             <a:r>
               <a:rPr lang="en-US" sz="1500" b="1" dirty="0">
                 <a:solidFill>
-                  <a:srgbClr val="34D399"/>
+                  <a:srgbClr val="059669"/>
                 </a:solidFill>
                 <a:latin typeface="Apple SD Gothic Neo" pitchFamily="34" charset="0"/>
                 <a:ea typeface="Apple SD Gothic Neo" pitchFamily="34" charset="-122"/>
@@ -11507,7 +11694,7 @@
             <a:r>
               <a:rPr lang="en-US" sz="1300" b="1" dirty="0">
                 <a:solidFill>
-                  <a:srgbClr val="F87171"/>
+                  <a:srgbClr val="DC2626"/>
                 </a:solidFill>
                 <a:latin typeface="Apple SD Gothic Neo" pitchFamily="34" charset="0"/>
                 <a:ea typeface="Apple SD Gothic Neo" pitchFamily="34" charset="-122"/>
@@ -11534,9 +11721,14 @@
             <a:avLst/>
           </a:prstGeom>
           <a:solidFill>
-            <a:srgbClr val="3D1515"/>
+            <a:srgbClr val="FEF2F2"/>
           </a:solidFill>
-          <a:ln/>
+          <a:ln w="9525">
+            <a:solidFill>
+              <a:srgbClr val="D1D5E0"/>
+            </a:solidFill>
+            <a:prstDash val="solid"/>
+          </a:ln>
         </p:spPr>
       </p:sp>
       <p:sp>
@@ -11566,7 +11758,7 @@
             <a:r>
               <a:rPr lang="en-US" sz="1100" dirty="0">
                 <a:solidFill>
-                  <a:srgbClr val="8B8FA3"/>
+                  <a:srgbClr val="4B5068"/>
                 </a:solidFill>
                 <a:latin typeface="Apple SD Gothic Neo" pitchFamily="34" charset="0"/>
                 <a:ea typeface="Apple SD Gothic Neo" pitchFamily="34" charset="-122"/>
@@ -11605,7 +11797,7 @@
             <a:r>
               <a:rPr lang="en-US" sz="1500" b="1" dirty="0">
                 <a:solidFill>
-                  <a:srgbClr val="F87171"/>
+                  <a:srgbClr val="DC2626"/>
                 </a:solidFill>
                 <a:latin typeface="Apple SD Gothic Neo" pitchFamily="34" charset="0"/>
                 <a:ea typeface="Apple SD Gothic Neo" pitchFamily="34" charset="-122"/>
@@ -11631,7 +11823,7 @@
     <p:bg>
       <p:bgPr>
         <a:solidFill>
-          <a:srgbClr val="0F1117"/>
+          <a:srgbClr val="FFFFFF"/>
         </a:solidFill>
       </p:bgPr>
     </p:bg>
@@ -11664,7 +11856,7 @@
             <a:avLst/>
           </a:prstGeom>
           <a:solidFill>
-            <a:srgbClr val="4E8CFF"/>
+            <a:srgbClr val="2563EB"/>
           </a:solidFill>
           <a:ln/>
         </p:spPr>
@@ -11696,7 +11888,7 @@
             <a:r>
               <a:rPr lang="en-US" sz="2400" b="1" dirty="0">
                 <a:solidFill>
-                  <a:srgbClr val="E4E6ED"/>
+                  <a:srgbClr val="1E2030"/>
                 </a:solidFill>
                 <a:latin typeface="Apple SD Gothic Neo" pitchFamily="34" charset="0"/>
                 <a:ea typeface="Apple SD Gothic Neo" pitchFamily="34" charset="-122"/>
@@ -11735,7 +11927,7 @@
             <a:r>
               <a:rPr lang="en-US" sz="1300" dirty="0">
                 <a:solidFill>
-                  <a:srgbClr val="4E8CFF"/>
+                  <a:srgbClr val="2563EB"/>
                 </a:solidFill>
                 <a:latin typeface="Apple SD Gothic Neo" pitchFamily="34" charset="0"/>
                 <a:ea typeface="Apple SD Gothic Neo" pitchFamily="34" charset="-122"/>
@@ -11762,11 +11954,13 @@
             <a:avLst/>
           </a:prstGeom>
           <a:solidFill>
-            <a:srgbClr val="1A1D27"/>
+            <a:srgbClr val="059669">
+              <a:alpha val="8000"/>
+            </a:srgbClr>
           </a:solidFill>
           <a:ln w="19050">
             <a:solidFill>
-              <a:srgbClr val="34D399"/>
+              <a:srgbClr val="059669"/>
             </a:solidFill>
             <a:prstDash val="solid"/>
           </a:ln>
@@ -11799,7 +11993,7 @@
             <a:r>
               <a:rPr lang="en-US" sz="900" dirty="0">
                 <a:solidFill>
-                  <a:srgbClr val="E4E6ED"/>
+                  <a:srgbClr val="1E2030"/>
                 </a:solidFill>
                 <a:latin typeface="Apple SD Gothic Neo" pitchFamily="34" charset="0"/>
                 <a:ea typeface="Apple SD Gothic Neo" pitchFamily="34" charset="-122"/>
@@ -11838,7 +12032,7 @@
             <a:r>
               <a:rPr lang="en-US" sz="700" dirty="0">
                 <a:solidFill>
-                  <a:srgbClr val="34D399"/>
+                  <a:srgbClr val="059669"/>
                 </a:solidFill>
                 <a:latin typeface="Apple SD Gothic Neo" pitchFamily="34" charset="0"/>
                 <a:ea typeface="Apple SD Gothic Neo" pitchFamily="34" charset="-122"/>
@@ -11865,11 +12059,13 @@
             <a:avLst/>
           </a:prstGeom>
           <a:solidFill>
-            <a:srgbClr val="1A1D27"/>
+            <a:srgbClr val="059669">
+              <a:alpha val="8000"/>
+            </a:srgbClr>
           </a:solidFill>
           <a:ln w="19050">
             <a:solidFill>
-              <a:srgbClr val="34D399"/>
+              <a:srgbClr val="059669"/>
             </a:solidFill>
             <a:prstDash val="solid"/>
           </a:ln>
@@ -11902,7 +12098,7 @@
             <a:r>
               <a:rPr lang="en-US" sz="900" dirty="0">
                 <a:solidFill>
-                  <a:srgbClr val="E4E6ED"/>
+                  <a:srgbClr val="1E2030"/>
                 </a:solidFill>
                 <a:latin typeface="Apple SD Gothic Neo" pitchFamily="34" charset="0"/>
                 <a:ea typeface="Apple SD Gothic Neo" pitchFamily="34" charset="-122"/>
@@ -11941,7 +12137,7 @@
             <a:r>
               <a:rPr lang="en-US" sz="700" dirty="0">
                 <a:solidFill>
-                  <a:srgbClr val="34D399"/>
+                  <a:srgbClr val="059669"/>
                 </a:solidFill>
                 <a:latin typeface="Apple SD Gothic Neo" pitchFamily="34" charset="0"/>
                 <a:ea typeface="Apple SD Gothic Neo" pitchFamily="34" charset="-122"/>
@@ -11980,7 +12176,7 @@
             <a:r>
               <a:rPr lang="en-US" sz="700" dirty="0">
                 <a:solidFill>
-                  <a:srgbClr val="34D399"/>
+                  <a:srgbClr val="059669"/>
                 </a:solidFill>
                 <a:latin typeface="Apple SD Gothic Neo" pitchFamily="34" charset="0"/>
                 <a:ea typeface="Apple SD Gothic Neo" pitchFamily="34" charset="-122"/>
@@ -12007,11 +12203,13 @@
             <a:avLst/>
           </a:prstGeom>
           <a:solidFill>
-            <a:srgbClr val="1A1D27"/>
+            <a:srgbClr val="059669">
+              <a:alpha val="8000"/>
+            </a:srgbClr>
           </a:solidFill>
           <a:ln w="19050">
             <a:solidFill>
-              <a:srgbClr val="34D399"/>
+              <a:srgbClr val="059669"/>
             </a:solidFill>
             <a:prstDash val="solid"/>
           </a:ln>
@@ -12044,7 +12242,7 @@
             <a:r>
               <a:rPr lang="en-US" sz="900" dirty="0">
                 <a:solidFill>
-                  <a:srgbClr val="E4E6ED"/>
+                  <a:srgbClr val="1E2030"/>
                 </a:solidFill>
                 <a:latin typeface="Apple SD Gothic Neo" pitchFamily="34" charset="0"/>
                 <a:ea typeface="Apple SD Gothic Neo" pitchFamily="34" charset="-122"/>
@@ -12083,7 +12281,7 @@
             <a:r>
               <a:rPr lang="en-US" sz="700" dirty="0">
                 <a:solidFill>
-                  <a:srgbClr val="34D399"/>
+                  <a:srgbClr val="059669"/>
                 </a:solidFill>
                 <a:latin typeface="Apple SD Gothic Neo" pitchFamily="34" charset="0"/>
                 <a:ea typeface="Apple SD Gothic Neo" pitchFamily="34" charset="-122"/>
@@ -12122,7 +12320,7 @@
             <a:r>
               <a:rPr lang="en-US" sz="700" dirty="0">
                 <a:solidFill>
-                  <a:srgbClr val="34D399"/>
+                  <a:srgbClr val="059669"/>
                 </a:solidFill>
                 <a:latin typeface="Apple SD Gothic Neo" pitchFamily="34" charset="0"/>
                 <a:ea typeface="Apple SD Gothic Neo" pitchFamily="34" charset="-122"/>
@@ -12149,11 +12347,13 @@
             <a:avLst/>
           </a:prstGeom>
           <a:solidFill>
-            <a:srgbClr val="1A1D27"/>
+            <a:srgbClr val="7C3AED">
+              <a:alpha val="8000"/>
+            </a:srgbClr>
           </a:solidFill>
           <a:ln w="19050">
             <a:solidFill>
-              <a:srgbClr val="A78BFA"/>
+              <a:srgbClr val="7C3AED"/>
             </a:solidFill>
             <a:prstDash val="solid"/>
           </a:ln>
@@ -12186,7 +12386,7 @@
             <a:r>
               <a:rPr lang="en-US" sz="900" dirty="0">
                 <a:solidFill>
-                  <a:srgbClr val="E4E6ED"/>
+                  <a:srgbClr val="1E2030"/>
                 </a:solidFill>
                 <a:latin typeface="Apple SD Gothic Neo" pitchFamily="34" charset="0"/>
                 <a:ea typeface="Apple SD Gothic Neo" pitchFamily="34" charset="-122"/>
@@ -12225,7 +12425,7 @@
             <a:r>
               <a:rPr lang="en-US" sz="700" dirty="0">
                 <a:solidFill>
-                  <a:srgbClr val="A78BFA"/>
+                  <a:srgbClr val="7C3AED"/>
                 </a:solidFill>
                 <a:latin typeface="Apple SD Gothic Neo" pitchFamily="34" charset="0"/>
                 <a:ea typeface="Apple SD Gothic Neo" pitchFamily="34" charset="-122"/>
@@ -12264,7 +12464,7 @@
             <a:r>
               <a:rPr lang="en-US" sz="700" dirty="0">
                 <a:solidFill>
-                  <a:srgbClr val="F87171"/>
+                  <a:srgbClr val="DC2626"/>
                 </a:solidFill>
                 <a:latin typeface="Apple SD Gothic Neo" pitchFamily="34" charset="0"/>
                 <a:ea typeface="Apple SD Gothic Neo" pitchFamily="34" charset="-122"/>
@@ -12303,7 +12503,7 @@
             <a:r>
               <a:rPr lang="en-US" sz="1000" dirty="0">
                 <a:solidFill>
-                  <a:srgbClr val="F87171"/>
+                  <a:srgbClr val="DC2626"/>
                 </a:solidFill>
                 <a:latin typeface="Apple SD Gothic Neo" pitchFamily="34" charset="0"/>
                 <a:ea typeface="Apple SD Gothic Neo" pitchFamily="34" charset="-122"/>
@@ -12330,11 +12530,13 @@
             <a:avLst/>
           </a:prstGeom>
           <a:solidFill>
-            <a:srgbClr val="1A1D27"/>
+            <a:srgbClr val="7C3AED">
+              <a:alpha val="8000"/>
+            </a:srgbClr>
           </a:solidFill>
           <a:ln w="19050">
             <a:solidFill>
-              <a:srgbClr val="A78BFA"/>
+              <a:srgbClr val="7C3AED"/>
             </a:solidFill>
             <a:prstDash val="solid"/>
           </a:ln>
@@ -12367,7 +12569,7 @@
             <a:r>
               <a:rPr lang="en-US" sz="900" dirty="0">
                 <a:solidFill>
-                  <a:srgbClr val="E4E6ED"/>
+                  <a:srgbClr val="1E2030"/>
                 </a:solidFill>
                 <a:latin typeface="Apple SD Gothic Neo" pitchFamily="34" charset="0"/>
                 <a:ea typeface="Apple SD Gothic Neo" pitchFamily="34" charset="-122"/>
@@ -12406,7 +12608,7 @@
             <a:r>
               <a:rPr lang="en-US" sz="700" dirty="0">
                 <a:solidFill>
-                  <a:srgbClr val="A78BFA"/>
+                  <a:srgbClr val="7C3AED"/>
                 </a:solidFill>
                 <a:latin typeface="Apple SD Gothic Neo" pitchFamily="34" charset="0"/>
                 <a:ea typeface="Apple SD Gothic Neo" pitchFamily="34" charset="-122"/>
@@ -12445,7 +12647,7 @@
             <a:r>
               <a:rPr lang="en-US" sz="700" dirty="0">
                 <a:solidFill>
-                  <a:srgbClr val="A78BFA"/>
+                  <a:srgbClr val="7C3AED"/>
                 </a:solidFill>
                 <a:latin typeface="Apple SD Gothic Neo" pitchFamily="34" charset="0"/>
                 <a:ea typeface="Apple SD Gothic Neo" pitchFamily="34" charset="-122"/>
@@ -12472,11 +12674,13 @@
             <a:avLst/>
           </a:prstGeom>
           <a:solidFill>
-            <a:srgbClr val="1A1D27"/>
+            <a:srgbClr val="D97706">
+              <a:alpha val="8000"/>
+            </a:srgbClr>
           </a:solidFill>
           <a:ln w="19050">
             <a:solidFill>
-              <a:srgbClr val="FBBF24"/>
+              <a:srgbClr val="D97706"/>
             </a:solidFill>
             <a:prstDash val="solid"/>
           </a:ln>
@@ -12509,7 +12713,7 @@
             <a:r>
               <a:rPr lang="en-US" sz="900" dirty="0">
                 <a:solidFill>
-                  <a:srgbClr val="E4E6ED"/>
+                  <a:srgbClr val="1E2030"/>
                 </a:solidFill>
                 <a:latin typeface="Apple SD Gothic Neo" pitchFamily="34" charset="0"/>
                 <a:ea typeface="Apple SD Gothic Neo" pitchFamily="34" charset="-122"/>
@@ -12548,7 +12752,7 @@
             <a:r>
               <a:rPr lang="en-US" sz="700" dirty="0">
                 <a:solidFill>
-                  <a:srgbClr val="FBBF24"/>
+                  <a:srgbClr val="D97706"/>
                 </a:solidFill>
                 <a:latin typeface="Apple SD Gothic Neo" pitchFamily="34" charset="0"/>
                 <a:ea typeface="Apple SD Gothic Neo" pitchFamily="34" charset="-122"/>
@@ -12587,7 +12791,7 @@
             <a:r>
               <a:rPr lang="en-US" sz="700" dirty="0">
                 <a:solidFill>
-                  <a:srgbClr val="F87171"/>
+                  <a:srgbClr val="DC2626"/>
                 </a:solidFill>
                 <a:latin typeface="Apple SD Gothic Neo" pitchFamily="34" charset="0"/>
                 <a:ea typeface="Apple SD Gothic Neo" pitchFamily="34" charset="-122"/>
@@ -12626,7 +12830,7 @@
             <a:r>
               <a:rPr lang="en-US" sz="1000" dirty="0">
                 <a:solidFill>
-                  <a:srgbClr val="F87171"/>
+                  <a:srgbClr val="DC2626"/>
                 </a:solidFill>
                 <a:latin typeface="Apple SD Gothic Neo" pitchFamily="34" charset="0"/>
                 <a:ea typeface="Apple SD Gothic Neo" pitchFamily="34" charset="-122"/>
@@ -12653,11 +12857,13 @@
             <a:avLst/>
           </a:prstGeom>
           <a:solidFill>
-            <a:srgbClr val="1A1D27"/>
+            <a:srgbClr val="0891B2">
+              <a:alpha val="8000"/>
+            </a:srgbClr>
           </a:solidFill>
           <a:ln w="19050">
             <a:solidFill>
-              <a:srgbClr val="38BDF8"/>
+              <a:srgbClr val="0891B2"/>
             </a:solidFill>
             <a:prstDash val="solid"/>
           </a:ln>
@@ -12690,7 +12896,7 @@
             <a:r>
               <a:rPr lang="en-US" sz="900" dirty="0">
                 <a:solidFill>
-                  <a:srgbClr val="E4E6ED"/>
+                  <a:srgbClr val="1E2030"/>
                 </a:solidFill>
                 <a:latin typeface="Apple SD Gothic Neo" pitchFamily="34" charset="0"/>
                 <a:ea typeface="Apple SD Gothic Neo" pitchFamily="34" charset="-122"/>
@@ -12729,7 +12935,7 @@
             <a:r>
               <a:rPr lang="en-US" sz="700" dirty="0">
                 <a:solidFill>
-                  <a:srgbClr val="38BDF8"/>
+                  <a:srgbClr val="0891B2"/>
                 </a:solidFill>
                 <a:latin typeface="Apple SD Gothic Neo" pitchFamily="34" charset="0"/>
                 <a:ea typeface="Apple SD Gothic Neo" pitchFamily="34" charset="-122"/>
@@ -12768,7 +12974,7 @@
             <a:r>
               <a:rPr lang="en-US" sz="700" dirty="0">
                 <a:solidFill>
-                  <a:srgbClr val="F87171"/>
+                  <a:srgbClr val="DC2626"/>
                 </a:solidFill>
                 <a:latin typeface="Apple SD Gothic Neo" pitchFamily="34" charset="0"/>
                 <a:ea typeface="Apple SD Gothic Neo" pitchFamily="34" charset="-122"/>
@@ -12807,7 +13013,7 @@
             <a:r>
               <a:rPr lang="en-US" sz="1000" dirty="0">
                 <a:solidFill>
-                  <a:srgbClr val="F87171"/>
+                  <a:srgbClr val="DC2626"/>
                 </a:solidFill>
                 <a:latin typeface="Apple SD Gothic Neo" pitchFamily="34" charset="0"/>
                 <a:ea typeface="Apple SD Gothic Neo" pitchFamily="34" charset="-122"/>
@@ -12834,11 +13040,13 @@
             <a:avLst/>
           </a:prstGeom>
           <a:solidFill>
-            <a:srgbClr val="1A1D27"/>
+            <a:srgbClr val="0891B2">
+              <a:alpha val="8000"/>
+            </a:srgbClr>
           </a:solidFill>
           <a:ln w="19050">
             <a:solidFill>
-              <a:srgbClr val="38BDF8"/>
+              <a:srgbClr val="0891B2"/>
             </a:solidFill>
             <a:prstDash val="solid"/>
           </a:ln>
@@ -12871,7 +13079,7 @@
             <a:r>
               <a:rPr lang="en-US" sz="900" dirty="0">
                 <a:solidFill>
-                  <a:srgbClr val="E4E6ED"/>
+                  <a:srgbClr val="1E2030"/>
                 </a:solidFill>
                 <a:latin typeface="Apple SD Gothic Neo" pitchFamily="34" charset="0"/>
                 <a:ea typeface="Apple SD Gothic Neo" pitchFamily="34" charset="-122"/>
@@ -12910,7 +13118,7 @@
             <a:r>
               <a:rPr lang="en-US" sz="700" dirty="0">
                 <a:solidFill>
-                  <a:srgbClr val="38BDF8"/>
+                  <a:srgbClr val="0891B2"/>
                 </a:solidFill>
                 <a:latin typeface="Apple SD Gothic Neo" pitchFamily="34" charset="0"/>
                 <a:ea typeface="Apple SD Gothic Neo" pitchFamily="34" charset="-122"/>
@@ -12949,7 +13157,7 @@
             <a:r>
               <a:rPr lang="en-US" sz="700" dirty="0">
                 <a:solidFill>
-                  <a:srgbClr val="38BDF8"/>
+                  <a:srgbClr val="0891B2"/>
                 </a:solidFill>
                 <a:latin typeface="Apple SD Gothic Neo" pitchFamily="34" charset="0"/>
                 <a:ea typeface="Apple SD Gothic Neo" pitchFamily="34" charset="-122"/>
@@ -12976,11 +13184,13 @@
             <a:avLst/>
           </a:prstGeom>
           <a:solidFill>
-            <a:srgbClr val="1A1D27"/>
+            <a:srgbClr val="0891B2">
+              <a:alpha val="8000"/>
+            </a:srgbClr>
           </a:solidFill>
           <a:ln w="19050">
             <a:solidFill>
-              <a:srgbClr val="38BDF8"/>
+              <a:srgbClr val="0891B2"/>
             </a:solidFill>
             <a:prstDash val="solid"/>
           </a:ln>
@@ -13013,7 +13223,7 @@
             <a:r>
               <a:rPr lang="en-US" sz="900" dirty="0">
                 <a:solidFill>
-                  <a:srgbClr val="E4E6ED"/>
+                  <a:srgbClr val="1E2030"/>
                 </a:solidFill>
                 <a:latin typeface="Apple SD Gothic Neo" pitchFamily="34" charset="0"/>
                 <a:ea typeface="Apple SD Gothic Neo" pitchFamily="34" charset="-122"/>
@@ -13052,7 +13262,7 @@
             <a:r>
               <a:rPr lang="en-US" sz="700" dirty="0">
                 <a:solidFill>
-                  <a:srgbClr val="38BDF8"/>
+                  <a:srgbClr val="0891B2"/>
                 </a:solidFill>
                 <a:latin typeface="Apple SD Gothic Neo" pitchFamily="34" charset="0"/>
                 <a:ea typeface="Apple SD Gothic Neo" pitchFamily="34" charset="-122"/>
@@ -13091,7 +13301,7 @@
             <a:r>
               <a:rPr lang="en-US" sz="700" dirty="0">
                 <a:solidFill>
-                  <a:srgbClr val="38BDF8"/>
+                  <a:srgbClr val="0891B2"/>
                 </a:solidFill>
                 <a:latin typeface="Apple SD Gothic Neo" pitchFamily="34" charset="0"/>
                 <a:ea typeface="Apple SD Gothic Neo" pitchFamily="34" charset="-122"/>
@@ -13130,7 +13340,7 @@
             <a:r>
               <a:rPr lang="en-US" sz="1400" b="1" dirty="0">
                 <a:solidFill>
-                  <a:srgbClr val="E4E6ED"/>
+                  <a:srgbClr val="1E2030"/>
                 </a:solidFill>
                 <a:latin typeface="Apple SD Gothic Neo" pitchFamily="34" charset="0"/>
                 <a:ea typeface="Apple SD Gothic Neo" pitchFamily="34" charset="-122"/>
@@ -13157,13 +13367,18 @@
             <a:avLst/>
           </a:prstGeom>
           <a:solidFill>
-            <a:srgbClr val="1A1D27"/>
+            <a:srgbClr val="F3F4F8"/>
           </a:solidFill>
-          <a:ln/>
+          <a:ln w="9525">
+            <a:solidFill>
+              <a:srgbClr val="D1D5E0"/>
+            </a:solidFill>
+            <a:prstDash val="solid"/>
+          </a:ln>
           <a:effectLst>
-            <a:outerShdw sx="100000" sy="100000" kx="0" ky="0" algn="bl" rotWithShape="0" blurRad="76200" dist="25400" dir="8100000">
-              <a:srgbClr val="000000">
-                <a:alpha val="20000"/>
+            <a:outerShdw sx="100000" sy="100000" kx="0" ky="0" algn="bl" rotWithShape="0" blurRad="50800" dist="12700" dir="8100000">
+              <a:srgbClr val="B0B8C8">
+                <a:alpha val="15000"/>
               </a:srgbClr>
             </a:outerShdw>
           </a:effectLst>
@@ -13184,7 +13399,7 @@
             <a:avLst/>
           </a:prstGeom>
           <a:solidFill>
-            <a:srgbClr val="34D399"/>
+            <a:srgbClr val="059669"/>
           </a:solidFill>
           <a:ln/>
         </p:spPr>
@@ -13216,7 +13431,7 @@
             <a:r>
               <a:rPr lang="en-US" sz="1100" b="1" dirty="0">
                 <a:solidFill>
-                  <a:srgbClr val="34D399"/>
+                  <a:srgbClr val="059669"/>
                 </a:solidFill>
                 <a:latin typeface="Apple SD Gothic Neo" pitchFamily="34" charset="0"/>
                 <a:ea typeface="Apple SD Gothic Neo" pitchFamily="34" charset="-122"/>
@@ -13255,7 +13470,7 @@
             <a:r>
               <a:rPr lang="en-US" sz="1000" dirty="0">
                 <a:solidFill>
-                  <a:srgbClr val="8B8FA3"/>
+                  <a:srgbClr val="4B5068"/>
                 </a:solidFill>
                 <a:latin typeface="Apple SD Gothic Neo" pitchFamily="34" charset="0"/>
                 <a:ea typeface="Apple SD Gothic Neo" pitchFamily="34" charset="-122"/>
@@ -13282,13 +13497,18 @@
             <a:avLst/>
           </a:prstGeom>
           <a:solidFill>
-            <a:srgbClr val="1A1D27"/>
+            <a:srgbClr val="F3F4F8"/>
           </a:solidFill>
-          <a:ln/>
+          <a:ln w="9525">
+            <a:solidFill>
+              <a:srgbClr val="D1D5E0"/>
+            </a:solidFill>
+            <a:prstDash val="solid"/>
+          </a:ln>
           <a:effectLst>
-            <a:outerShdw sx="100000" sy="100000" kx="0" ky="0" algn="bl" rotWithShape="0" blurRad="76200" dist="25400" dir="8100000">
-              <a:srgbClr val="000000">
-                <a:alpha val="20000"/>
+            <a:outerShdw sx="100000" sy="100000" kx="0" ky="0" algn="bl" rotWithShape="0" blurRad="50800" dist="12700" dir="8100000">
+              <a:srgbClr val="B0B8C8">
+                <a:alpha val="15000"/>
               </a:srgbClr>
             </a:outerShdw>
           </a:effectLst>
@@ -13309,7 +13529,7 @@
             <a:avLst/>
           </a:prstGeom>
           <a:solidFill>
-            <a:srgbClr val="A78BFA"/>
+            <a:srgbClr val="7C3AED"/>
           </a:solidFill>
           <a:ln/>
         </p:spPr>
@@ -13341,7 +13561,7 @@
             <a:r>
               <a:rPr lang="en-US" sz="1100" b="1" dirty="0">
                 <a:solidFill>
-                  <a:srgbClr val="A78BFA"/>
+                  <a:srgbClr val="7C3AED"/>
                 </a:solidFill>
                 <a:latin typeface="Apple SD Gothic Neo" pitchFamily="34" charset="0"/>
                 <a:ea typeface="Apple SD Gothic Neo" pitchFamily="34" charset="-122"/>
@@ -13380,7 +13600,7 @@
             <a:r>
               <a:rPr lang="en-US" sz="1000" dirty="0">
                 <a:solidFill>
-                  <a:srgbClr val="8B8FA3"/>
+                  <a:srgbClr val="4B5068"/>
                 </a:solidFill>
                 <a:latin typeface="Apple SD Gothic Neo" pitchFamily="34" charset="0"/>
                 <a:ea typeface="Apple SD Gothic Neo" pitchFamily="34" charset="-122"/>
@@ -13407,13 +13627,18 @@
             <a:avLst/>
           </a:prstGeom>
           <a:solidFill>
-            <a:srgbClr val="1A1D27"/>
+            <a:srgbClr val="F3F4F8"/>
           </a:solidFill>
-          <a:ln/>
+          <a:ln w="9525">
+            <a:solidFill>
+              <a:srgbClr val="D1D5E0"/>
+            </a:solidFill>
+            <a:prstDash val="solid"/>
+          </a:ln>
           <a:effectLst>
-            <a:outerShdw sx="100000" sy="100000" kx="0" ky="0" algn="bl" rotWithShape="0" blurRad="76200" dist="25400" dir="8100000">
-              <a:srgbClr val="000000">
-                <a:alpha val="20000"/>
+            <a:outerShdw sx="100000" sy="100000" kx="0" ky="0" algn="bl" rotWithShape="0" blurRad="50800" dist="12700" dir="8100000">
+              <a:srgbClr val="B0B8C8">
+                <a:alpha val="15000"/>
               </a:srgbClr>
             </a:outerShdw>
           </a:effectLst>
@@ -13434,7 +13659,7 @@
             <a:avLst/>
           </a:prstGeom>
           <a:solidFill>
-            <a:srgbClr val="FBBF24"/>
+            <a:srgbClr val="D97706"/>
           </a:solidFill>
           <a:ln/>
         </p:spPr>
@@ -13466,7 +13691,7 @@
             <a:r>
               <a:rPr lang="en-US" sz="1100" b="1" dirty="0">
                 <a:solidFill>
-                  <a:srgbClr val="FBBF24"/>
+                  <a:srgbClr val="D97706"/>
                 </a:solidFill>
                 <a:latin typeface="Apple SD Gothic Neo" pitchFamily="34" charset="0"/>
                 <a:ea typeface="Apple SD Gothic Neo" pitchFamily="34" charset="-122"/>
@@ -13505,7 +13730,7 @@
             <a:r>
               <a:rPr lang="en-US" sz="1000" dirty="0">
                 <a:solidFill>
-                  <a:srgbClr val="8B8FA3"/>
+                  <a:srgbClr val="4B5068"/>
                 </a:solidFill>
                 <a:latin typeface="Apple SD Gothic Neo" pitchFamily="34" charset="0"/>
                 <a:ea typeface="Apple SD Gothic Neo" pitchFamily="34" charset="-122"/>
@@ -13532,13 +13757,18 @@
             <a:avLst/>
           </a:prstGeom>
           <a:solidFill>
-            <a:srgbClr val="1A1D27"/>
+            <a:srgbClr val="F3F4F8"/>
           </a:solidFill>
-          <a:ln/>
+          <a:ln w="9525">
+            <a:solidFill>
+              <a:srgbClr val="D1D5E0"/>
+            </a:solidFill>
+            <a:prstDash val="solid"/>
+          </a:ln>
           <a:effectLst>
-            <a:outerShdw sx="100000" sy="100000" kx="0" ky="0" algn="bl" rotWithShape="0" blurRad="76200" dist="25400" dir="8100000">
-              <a:srgbClr val="000000">
-                <a:alpha val="20000"/>
+            <a:outerShdw sx="100000" sy="100000" kx="0" ky="0" algn="bl" rotWithShape="0" blurRad="50800" dist="12700" dir="8100000">
+              <a:srgbClr val="B0B8C8">
+                <a:alpha val="15000"/>
               </a:srgbClr>
             </a:outerShdw>
           </a:effectLst>
@@ -13559,7 +13789,7 @@
             <a:avLst/>
           </a:prstGeom>
           <a:solidFill>
-            <a:srgbClr val="38BDF8"/>
+            <a:srgbClr val="0891B2"/>
           </a:solidFill>
           <a:ln/>
         </p:spPr>
@@ -13591,7 +13821,7 @@
             <a:r>
               <a:rPr lang="en-US" sz="1100" b="1" dirty="0">
                 <a:solidFill>
-                  <a:srgbClr val="38BDF8"/>
+                  <a:srgbClr val="0891B2"/>
                 </a:solidFill>
                 <a:latin typeface="Apple SD Gothic Neo" pitchFamily="34" charset="0"/>
                 <a:ea typeface="Apple SD Gothic Neo" pitchFamily="34" charset="-122"/>
@@ -13630,7 +13860,7 @@
             <a:r>
               <a:rPr lang="en-US" sz="1000" dirty="0">
                 <a:solidFill>
-                  <a:srgbClr val="8B8FA3"/>
+                  <a:srgbClr val="4B5068"/>
                 </a:solidFill>
                 <a:latin typeface="Apple SD Gothic Neo" pitchFamily="34" charset="0"/>
                 <a:ea typeface="Apple SD Gothic Neo" pitchFamily="34" charset="-122"/>
@@ -13657,9 +13887,14 @@
             <a:avLst/>
           </a:prstGeom>
           <a:solidFill>
-            <a:srgbClr val="0D3320"/>
+            <a:srgbClr val="ECFDF5"/>
           </a:solidFill>
-          <a:ln/>
+          <a:ln w="9525">
+            <a:solidFill>
+              <a:srgbClr val="D1D5E0"/>
+            </a:solidFill>
+            <a:prstDash val="solid"/>
+          </a:ln>
         </p:spPr>
       </p:sp>
       <p:sp>
@@ -13689,7 +13924,7 @@
             <a:r>
               <a:rPr lang="en-US" sz="1500" b="1" dirty="0">
                 <a:solidFill>
-                  <a:srgbClr val="34D399"/>
+                  <a:srgbClr val="059669"/>
                 </a:solidFill>
                 <a:latin typeface="Apple SD Gothic Neo" pitchFamily="34" charset="0"/>
                 <a:ea typeface="Apple SD Gothic Neo" pitchFamily="34" charset="-122"/>
@@ -13728,7 +13963,7 @@
             <a:r>
               <a:rPr lang="en-US" sz="1200" dirty="0">
                 <a:solidFill>
-                  <a:srgbClr val="8B8FA3"/>
+                  <a:srgbClr val="4B5068"/>
                 </a:solidFill>
                 <a:latin typeface="Apple SD Gothic Neo" pitchFamily="34" charset="0"/>
                 <a:ea typeface="Apple SD Gothic Neo" pitchFamily="34" charset="-122"/>
@@ -13767,7 +14002,7 @@
             <a:r>
               <a:rPr lang="en-US" sz="1400" b="1" dirty="0">
                 <a:solidFill>
-                  <a:srgbClr val="FBBF24"/>
+                  <a:srgbClr val="D97706"/>
                 </a:solidFill>
                 <a:latin typeface="Apple SD Gothic Neo" pitchFamily="34" charset="0"/>
                 <a:ea typeface="Apple SD Gothic Neo" pitchFamily="34" charset="-122"/>
@@ -13793,7 +14028,7 @@
     <p:bg>
       <p:bgPr>
         <a:solidFill>
-          <a:srgbClr val="0F1117"/>
+          <a:srgbClr val="FFFFFF"/>
         </a:solidFill>
       </p:bgPr>
     </p:bg>
@@ -13826,7 +14061,7 @@
             <a:avLst/>
           </a:prstGeom>
           <a:solidFill>
-            <a:srgbClr val="4E8CFF"/>
+            <a:srgbClr val="2563EB"/>
           </a:solidFill>
           <a:ln/>
         </p:spPr>
@@ -13858,7 +14093,7 @@
             <a:r>
               <a:rPr lang="en-US" sz="2400" b="1" dirty="0">
                 <a:solidFill>
-                  <a:srgbClr val="E4E6ED"/>
+                  <a:srgbClr val="1E2030"/>
                 </a:solidFill>
                 <a:latin typeface="Apple SD Gothic Neo" pitchFamily="34" charset="0"/>
                 <a:ea typeface="Apple SD Gothic Neo" pitchFamily="34" charset="-122"/>
@@ -13885,13 +14120,18 @@
             <a:avLst/>
           </a:prstGeom>
           <a:solidFill>
-            <a:srgbClr val="1A1D27"/>
+            <a:srgbClr val="F3F4F8"/>
           </a:solidFill>
-          <a:ln/>
+          <a:ln w="9525">
+            <a:solidFill>
+              <a:srgbClr val="D1D5E0"/>
+            </a:solidFill>
+            <a:prstDash val="solid"/>
+          </a:ln>
           <a:effectLst>
-            <a:outerShdw sx="100000" sy="100000" kx="0" ky="0" algn="bl" rotWithShape="0" blurRad="76200" dist="25400" dir="8100000">
-              <a:srgbClr val="000000">
-                <a:alpha val="20000"/>
+            <a:outerShdw sx="100000" sy="100000" kx="0" ky="0" algn="bl" rotWithShape="0" blurRad="50800" dist="12700" dir="8100000">
+              <a:srgbClr val="B0B8C8">
+                <a:alpha val="15000"/>
               </a:srgbClr>
             </a:outerShdw>
           </a:effectLst>
@@ -13912,7 +14152,7 @@
             <a:avLst/>
           </a:prstGeom>
           <a:solidFill>
-            <a:srgbClr val="3D1515"/>
+            <a:srgbClr val="FEF2F2"/>
           </a:solidFill>
           <a:ln/>
         </p:spPr>
@@ -13944,7 +14184,7 @@
             <a:r>
               <a:rPr lang="en-US" sz="1400" b="1" dirty="0">
                 <a:solidFill>
-                  <a:srgbClr val="F87171"/>
+                  <a:srgbClr val="DC2626"/>
                 </a:solidFill>
                 <a:latin typeface="Apple SD Gothic Neo" pitchFamily="34" charset="0"/>
                 <a:ea typeface="Apple SD Gothic Neo" pitchFamily="34" charset="-122"/>
@@ -13986,7 +14226,7 @@
             <a:r>
               <a:rPr lang="en-US" sz="1200" dirty="0">
                 <a:solidFill>
-                  <a:srgbClr val="8B8FA3"/>
+                  <a:srgbClr val="4B5068"/>
                 </a:solidFill>
                 <a:latin typeface="Apple SD Gothic Neo" pitchFamily="34" charset="0"/>
                 <a:ea typeface="Apple SD Gothic Neo" pitchFamily="34" charset="-122"/>
@@ -14008,7 +14248,7 @@
             <a:r>
               <a:rPr lang="en-US" sz="1200" dirty="0">
                 <a:solidFill>
-                  <a:srgbClr val="8B8FA3"/>
+                  <a:srgbClr val="4B5068"/>
                 </a:solidFill>
                 <a:latin typeface="Apple SD Gothic Neo" pitchFamily="34" charset="0"/>
                 <a:ea typeface="Apple SD Gothic Neo" pitchFamily="34" charset="-122"/>
@@ -14030,7 +14270,7 @@
             <a:r>
               <a:rPr lang="en-US" sz="1200" dirty="0">
                 <a:solidFill>
-                  <a:srgbClr val="8B8FA3"/>
+                  <a:srgbClr val="4B5068"/>
                 </a:solidFill>
                 <a:latin typeface="Apple SD Gothic Neo" pitchFamily="34" charset="0"/>
                 <a:ea typeface="Apple SD Gothic Neo" pitchFamily="34" charset="-122"/>
@@ -14052,7 +14292,7 @@
             <a:r>
               <a:rPr lang="en-US" sz="1300" b="1" dirty="0">
                 <a:solidFill>
-                  <a:srgbClr val="F87171"/>
+                  <a:srgbClr val="DC2626"/>
                 </a:solidFill>
                 <a:latin typeface="Apple SD Gothic Neo" pitchFamily="34" charset="0"/>
                 <a:ea typeface="Apple SD Gothic Neo" pitchFamily="34" charset="-122"/>
@@ -14079,13 +14319,18 @@
             <a:avLst/>
           </a:prstGeom>
           <a:solidFill>
-            <a:srgbClr val="1A1D27"/>
+            <a:srgbClr val="F3F4F8"/>
           </a:solidFill>
-          <a:ln/>
+          <a:ln w="9525">
+            <a:solidFill>
+              <a:srgbClr val="D1D5E0"/>
+            </a:solidFill>
+            <a:prstDash val="solid"/>
+          </a:ln>
           <a:effectLst>
-            <a:outerShdw sx="100000" sy="100000" kx="0" ky="0" algn="bl" rotWithShape="0" blurRad="76200" dist="25400" dir="8100000">
-              <a:srgbClr val="000000">
-                <a:alpha val="20000"/>
+            <a:outerShdw sx="100000" sy="100000" kx="0" ky="0" algn="bl" rotWithShape="0" blurRad="50800" dist="12700" dir="8100000">
+              <a:srgbClr val="B0B8C8">
+                <a:alpha val="15000"/>
               </a:srgbClr>
             </a:outerShdw>
           </a:effectLst>
@@ -14106,7 +14351,7 @@
             <a:avLst/>
           </a:prstGeom>
           <a:solidFill>
-            <a:srgbClr val="0D3320"/>
+            <a:srgbClr val="ECFDF5"/>
           </a:solidFill>
           <a:ln/>
         </p:spPr>
@@ -14138,7 +14383,7 @@
             <a:r>
               <a:rPr lang="en-US" sz="1400" b="1" dirty="0">
                 <a:solidFill>
-                  <a:srgbClr val="34D399"/>
+                  <a:srgbClr val="059669"/>
                 </a:solidFill>
                 <a:latin typeface="Apple SD Gothic Neo" pitchFamily="34" charset="0"/>
                 <a:ea typeface="Apple SD Gothic Neo" pitchFamily="34" charset="-122"/>
@@ -14180,7 +14425,7 @@
             <a:r>
               <a:rPr lang="en-US" sz="1200" dirty="0">
                 <a:solidFill>
-                  <a:srgbClr val="8B8FA3"/>
+                  <a:srgbClr val="4B5068"/>
                 </a:solidFill>
                 <a:latin typeface="Apple SD Gothic Neo" pitchFamily="34" charset="0"/>
                 <a:ea typeface="Apple SD Gothic Neo" pitchFamily="34" charset="-122"/>
@@ -14202,7 +14447,7 @@
             <a:r>
               <a:rPr lang="en-US" sz="1200" dirty="0">
                 <a:solidFill>
-                  <a:srgbClr val="8B8FA3"/>
+                  <a:srgbClr val="4B5068"/>
                 </a:solidFill>
                 <a:latin typeface="Apple SD Gothic Neo" pitchFamily="34" charset="0"/>
                 <a:ea typeface="Apple SD Gothic Neo" pitchFamily="34" charset="-122"/>
@@ -14224,7 +14469,7 @@
             <a:r>
               <a:rPr lang="en-US" sz="1200" dirty="0">
                 <a:solidFill>
-                  <a:srgbClr val="8B8FA3"/>
+                  <a:srgbClr val="4B5068"/>
                 </a:solidFill>
                 <a:latin typeface="Apple SD Gothic Neo" pitchFamily="34" charset="0"/>
                 <a:ea typeface="Apple SD Gothic Neo" pitchFamily="34" charset="-122"/>
@@ -14246,7 +14491,7 @@
             <a:r>
               <a:rPr lang="en-US" sz="1300" b="1" dirty="0">
                 <a:solidFill>
-                  <a:srgbClr val="34D399"/>
+                  <a:srgbClr val="059669"/>
                 </a:solidFill>
                 <a:latin typeface="Apple SD Gothic Neo" pitchFamily="34" charset="0"/>
                 <a:ea typeface="Apple SD Gothic Neo" pitchFamily="34" charset="-122"/>
@@ -14285,7 +14530,7 @@
             <a:r>
               <a:rPr lang="en-US" sz="1100" i="1" dirty="0">
                 <a:solidFill>
-                  <a:srgbClr val="8B8FA3"/>
+                  <a:srgbClr val="4B5068"/>
                 </a:solidFill>
                 <a:latin typeface="Apple SD Gothic Neo" pitchFamily="34" charset="0"/>
                 <a:ea typeface="Apple SD Gothic Neo" pitchFamily="34" charset="-122"/>
@@ -14311,7 +14556,7 @@
     <p:bg>
       <p:bgPr>
         <a:solidFill>
-          <a:srgbClr val="0F1117"/>
+          <a:srgbClr val="FFFFFF"/>
         </a:solidFill>
       </p:bgPr>
     </p:bg>
@@ -14344,7 +14589,7 @@
             <a:avLst/>
           </a:prstGeom>
           <a:solidFill>
-            <a:srgbClr val="FB923C"/>
+            <a:srgbClr val="EA580C"/>
           </a:solidFill>
           <a:ln/>
         </p:spPr>
@@ -14376,7 +14621,7 @@
             <a:r>
               <a:rPr lang="en-US" sz="2400" b="1" dirty="0">
                 <a:solidFill>
-                  <a:srgbClr val="E4E6ED"/>
+                  <a:srgbClr val="1E2030"/>
                 </a:solidFill>
                 <a:latin typeface="Apple SD Gothic Neo" pitchFamily="34" charset="0"/>
                 <a:ea typeface="Apple SD Gothic Neo" pitchFamily="34" charset="-122"/>
@@ -14415,7 +14660,7 @@
             <a:r>
               <a:rPr lang="en-US" sz="1300" dirty="0">
                 <a:solidFill>
-                  <a:srgbClr val="FB923C"/>
+                  <a:srgbClr val="EA580C"/>
                 </a:solidFill>
                 <a:latin typeface="Apple SD Gothic Neo" pitchFamily="34" charset="0"/>
                 <a:ea typeface="Apple SD Gothic Neo" pitchFamily="34" charset="-122"/>
@@ -14442,13 +14687,18 @@
             <a:avLst/>
           </a:prstGeom>
           <a:solidFill>
-            <a:srgbClr val="1E2235"/>
+            <a:srgbClr val="EFF6FF"/>
           </a:solidFill>
-          <a:ln/>
+          <a:ln w="9525">
+            <a:solidFill>
+              <a:srgbClr val="D1D5E0"/>
+            </a:solidFill>
+            <a:prstDash val="solid"/>
+          </a:ln>
           <a:effectLst>
-            <a:outerShdw sx="100000" sy="100000" kx="0" ky="0" algn="bl" rotWithShape="0" blurRad="76200" dist="25400" dir="8100000">
-              <a:srgbClr val="000000">
-                <a:alpha val="20000"/>
+            <a:outerShdw sx="100000" sy="100000" kx="0" ky="0" algn="bl" rotWithShape="0" blurRad="50800" dist="12700" dir="8100000">
+              <a:srgbClr val="B0B8C8">
+                <a:alpha val="15000"/>
               </a:srgbClr>
             </a:outerShdw>
           </a:effectLst>
@@ -14481,7 +14731,7 @@
             <a:r>
               <a:rPr lang="en-US" sz="1100" dirty="0">
                 <a:solidFill>
-                  <a:srgbClr val="8B8FA3"/>
+                  <a:srgbClr val="4B5068"/>
                 </a:solidFill>
                 <a:latin typeface="Apple SD Gothic Neo" pitchFamily="34" charset="0"/>
                 <a:ea typeface="Apple SD Gothic Neo" pitchFamily="34" charset="-122"/>
@@ -14508,7 +14758,7 @@
             <a:avLst/>
           </a:prstGeom>
           <a:solidFill>
-            <a:srgbClr val="4E8CFF"/>
+            <a:srgbClr val="2563EB"/>
           </a:solidFill>
           <a:ln/>
         </p:spPr>
@@ -14528,7 +14778,7 @@
             <a:avLst/>
           </a:prstGeom>
           <a:solidFill>
-            <a:srgbClr val="4E8CFF"/>
+            <a:srgbClr val="2563EB"/>
           </a:solidFill>
           <a:ln/>
         </p:spPr>
@@ -14548,7 +14798,7 @@
             <a:avLst/>
           </a:prstGeom>
           <a:solidFill>
-            <a:srgbClr val="4E8CFF"/>
+            <a:srgbClr val="2563EB"/>
           </a:solidFill>
           <a:ln/>
         </p:spPr>
@@ -14568,7 +14818,7 @@
             <a:avLst/>
           </a:prstGeom>
           <a:solidFill>
-            <a:srgbClr val="4E8CFF"/>
+            <a:srgbClr val="2563EB"/>
           </a:solidFill>
           <a:ln/>
         </p:spPr>
@@ -14588,7 +14838,7 @@
             <a:avLst/>
           </a:prstGeom>
           <a:solidFill>
-            <a:srgbClr val="4E8CFF"/>
+            <a:srgbClr val="2563EB"/>
           </a:solidFill>
           <a:ln/>
         </p:spPr>
@@ -14608,7 +14858,7 @@
             <a:avLst/>
           </a:prstGeom>
           <a:solidFill>
-            <a:srgbClr val="4E8CFF"/>
+            <a:srgbClr val="2563EB"/>
           </a:solidFill>
           <a:ln/>
         </p:spPr>
@@ -14628,7 +14878,7 @@
             <a:avLst/>
           </a:prstGeom>
           <a:solidFill>
-            <a:srgbClr val="4E8CFF"/>
+            <a:srgbClr val="2563EB"/>
           </a:solidFill>
           <a:ln/>
         </p:spPr>
@@ -14648,13 +14898,13 @@
             <a:avLst/>
           </a:prstGeom>
           <a:solidFill>
-            <a:srgbClr val="4E8CFF">
+            <a:srgbClr val="2563EB">
               <a:alpha val="10000"/>
             </a:srgbClr>
           </a:solidFill>
           <a:ln w="12700">
             <a:solidFill>
-              <a:srgbClr val="4E8CFF"/>
+              <a:srgbClr val="2563EB"/>
             </a:solidFill>
             <a:prstDash val="dash"/>
           </a:ln>
@@ -14690,7 +14940,7 @@
             <a:r>
               <a:rPr lang="en-US" sz="800" dirty="0">
                 <a:solidFill>
-                  <a:srgbClr val="4E8CFF"/>
+                  <a:srgbClr val="2563EB"/>
                 </a:solidFill>
                 <a:latin typeface="Apple SD Gothic Neo" pitchFamily="34" charset="0"/>
                 <a:ea typeface="Apple SD Gothic Neo" pitchFamily="34" charset="-122"/>
@@ -14710,7 +14960,7 @@
             <a:r>
               <a:rPr lang="en-US" sz="800" dirty="0">
                 <a:solidFill>
-                  <a:srgbClr val="4E8CFF"/>
+                  <a:srgbClr val="2563EB"/>
                 </a:solidFill>
                 <a:latin typeface="Apple SD Gothic Neo" pitchFamily="34" charset="0"/>
                 <a:ea typeface="Apple SD Gothic Neo" pitchFamily="34" charset="-122"/>
@@ -14737,7 +14987,7 @@
             <a:avLst/>
           </a:prstGeom>
           <a:solidFill>
-            <a:srgbClr val="34D399"/>
+            <a:srgbClr val="059669"/>
           </a:solidFill>
           <a:ln/>
         </p:spPr>
@@ -14757,7 +15007,7 @@
             <a:avLst/>
           </a:prstGeom>
           <a:solidFill>
-            <a:srgbClr val="34D399"/>
+            <a:srgbClr val="059669"/>
           </a:solidFill>
           <a:ln/>
         </p:spPr>
@@ -14777,7 +15027,7 @@
             <a:avLst/>
           </a:prstGeom>
           <a:solidFill>
-            <a:srgbClr val="34D399"/>
+            <a:srgbClr val="059669"/>
           </a:solidFill>
           <a:ln/>
         </p:spPr>
@@ -14797,7 +15047,7 @@
             <a:avLst/>
           </a:prstGeom>
           <a:solidFill>
-            <a:srgbClr val="34D399"/>
+            <a:srgbClr val="059669"/>
           </a:solidFill>
           <a:ln/>
         </p:spPr>
@@ -14817,7 +15067,7 @@
             <a:avLst/>
           </a:prstGeom>
           <a:solidFill>
-            <a:srgbClr val="34D399"/>
+            <a:srgbClr val="059669"/>
           </a:solidFill>
           <a:ln/>
         </p:spPr>
@@ -14837,7 +15087,7 @@
             <a:avLst/>
           </a:prstGeom>
           <a:solidFill>
-            <a:srgbClr val="34D399"/>
+            <a:srgbClr val="059669"/>
           </a:solidFill>
           <a:ln/>
         </p:spPr>
@@ -14857,7 +15107,7 @@
             <a:avLst/>
           </a:prstGeom>
           <a:solidFill>
-            <a:srgbClr val="34D399"/>
+            <a:srgbClr val="059669"/>
           </a:solidFill>
           <a:ln/>
         </p:spPr>
@@ -14877,7 +15127,7 @@
             <a:avLst/>
           </a:prstGeom>
           <a:solidFill>
-            <a:srgbClr val="34D399"/>
+            <a:srgbClr val="059669"/>
           </a:solidFill>
           <a:ln/>
         </p:spPr>
@@ -14897,13 +15147,13 @@
             <a:avLst/>
           </a:prstGeom>
           <a:solidFill>
-            <a:srgbClr val="34D399">
+            <a:srgbClr val="059669">
               <a:alpha val="10000"/>
             </a:srgbClr>
           </a:solidFill>
           <a:ln w="12700">
             <a:solidFill>
-              <a:srgbClr val="34D399"/>
+              <a:srgbClr val="059669"/>
             </a:solidFill>
             <a:prstDash val="dash"/>
           </a:ln>
@@ -14939,7 +15189,7 @@
             <a:r>
               <a:rPr lang="en-US" sz="800" dirty="0">
                 <a:solidFill>
-                  <a:srgbClr val="34D399"/>
+                  <a:srgbClr val="059669"/>
                 </a:solidFill>
                 <a:latin typeface="Apple SD Gothic Neo" pitchFamily="34" charset="0"/>
                 <a:ea typeface="Apple SD Gothic Neo" pitchFamily="34" charset="-122"/>
@@ -14959,7 +15209,7 @@
             <a:r>
               <a:rPr lang="en-US" sz="800" dirty="0">
                 <a:solidFill>
-                  <a:srgbClr val="34D399"/>
+                  <a:srgbClr val="059669"/>
                 </a:solidFill>
                 <a:latin typeface="Apple SD Gothic Neo" pitchFamily="34" charset="0"/>
                 <a:ea typeface="Apple SD Gothic Neo" pitchFamily="34" charset="-122"/>
@@ -14986,7 +15236,7 @@
             <a:avLst/>
           </a:prstGeom>
           <a:solidFill>
-            <a:srgbClr val="FBBF24"/>
+            <a:srgbClr val="D97706"/>
           </a:solidFill>
           <a:ln/>
         </p:spPr>
@@ -15006,7 +15256,7 @@
             <a:avLst/>
           </a:prstGeom>
           <a:solidFill>
-            <a:srgbClr val="FBBF24"/>
+            <a:srgbClr val="D97706"/>
           </a:solidFill>
           <a:ln/>
         </p:spPr>
@@ -15026,7 +15276,7 @@
             <a:avLst/>
           </a:prstGeom>
           <a:solidFill>
-            <a:srgbClr val="FBBF24"/>
+            <a:srgbClr val="D97706"/>
           </a:solidFill>
           <a:ln/>
         </p:spPr>
@@ -15046,7 +15296,7 @@
             <a:avLst/>
           </a:prstGeom>
           <a:solidFill>
-            <a:srgbClr val="FBBF24"/>
+            <a:srgbClr val="D97706"/>
           </a:solidFill>
           <a:ln/>
         </p:spPr>
@@ -15066,7 +15316,7 @@
             <a:avLst/>
           </a:prstGeom>
           <a:solidFill>
-            <a:srgbClr val="FBBF24"/>
+            <a:srgbClr val="D97706"/>
           </a:solidFill>
           <a:ln/>
         </p:spPr>
@@ -15086,13 +15336,13 @@
             <a:avLst/>
           </a:prstGeom>
           <a:solidFill>
-            <a:srgbClr val="FBBF24">
+            <a:srgbClr val="D97706">
               <a:alpha val="10000"/>
             </a:srgbClr>
           </a:solidFill>
           <a:ln w="12700">
             <a:solidFill>
-              <a:srgbClr val="FBBF24"/>
+              <a:srgbClr val="D97706"/>
             </a:solidFill>
             <a:prstDash val="dash"/>
           </a:ln>
@@ -15128,7 +15378,7 @@
             <a:r>
               <a:rPr lang="en-US" sz="800" dirty="0">
                 <a:solidFill>
-                  <a:srgbClr val="FBBF24"/>
+                  <a:srgbClr val="D97706"/>
                 </a:solidFill>
                 <a:latin typeface="Apple SD Gothic Neo" pitchFamily="34" charset="0"/>
                 <a:ea typeface="Apple SD Gothic Neo" pitchFamily="34" charset="-122"/>
@@ -15148,7 +15398,7 @@
             <a:r>
               <a:rPr lang="en-US" sz="800" dirty="0">
                 <a:solidFill>
-                  <a:srgbClr val="FBBF24"/>
+                  <a:srgbClr val="D97706"/>
                 </a:solidFill>
                 <a:latin typeface="Apple SD Gothic Neo" pitchFamily="34" charset="0"/>
                 <a:ea typeface="Apple SD Gothic Neo" pitchFamily="34" charset="-122"/>
@@ -15175,7 +15425,7 @@
             <a:avLst/>
           </a:prstGeom>
           <a:solidFill>
-            <a:srgbClr val="F87171">
+            <a:srgbClr val="DC2626">
               <a:alpha val="70000"/>
             </a:srgbClr>
           </a:solidFill>
@@ -15197,7 +15447,7 @@
             <a:avLst/>
           </a:prstGeom>
           <a:solidFill>
-            <a:srgbClr val="F87171">
+            <a:srgbClr val="DC2626">
               <a:alpha val="70000"/>
             </a:srgbClr>
           </a:solidFill>
@@ -15219,7 +15469,7 @@
             <a:avLst/>
           </a:prstGeom>
           <a:solidFill>
-            <a:srgbClr val="F87171">
+            <a:srgbClr val="DC2626">
               <a:alpha val="70000"/>
             </a:srgbClr>
           </a:solidFill>
@@ -15253,7 +15503,7 @@
             <a:r>
               <a:rPr lang="en-US" sz="700" dirty="0">
                 <a:solidFill>
-                  <a:srgbClr val="F87171"/>
+                  <a:srgbClr val="DC2626"/>
                 </a:solidFill>
                 <a:latin typeface="Apple SD Gothic Neo" pitchFamily="34" charset="0"/>
                 <a:ea typeface="Apple SD Gothic Neo" pitchFamily="34" charset="-122"/>
@@ -15280,13 +15530,18 @@
             <a:avLst/>
           </a:prstGeom>
           <a:solidFill>
-            <a:srgbClr val="161822"/>
+            <a:srgbClr val="E8EAF0"/>
           </a:solidFill>
-          <a:ln/>
+          <a:ln w="9525">
+            <a:solidFill>
+              <a:srgbClr val="D1D5E0"/>
+            </a:solidFill>
+            <a:prstDash val="solid"/>
+          </a:ln>
           <a:effectLst>
-            <a:outerShdw sx="100000" sy="100000" kx="0" ky="0" algn="bl" rotWithShape="0" blurRad="76200" dist="25400" dir="8100000">
-              <a:srgbClr val="000000">
-                <a:alpha val="20000"/>
+            <a:outerShdw sx="100000" sy="100000" kx="0" ky="0" algn="bl" rotWithShape="0" blurRad="50800" dist="12700" dir="8100000">
+              <a:srgbClr val="B0B8C8">
+                <a:alpha val="15000"/>
               </a:srgbClr>
             </a:outerShdw>
           </a:effectLst>
@@ -15319,7 +15574,7 @@
             <a:r>
               <a:rPr lang="en-US" sz="1500" b="1" dirty="0">
                 <a:solidFill>
-                  <a:srgbClr val="E4E6ED"/>
+                  <a:srgbClr val="1E2030"/>
                 </a:solidFill>
                 <a:latin typeface="Apple SD Gothic Neo" pitchFamily="34" charset="0"/>
                 <a:ea typeface="Apple SD Gothic Neo" pitchFamily="34" charset="-122"/>
@@ -15346,7 +15601,7 @@
             <a:avLst/>
           </a:prstGeom>
           <a:solidFill>
-            <a:srgbClr val="4E8CFF"/>
+            <a:srgbClr val="2563EB"/>
           </a:solidFill>
           <a:ln/>
         </p:spPr>
@@ -15378,7 +15633,7 @@
             <a:r>
               <a:rPr lang="en-US" sz="1100" dirty="0">
                 <a:solidFill>
-                  <a:srgbClr val="4E8CFF"/>
+                  <a:srgbClr val="2563EB"/>
                 </a:solidFill>
                 <a:latin typeface="Apple SD Gothic Neo" pitchFamily="34" charset="0"/>
                 <a:ea typeface="Apple SD Gothic Neo" pitchFamily="34" charset="-122"/>
@@ -15405,7 +15660,7 @@
             <a:avLst/>
           </a:prstGeom>
           <a:solidFill>
-            <a:srgbClr val="F87171"/>
+            <a:srgbClr val="DC2626"/>
           </a:solidFill>
           <a:ln/>
         </p:spPr>
@@ -15437,7 +15692,7 @@
             <a:r>
               <a:rPr lang="en-US" sz="1100" dirty="0">
                 <a:solidFill>
-                  <a:srgbClr val="E4E6ED"/>
+                  <a:srgbClr val="1E2030"/>
                 </a:solidFill>
                 <a:latin typeface="Apple SD Gothic Neo" pitchFamily="34" charset="0"/>
                 <a:ea typeface="Apple SD Gothic Neo" pitchFamily="34" charset="-122"/>
@@ -15464,7 +15719,7 @@
             <a:avLst/>
           </a:prstGeom>
           <a:solidFill>
-            <a:srgbClr val="34D399"/>
+            <a:srgbClr val="059669"/>
           </a:solidFill>
           <a:ln/>
         </p:spPr>
@@ -15496,7 +15751,7 @@
             <a:r>
               <a:rPr lang="en-US" sz="1100" dirty="0">
                 <a:solidFill>
-                  <a:srgbClr val="E4E6ED"/>
+                  <a:srgbClr val="1E2030"/>
                 </a:solidFill>
                 <a:latin typeface="Apple SD Gothic Neo" pitchFamily="34" charset="0"/>
                 <a:ea typeface="Apple SD Gothic Neo" pitchFamily="34" charset="-122"/>
@@ -15525,7 +15780,7 @@
           <a:noFill/>
           <a:ln w="12700">
             <a:solidFill>
-              <a:srgbClr val="2A2D3A"/>
+              <a:srgbClr val="D1D5E0"/>
             </a:solidFill>
             <a:prstDash val="solid"/>
           </a:ln>
@@ -15558,7 +15813,7 @@
             <a:r>
               <a:rPr lang="en-US" sz="1300" b="1" dirty="0">
                 <a:solidFill>
-                  <a:srgbClr val="FBBF24"/>
+                  <a:srgbClr val="D97706"/>
                 </a:solidFill>
                 <a:latin typeface="Apple SD Gothic Neo" pitchFamily="34" charset="0"/>
                 <a:ea typeface="Apple SD Gothic Neo" pitchFamily="34" charset="-122"/>
@@ -15600,7 +15855,7 @@
             <a:r>
               <a:rPr lang="en-US" sz="1100" dirty="0">
                 <a:solidFill>
-                  <a:srgbClr val="8B8FA3"/>
+                  <a:srgbClr val="4B5068"/>
                 </a:solidFill>
                 <a:latin typeface="Apple SD Gothic Neo" pitchFamily="34" charset="0"/>
                 <a:ea typeface="Apple SD Gothic Neo" pitchFamily="34" charset="-122"/>
@@ -15620,7 +15875,7 @@
             <a:r>
               <a:rPr lang="en-US" sz="1100" dirty="0">
                 <a:solidFill>
-                  <a:srgbClr val="8B8FA3"/>
+                  <a:srgbClr val="4B5068"/>
                 </a:solidFill>
                 <a:latin typeface="Apple SD Gothic Neo" pitchFamily="34" charset="0"/>
                 <a:ea typeface="Apple SD Gothic Neo" pitchFamily="34" charset="-122"/>
@@ -15659,7 +15914,7 @@
             <a:r>
               <a:rPr lang="en-US" sz="1100" b="1" dirty="0">
                 <a:solidFill>
-                  <a:srgbClr val="4E8CFF"/>
+                  <a:srgbClr val="2563EB"/>
                 </a:solidFill>
                 <a:latin typeface="Apple SD Gothic Neo" pitchFamily="34" charset="0"/>
                 <a:ea typeface="Apple SD Gothic Neo" pitchFamily="34" charset="-122"/>
@@ -15698,7 +15953,7 @@
             <a:r>
               <a:rPr lang="en-US" sz="1100" dirty="0">
                 <a:solidFill>
-                  <a:srgbClr val="34D399"/>
+                  <a:srgbClr val="059669"/>
                 </a:solidFill>
                 <a:latin typeface="Apple SD Gothic Neo" pitchFamily="34" charset="0"/>
                 <a:ea typeface="Apple SD Gothic Neo" pitchFamily="34" charset="-122"/>
@@ -15724,7 +15979,7 @@
     <p:bg>
       <p:bgPr>
         <a:solidFill>
-          <a:srgbClr val="0F1117"/>
+          <a:srgbClr val="FFFFFF"/>
         </a:solidFill>
       </p:bgPr>
     </p:bg>
@@ -15757,7 +16012,7 @@
             <a:avLst/>
           </a:prstGeom>
           <a:solidFill>
-            <a:srgbClr val="FB923C"/>
+            <a:srgbClr val="EA580C"/>
           </a:solidFill>
           <a:ln/>
         </p:spPr>
@@ -15789,7 +16044,7 @@
             <a:r>
               <a:rPr lang="en-US" sz="2200" b="1" dirty="0">
                 <a:solidFill>
-                  <a:srgbClr val="E4E6ED"/>
+                  <a:srgbClr val="1E2030"/>
                 </a:solidFill>
                 <a:latin typeface="Apple SD Gothic Neo" pitchFamily="34" charset="0"/>
                 <a:ea typeface="Apple SD Gothic Neo" pitchFamily="34" charset="-122"/>
@@ -15816,13 +16071,18 @@
             <a:avLst/>
           </a:prstGeom>
           <a:solidFill>
-            <a:srgbClr val="1A1D27"/>
+            <a:srgbClr val="F3F4F8"/>
           </a:solidFill>
-          <a:ln/>
+          <a:ln w="9525">
+            <a:solidFill>
+              <a:srgbClr val="D1D5E0"/>
+            </a:solidFill>
+            <a:prstDash val="solid"/>
+          </a:ln>
           <a:effectLst>
-            <a:outerShdw sx="100000" sy="100000" kx="0" ky="0" algn="bl" rotWithShape="0" blurRad="76200" dist="25400" dir="8100000">
-              <a:srgbClr val="000000">
-                <a:alpha val="20000"/>
+            <a:outerShdw sx="100000" sy="100000" kx="0" ky="0" algn="bl" rotWithShape="0" blurRad="50800" dist="12700" dir="8100000">
+              <a:srgbClr val="B0B8C8">
+                <a:alpha val="15000"/>
               </a:srgbClr>
             </a:outerShdw>
           </a:effectLst>
@@ -15843,7 +16103,7 @@
             <a:avLst/>
           </a:prstGeom>
           <a:solidFill>
-            <a:srgbClr val="3D1515"/>
+            <a:srgbClr val="FEF2F2"/>
           </a:solidFill>
           <a:ln/>
         </p:spPr>
@@ -15875,7 +16135,7 @@
             <a:r>
               <a:rPr lang="en-US" sz="1400" b="1" dirty="0">
                 <a:solidFill>
-                  <a:srgbClr val="F87171"/>
+                  <a:srgbClr val="DC2626"/>
                 </a:solidFill>
                 <a:latin typeface="Apple SD Gothic Neo" pitchFamily="34" charset="0"/>
                 <a:ea typeface="Apple SD Gothic Neo" pitchFamily="34" charset="-122"/>
@@ -15917,7 +16177,7 @@
             <a:r>
               <a:rPr lang="en-US" sz="1300" b="1" dirty="0">
                 <a:solidFill>
-                  <a:srgbClr val="E4E6ED"/>
+                  <a:srgbClr val="1E2030"/>
                 </a:solidFill>
                 <a:latin typeface="Apple SD Gothic Neo" pitchFamily="34" charset="0"/>
                 <a:ea typeface="Apple SD Gothic Neo" pitchFamily="34" charset="-122"/>
@@ -15938,7 +16198,7 @@
             <a:r>
               <a:rPr lang="en-US" sz="1100" dirty="0">
                 <a:solidFill>
-                  <a:srgbClr val="8B8FA3"/>
+                  <a:srgbClr val="4B5068"/>
                 </a:solidFill>
                 <a:latin typeface="Apple SD Gothic Neo" pitchFamily="34" charset="0"/>
                 <a:ea typeface="Apple SD Gothic Neo" pitchFamily="34" charset="-122"/>
@@ -15960,7 +16220,7 @@
             <a:r>
               <a:rPr lang="en-US" sz="1300" b="1" dirty="0">
                 <a:solidFill>
-                  <a:srgbClr val="E4E6ED"/>
+                  <a:srgbClr val="1E2030"/>
                 </a:solidFill>
                 <a:latin typeface="Apple SD Gothic Neo" pitchFamily="34" charset="0"/>
                 <a:ea typeface="Apple SD Gothic Neo" pitchFamily="34" charset="-122"/>
@@ -15981,7 +16241,7 @@
             <a:r>
               <a:rPr lang="en-US" sz="1100" dirty="0">
                 <a:solidFill>
-                  <a:srgbClr val="8B8FA3"/>
+                  <a:srgbClr val="4B5068"/>
                 </a:solidFill>
                 <a:latin typeface="Apple SD Gothic Neo" pitchFamily="34" charset="0"/>
                 <a:ea typeface="Apple SD Gothic Neo" pitchFamily="34" charset="-122"/>
@@ -16003,7 +16263,7 @@
             <a:r>
               <a:rPr lang="en-US" sz="1300" b="1" dirty="0">
                 <a:solidFill>
-                  <a:srgbClr val="E4E6ED"/>
+                  <a:srgbClr val="1E2030"/>
                 </a:solidFill>
                 <a:latin typeface="Apple SD Gothic Neo" pitchFamily="34" charset="0"/>
                 <a:ea typeface="Apple SD Gothic Neo" pitchFamily="34" charset="-122"/>
@@ -16024,7 +16284,7 @@
             <a:r>
               <a:rPr lang="en-US" sz="1100" dirty="0">
                 <a:solidFill>
-                  <a:srgbClr val="8B8FA3"/>
+                  <a:srgbClr val="4B5068"/>
                 </a:solidFill>
                 <a:latin typeface="Apple SD Gothic Neo" pitchFamily="34" charset="0"/>
                 <a:ea typeface="Apple SD Gothic Neo" pitchFamily="34" charset="-122"/>
@@ -16044,7 +16304,7 @@
             <a:r>
               <a:rPr lang="en-US" sz="1100" dirty="0">
                 <a:solidFill>
-                  <a:srgbClr val="8B8FA3"/>
+                  <a:srgbClr val="4B5068"/>
                 </a:solidFill>
                 <a:latin typeface="Apple SD Gothic Neo" pitchFamily="34" charset="0"/>
                 <a:ea typeface="Apple SD Gothic Neo" pitchFamily="34" charset="-122"/>
@@ -16071,13 +16331,18 @@
             <a:avLst/>
           </a:prstGeom>
           <a:solidFill>
-            <a:srgbClr val="1A1D27"/>
+            <a:srgbClr val="F3F4F8"/>
           </a:solidFill>
-          <a:ln/>
+          <a:ln w="9525">
+            <a:solidFill>
+              <a:srgbClr val="D1D5E0"/>
+            </a:solidFill>
+            <a:prstDash val="solid"/>
+          </a:ln>
           <a:effectLst>
-            <a:outerShdw sx="100000" sy="100000" kx="0" ky="0" algn="bl" rotWithShape="0" blurRad="76200" dist="25400" dir="8100000">
-              <a:srgbClr val="000000">
-                <a:alpha val="20000"/>
+            <a:outerShdw sx="100000" sy="100000" kx="0" ky="0" algn="bl" rotWithShape="0" blurRad="50800" dist="12700" dir="8100000">
+              <a:srgbClr val="B0B8C8">
+                <a:alpha val="15000"/>
               </a:srgbClr>
             </a:outerShdw>
           </a:effectLst>
@@ -16098,7 +16363,7 @@
             <a:avLst/>
           </a:prstGeom>
           <a:solidFill>
-            <a:srgbClr val="0D3320"/>
+            <a:srgbClr val="ECFDF5"/>
           </a:solidFill>
           <a:ln/>
         </p:spPr>
@@ -16130,7 +16395,7 @@
             <a:r>
               <a:rPr lang="en-US" sz="1400" b="1" dirty="0">
                 <a:solidFill>
-                  <a:srgbClr val="34D399"/>
+                  <a:srgbClr val="059669"/>
                 </a:solidFill>
                 <a:latin typeface="Apple SD Gothic Neo" pitchFamily="34" charset="0"/>
                 <a:ea typeface="Apple SD Gothic Neo" pitchFamily="34" charset="-122"/>
@@ -16172,7 +16437,7 @@
             <a:r>
               <a:rPr lang="en-US" sz="1300" b="1" dirty="0">
                 <a:solidFill>
-                  <a:srgbClr val="E4E6ED"/>
+                  <a:srgbClr val="1E2030"/>
                 </a:solidFill>
                 <a:latin typeface="Apple SD Gothic Neo" pitchFamily="34" charset="0"/>
                 <a:ea typeface="Apple SD Gothic Neo" pitchFamily="34" charset="-122"/>
@@ -16193,7 +16458,7 @@
             <a:r>
               <a:rPr lang="en-US" sz="1100" dirty="0">
                 <a:solidFill>
-                  <a:srgbClr val="8B8FA3"/>
+                  <a:srgbClr val="4B5068"/>
                 </a:solidFill>
                 <a:latin typeface="Apple SD Gothic Neo" pitchFamily="34" charset="0"/>
                 <a:ea typeface="Apple SD Gothic Neo" pitchFamily="34" charset="-122"/>
@@ -16215,7 +16480,7 @@
             <a:r>
               <a:rPr lang="en-US" sz="1300" b="1" dirty="0">
                 <a:solidFill>
-                  <a:srgbClr val="E4E6ED"/>
+                  <a:srgbClr val="1E2030"/>
                 </a:solidFill>
                 <a:latin typeface="Apple SD Gothic Neo" pitchFamily="34" charset="0"/>
                 <a:ea typeface="Apple SD Gothic Neo" pitchFamily="34" charset="-122"/>
@@ -16236,7 +16501,7 @@
             <a:r>
               <a:rPr lang="en-US" sz="1100" dirty="0">
                 <a:solidFill>
-                  <a:srgbClr val="8B8FA3"/>
+                  <a:srgbClr val="4B5068"/>
                 </a:solidFill>
                 <a:latin typeface="Apple SD Gothic Neo" pitchFamily="34" charset="0"/>
                 <a:ea typeface="Apple SD Gothic Neo" pitchFamily="34" charset="-122"/>
@@ -16258,7 +16523,7 @@
             <a:r>
               <a:rPr lang="en-US" sz="1300" b="1" dirty="0">
                 <a:solidFill>
-                  <a:srgbClr val="E4E6ED"/>
+                  <a:srgbClr val="1E2030"/>
                 </a:solidFill>
                 <a:latin typeface="Apple SD Gothic Neo" pitchFamily="34" charset="0"/>
                 <a:ea typeface="Apple SD Gothic Neo" pitchFamily="34" charset="-122"/>
@@ -16279,7 +16544,7 @@
             <a:r>
               <a:rPr lang="en-US" sz="1100" dirty="0">
                 <a:solidFill>
-                  <a:srgbClr val="8B8FA3"/>
+                  <a:srgbClr val="4B5068"/>
                 </a:solidFill>
                 <a:latin typeface="Apple SD Gothic Neo" pitchFamily="34" charset="0"/>
                 <a:ea typeface="Apple SD Gothic Neo" pitchFamily="34" charset="-122"/>
@@ -16299,7 +16564,7 @@
             <a:r>
               <a:rPr lang="en-US" sz="1100" dirty="0">
                 <a:solidFill>
-                  <a:srgbClr val="8B8FA3"/>
+                  <a:srgbClr val="4B5068"/>
                 </a:solidFill>
                 <a:latin typeface="Apple SD Gothic Neo" pitchFamily="34" charset="0"/>
                 <a:ea typeface="Apple SD Gothic Neo" pitchFamily="34" charset="-122"/>
@@ -16338,7 +16603,7 @@
             <a:r>
               <a:rPr lang="en-US" sz="1100" i="1" dirty="0">
                 <a:solidFill>
-                  <a:srgbClr val="8B8FA3"/>
+                  <a:srgbClr val="4B5068"/>
                 </a:solidFill>
                 <a:latin typeface="Apple SD Gothic Neo" pitchFamily="34" charset="0"/>
                 <a:ea typeface="Apple SD Gothic Neo" pitchFamily="34" charset="-122"/>
@@ -16364,7 +16629,7 @@
     <p:bg>
       <p:bgPr>
         <a:solidFill>
-          <a:srgbClr val="0F1117"/>
+          <a:srgbClr val="FFFFFF"/>
         </a:solidFill>
       </p:bgPr>
     </p:bg>
@@ -16397,7 +16662,7 @@
             <a:avLst/>
           </a:prstGeom>
           <a:solidFill>
-            <a:srgbClr val="A78BFA"/>
+            <a:srgbClr val="7C3AED"/>
           </a:solidFill>
           <a:ln/>
         </p:spPr>
@@ -16429,7 +16694,7 @@
             <a:r>
               <a:rPr lang="en-US" sz="2400" b="1" dirty="0">
                 <a:solidFill>
-                  <a:srgbClr val="E4E6ED"/>
+                  <a:srgbClr val="1E2030"/>
                 </a:solidFill>
                 <a:latin typeface="Apple SD Gothic Neo" pitchFamily="34" charset="0"/>
                 <a:ea typeface="Apple SD Gothic Neo" pitchFamily="34" charset="-122"/>
@@ -16468,7 +16733,7 @@
             <a:r>
               <a:rPr lang="en-US" sz="1300" dirty="0">
                 <a:solidFill>
-                  <a:srgbClr val="A78BFA"/>
+                  <a:srgbClr val="7C3AED"/>
                 </a:solidFill>
                 <a:latin typeface="Apple SD Gothic Neo" pitchFamily="34" charset="0"/>
                 <a:ea typeface="Apple SD Gothic Neo" pitchFamily="34" charset="-122"/>
@@ -16497,7 +16762,7 @@
           <a:noFill/>
           <a:ln w="25400">
             <a:solidFill>
-              <a:srgbClr val="2A2D3A"/>
+              <a:srgbClr val="D1D5E0"/>
             </a:solidFill>
             <a:prstDash val="solid"/>
           </a:ln>
@@ -16520,7 +16785,7 @@
           <a:noFill/>
           <a:ln w="25400">
             <a:solidFill>
-              <a:srgbClr val="4E8CFF"/>
+              <a:srgbClr val="2563EB"/>
             </a:solidFill>
             <a:prstDash val="solid"/>
           </a:ln>
@@ -16543,7 +16808,7 @@
           <a:noFill/>
           <a:ln w="25400">
             <a:solidFill>
-              <a:srgbClr val="4E8CFF"/>
+              <a:srgbClr val="2563EB"/>
             </a:solidFill>
             <a:prstDash val="solid"/>
           </a:ln>
@@ -16566,7 +16831,7 @@
           <a:noFill/>
           <a:ln w="25400">
             <a:solidFill>
-              <a:srgbClr val="4E8CFF"/>
+              <a:srgbClr val="2563EB"/>
             </a:solidFill>
             <a:prstDash val="solid"/>
           </a:ln>
@@ -16589,7 +16854,7 @@
           <a:noFill/>
           <a:ln w="25400">
             <a:solidFill>
-              <a:srgbClr val="4E8CFF"/>
+              <a:srgbClr val="2563EB"/>
             </a:solidFill>
             <a:prstDash val="solid"/>
           </a:ln>
@@ -16612,7 +16877,7 @@
           <a:noFill/>
           <a:ln w="25400">
             <a:solidFill>
-              <a:srgbClr val="4E8CFF"/>
+              <a:srgbClr val="2563EB"/>
             </a:solidFill>
             <a:prstDash val="solid"/>
           </a:ln>
@@ -16635,7 +16900,7 @@
           <a:noFill/>
           <a:ln w="25400">
             <a:solidFill>
-              <a:srgbClr val="4E8CFF"/>
+              <a:srgbClr val="2563EB"/>
             </a:solidFill>
             <a:prstDash val="solid"/>
           </a:ln>
@@ -16658,7 +16923,7 @@
           <a:noFill/>
           <a:ln w="25400">
             <a:solidFill>
-              <a:srgbClr val="4E8CFF"/>
+              <a:srgbClr val="2563EB"/>
             </a:solidFill>
             <a:prstDash val="solid"/>
           </a:ln>
@@ -16681,7 +16946,7 @@
           <a:noFill/>
           <a:ln w="25400">
             <a:solidFill>
-              <a:srgbClr val="4E8CFF"/>
+              <a:srgbClr val="2563EB"/>
             </a:solidFill>
             <a:prstDash val="solid"/>
           </a:ln>
@@ -16704,7 +16969,7 @@
           <a:noFill/>
           <a:ln w="25400">
             <a:solidFill>
-              <a:srgbClr val="4E8CFF"/>
+              <a:srgbClr val="2563EB"/>
             </a:solidFill>
             <a:prstDash val="solid"/>
           </a:ln>
@@ -16727,7 +16992,7 @@
           <a:noFill/>
           <a:ln w="25400">
             <a:solidFill>
-              <a:srgbClr val="4E8CFF"/>
+              <a:srgbClr val="2563EB"/>
             </a:solidFill>
             <a:prstDash val="solid"/>
           </a:ln>
@@ -16748,205 +17013,11 @@
             <a:avLst/>
           </a:prstGeom>
           <a:solidFill>
-            <a:srgbClr val="4E8CFF"/>
+            <a:srgbClr val="2563EB"/>
           </a:solidFill>
-          <a:ln/>
-        </p:spPr>
-      </p:sp>
-      <p:sp>
-        <p:nvSpPr>
-          <p:cNvPr id="17" name="Text 15"/>
-          <p:cNvSpPr/>
-          <p:nvPr/>
-        </p:nvSpPr>
-        <p:spPr>
-          <a:xfrm>
-            <a:off x="457200" y="2057400"/>
-            <a:ext cx="2103120" cy="365760"/>
-          </a:xfrm>
-          <a:prstGeom prst="rect">
-            <a:avLst/>
-          </a:prstGeom>
-          <a:noFill/>
-          <a:ln/>
-        </p:spPr>
-        <p:txBody>
-          <a:bodyPr wrap="square" lIns="0" tIns="0" rIns="0" bIns="0" rtlCol="0" anchor="ctr"/>
-          <a:lstStyle/>
-          <a:p>
-            <a:pPr algn="ctr" indent="0" marL="0">
-              <a:buNone/>
-            </a:pPr>
-            <a:r>
-              <a:rPr lang="en-US" sz="1000" b="1" dirty="0">
-                <a:solidFill>
-                  <a:srgbClr val="0F1117"/>
-                </a:solidFill>
-                <a:latin typeface="Apple SD Gothic Neo" pitchFamily="34" charset="0"/>
-                <a:ea typeface="Apple SD Gothic Neo" pitchFamily="34" charset="-122"/>
-                <a:cs typeface="Apple SD Gothic Neo" pitchFamily="34" charset="-120"/>
-              </a:rPr>
-              <a:t>세션 1 (09:00~09:48)</a:t>
-            </a:r>
-            <a:endParaRPr lang="en-US" sz="1000" dirty="0"/>
-          </a:p>
-        </p:txBody>
-      </p:sp>
-      <p:sp>
-        <p:nvSpPr>
-          <p:cNvPr id="18" name="Shape 16"/>
-          <p:cNvSpPr/>
-          <p:nvPr/>
-        </p:nvSpPr>
-        <p:spPr>
-          <a:xfrm>
-            <a:off x="2651760" y="1280160"/>
-            <a:ext cx="914400" cy="365760"/>
-          </a:xfrm>
-          <a:prstGeom prst="rect">
-            <a:avLst/>
-          </a:prstGeom>
-          <a:solidFill>
-            <a:srgbClr val="3D1515"/>
-          </a:solidFill>
-          <a:ln/>
-        </p:spPr>
-      </p:sp>
-      <p:sp>
-        <p:nvSpPr>
-          <p:cNvPr id="19" name="Text 17"/>
-          <p:cNvSpPr/>
-          <p:nvPr/>
-        </p:nvSpPr>
-        <p:spPr>
-          <a:xfrm>
-            <a:off x="2651760" y="1280160"/>
-            <a:ext cx="914400" cy="365760"/>
-          </a:xfrm>
-          <a:prstGeom prst="rect">
-            <a:avLst/>
-          </a:prstGeom>
-          <a:noFill/>
-          <a:ln/>
-        </p:spPr>
-        <p:txBody>
-          <a:bodyPr wrap="square" lIns="0" tIns="0" rIns="0" bIns="0" rtlCol="0" anchor="ctr"/>
-          <a:lstStyle/>
-          <a:p>
-            <a:pPr algn="ctr" indent="0" marL="0">
-              <a:buNone/>
-            </a:pPr>
-            <a:r>
-              <a:rPr lang="en-US" sz="1000" b="1" dirty="0">
-                <a:solidFill>
-                  <a:srgbClr val="F87171"/>
-                </a:solidFill>
-                <a:latin typeface="Apple SD Gothic Neo" pitchFamily="34" charset="0"/>
-                <a:ea typeface="Apple SD Gothic Neo" pitchFamily="34" charset="-122"/>
-                <a:cs typeface="Apple SD Gothic Neo" pitchFamily="34" charset="-120"/>
-              </a:rPr>
-              <a:t>22분 gap</a:t>
-            </a:r>
-            <a:endParaRPr lang="en-US" sz="1000" dirty="0"/>
-          </a:p>
-        </p:txBody>
-      </p:sp>
-      <p:sp>
-        <p:nvSpPr>
-          <p:cNvPr id="20" name="Text 18"/>
-          <p:cNvSpPr/>
-          <p:nvPr/>
-        </p:nvSpPr>
-        <p:spPr>
-          <a:xfrm>
-            <a:off x="2743200" y="1691640"/>
-            <a:ext cx="731520" cy="274320"/>
-          </a:xfrm>
-          <a:prstGeom prst="rect">
-            <a:avLst/>
-          </a:prstGeom>
-          <a:noFill/>
-          <a:ln/>
-        </p:spPr>
-        <p:txBody>
-          <a:bodyPr wrap="square" lIns="0" tIns="0" rIns="0" bIns="0" rtlCol="0" anchor="ctr"/>
-          <a:lstStyle/>
-          <a:p>
-            <a:pPr algn="ctr" indent="0" marL="0">
-              <a:buNone/>
-            </a:pPr>
-            <a:r>
-              <a:rPr lang="en-US" sz="2000" dirty="0">
-                <a:solidFill>
-                  <a:srgbClr val="F87171"/>
-                </a:solidFill>
-                <a:latin typeface="Apple SD Gothic Neo" pitchFamily="34" charset="0"/>
-                <a:ea typeface="Apple SD Gothic Neo" pitchFamily="34" charset="-122"/>
-                <a:cs typeface="Apple SD Gothic Neo" pitchFamily="34" charset="-120"/>
-              </a:rPr>
-              <a:t>···</a:t>
-            </a:r>
-            <a:endParaRPr lang="en-US" sz="2000" dirty="0"/>
-          </a:p>
-        </p:txBody>
-      </p:sp>
-      <p:sp>
-        <p:nvSpPr>
-          <p:cNvPr id="21" name="Text 19"/>
-          <p:cNvSpPr/>
-          <p:nvPr/>
-        </p:nvSpPr>
-        <p:spPr>
-          <a:xfrm>
-            <a:off x="2560320" y="2468880"/>
-            <a:ext cx="1097280" cy="228600"/>
-          </a:xfrm>
-          <a:prstGeom prst="rect">
-            <a:avLst/>
-          </a:prstGeom>
-          <a:noFill/>
-          <a:ln/>
-        </p:spPr>
-        <p:txBody>
-          <a:bodyPr wrap="square" lIns="0" tIns="0" rIns="0" bIns="0" rtlCol="0" anchor="ctr"/>
-          <a:lstStyle/>
-          <a:p>
-            <a:pPr algn="ctr" indent="0" marL="0">
-              <a:buNone/>
-            </a:pPr>
-            <a:r>
-              <a:rPr lang="en-US" sz="800" dirty="0">
-                <a:solidFill>
-                  <a:srgbClr val="F87171"/>
-                </a:solidFill>
-                <a:latin typeface="Apple SD Gothic Neo" pitchFamily="34" charset="0"/>
-                <a:ea typeface="Apple SD Gothic Neo" pitchFamily="34" charset="-122"/>
-                <a:cs typeface="Apple SD Gothic Neo" pitchFamily="34" charset="-120"/>
-              </a:rPr>
-              <a:t>&gt; 15분 → 분리!</a:t>
-            </a:r>
-            <a:endParaRPr lang="en-US" sz="800" dirty="0"/>
-          </a:p>
-        </p:txBody>
-      </p:sp>
-      <p:sp>
-        <p:nvSpPr>
-          <p:cNvPr id="22" name="Shape 20"/>
-          <p:cNvSpPr/>
-          <p:nvPr/>
-        </p:nvSpPr>
-        <p:spPr>
-          <a:xfrm>
-            <a:off x="3749040" y="1737360"/>
-            <a:ext cx="0" cy="182880"/>
-          </a:xfrm>
-          <a:prstGeom prst="line">
-            <a:avLst/>
-          </a:prstGeom>
-          <a:noFill/>
-          <a:ln w="25400">
+          <a:ln w="9525">
             <a:solidFill>
-              <a:srgbClr val="34D399"/>
+              <a:srgbClr val="D1D5E0"/>
             </a:solidFill>
             <a:prstDash val="solid"/>
           </a:ln>
@@ -16954,22 +17025,63 @@
       </p:sp>
       <p:sp>
         <p:nvSpPr>
-          <p:cNvPr id="23" name="Shape 21"/>
-          <p:cNvSpPr/>
-          <p:nvPr/>
-        </p:nvSpPr>
-        <p:spPr>
-          <a:xfrm>
-            <a:off x="3931920" y="1737360"/>
-            <a:ext cx="0" cy="182880"/>
-          </a:xfrm>
-          <a:prstGeom prst="line">
-            <a:avLst/>
-          </a:prstGeom>
-          <a:noFill/>
-          <a:ln w="25400">
+          <p:cNvPr id="17" name="Text 15"/>
+          <p:cNvSpPr/>
+          <p:nvPr/>
+        </p:nvSpPr>
+        <p:spPr>
+          <a:xfrm>
+            <a:off x="457200" y="2057400"/>
+            <a:ext cx="2103120" cy="365760"/>
+          </a:xfrm>
+          <a:prstGeom prst="rect">
+            <a:avLst/>
+          </a:prstGeom>
+          <a:noFill/>
+          <a:ln/>
+        </p:spPr>
+        <p:txBody>
+          <a:bodyPr wrap="square" lIns="0" tIns="0" rIns="0" bIns="0" rtlCol="0" anchor="ctr"/>
+          <a:lstStyle/>
+          <a:p>
+            <a:pPr algn="ctr" indent="0" marL="0">
+              <a:buNone/>
+            </a:pPr>
+            <a:r>
+              <a:rPr lang="en-US" sz="1000" b="1" dirty="0">
+                <a:solidFill>
+                  <a:srgbClr val="FFFFFF"/>
+                </a:solidFill>
+                <a:latin typeface="Apple SD Gothic Neo" pitchFamily="34" charset="0"/>
+                <a:ea typeface="Apple SD Gothic Neo" pitchFamily="34" charset="-122"/>
+                <a:cs typeface="Apple SD Gothic Neo" pitchFamily="34" charset="-120"/>
+              </a:rPr>
+              <a:t>세션 1 (09:00~09:48)</a:t>
+            </a:r>
+            <a:endParaRPr lang="en-US" sz="1000" dirty="0"/>
+          </a:p>
+        </p:txBody>
+      </p:sp>
+      <p:sp>
+        <p:nvSpPr>
+          <p:cNvPr id="18" name="Shape 16"/>
+          <p:cNvSpPr/>
+          <p:nvPr/>
+        </p:nvSpPr>
+        <p:spPr>
+          <a:xfrm>
+            <a:off x="2651760" y="1280160"/>
+            <a:ext cx="914400" cy="365760"/>
+          </a:xfrm>
+          <a:prstGeom prst="rect">
+            <a:avLst/>
+          </a:prstGeom>
+          <a:solidFill>
+            <a:srgbClr val="FEF2F2"/>
+          </a:solidFill>
+          <a:ln w="9525">
             <a:solidFill>
-              <a:srgbClr val="34D399"/>
+              <a:srgbClr val="D1D5E0"/>
             </a:solidFill>
             <a:prstDash val="solid"/>
           </a:ln>
@@ -16977,13 +17089,130 @@
       </p:sp>
       <p:sp>
         <p:nvSpPr>
-          <p:cNvPr id="24" name="Shape 22"/>
-          <p:cNvSpPr/>
-          <p:nvPr/>
-        </p:nvSpPr>
-        <p:spPr>
-          <a:xfrm>
-            <a:off x="4114800" y="1737360"/>
+          <p:cNvPr id="19" name="Text 17"/>
+          <p:cNvSpPr/>
+          <p:nvPr/>
+        </p:nvSpPr>
+        <p:spPr>
+          <a:xfrm>
+            <a:off x="2651760" y="1280160"/>
+            <a:ext cx="914400" cy="365760"/>
+          </a:xfrm>
+          <a:prstGeom prst="rect">
+            <a:avLst/>
+          </a:prstGeom>
+          <a:noFill/>
+          <a:ln/>
+        </p:spPr>
+        <p:txBody>
+          <a:bodyPr wrap="square" lIns="0" tIns="0" rIns="0" bIns="0" rtlCol="0" anchor="ctr"/>
+          <a:lstStyle/>
+          <a:p>
+            <a:pPr algn="ctr" indent="0" marL="0">
+              <a:buNone/>
+            </a:pPr>
+            <a:r>
+              <a:rPr lang="en-US" sz="1000" b="1" dirty="0">
+                <a:solidFill>
+                  <a:srgbClr val="DC2626"/>
+                </a:solidFill>
+                <a:latin typeface="Apple SD Gothic Neo" pitchFamily="34" charset="0"/>
+                <a:ea typeface="Apple SD Gothic Neo" pitchFamily="34" charset="-122"/>
+                <a:cs typeface="Apple SD Gothic Neo" pitchFamily="34" charset="-120"/>
+              </a:rPr>
+              <a:t>22분 gap</a:t>
+            </a:r>
+            <a:endParaRPr lang="en-US" sz="1000" dirty="0"/>
+          </a:p>
+        </p:txBody>
+      </p:sp>
+      <p:sp>
+        <p:nvSpPr>
+          <p:cNvPr id="20" name="Text 18"/>
+          <p:cNvSpPr/>
+          <p:nvPr/>
+        </p:nvSpPr>
+        <p:spPr>
+          <a:xfrm>
+            <a:off x="2743200" y="1691640"/>
+            <a:ext cx="731520" cy="274320"/>
+          </a:xfrm>
+          <a:prstGeom prst="rect">
+            <a:avLst/>
+          </a:prstGeom>
+          <a:noFill/>
+          <a:ln/>
+        </p:spPr>
+        <p:txBody>
+          <a:bodyPr wrap="square" lIns="0" tIns="0" rIns="0" bIns="0" rtlCol="0" anchor="ctr"/>
+          <a:lstStyle/>
+          <a:p>
+            <a:pPr algn="ctr" indent="0" marL="0">
+              <a:buNone/>
+            </a:pPr>
+            <a:r>
+              <a:rPr lang="en-US" sz="2000" dirty="0">
+                <a:solidFill>
+                  <a:srgbClr val="DC2626"/>
+                </a:solidFill>
+                <a:latin typeface="Apple SD Gothic Neo" pitchFamily="34" charset="0"/>
+                <a:ea typeface="Apple SD Gothic Neo" pitchFamily="34" charset="-122"/>
+                <a:cs typeface="Apple SD Gothic Neo" pitchFamily="34" charset="-120"/>
+              </a:rPr>
+              <a:t>···</a:t>
+            </a:r>
+            <a:endParaRPr lang="en-US" sz="2000" dirty="0"/>
+          </a:p>
+        </p:txBody>
+      </p:sp>
+      <p:sp>
+        <p:nvSpPr>
+          <p:cNvPr id="21" name="Text 19"/>
+          <p:cNvSpPr/>
+          <p:nvPr/>
+        </p:nvSpPr>
+        <p:spPr>
+          <a:xfrm>
+            <a:off x="2560320" y="2468880"/>
+            <a:ext cx="1097280" cy="228600"/>
+          </a:xfrm>
+          <a:prstGeom prst="rect">
+            <a:avLst/>
+          </a:prstGeom>
+          <a:noFill/>
+          <a:ln/>
+        </p:spPr>
+        <p:txBody>
+          <a:bodyPr wrap="square" lIns="0" tIns="0" rIns="0" bIns="0" rtlCol="0" anchor="ctr"/>
+          <a:lstStyle/>
+          <a:p>
+            <a:pPr algn="ctr" indent="0" marL="0">
+              <a:buNone/>
+            </a:pPr>
+            <a:r>
+              <a:rPr lang="en-US" sz="800" dirty="0">
+                <a:solidFill>
+                  <a:srgbClr val="DC2626"/>
+                </a:solidFill>
+                <a:latin typeface="Apple SD Gothic Neo" pitchFamily="34" charset="0"/>
+                <a:ea typeface="Apple SD Gothic Neo" pitchFamily="34" charset="-122"/>
+                <a:cs typeface="Apple SD Gothic Neo" pitchFamily="34" charset="-120"/>
+              </a:rPr>
+              <a:t>&gt; 15분 → 분리!</a:t>
+            </a:r>
+            <a:endParaRPr lang="en-US" sz="800" dirty="0"/>
+          </a:p>
+        </p:txBody>
+      </p:sp>
+      <p:sp>
+        <p:nvSpPr>
+          <p:cNvPr id="22" name="Shape 20"/>
+          <p:cNvSpPr/>
+          <p:nvPr/>
+        </p:nvSpPr>
+        <p:spPr>
+          <a:xfrm>
+            <a:off x="3749040" y="1737360"/>
             <a:ext cx="0" cy="182880"/>
           </a:xfrm>
           <a:prstGeom prst="line">
@@ -16992,7 +17221,7 @@
           <a:noFill/>
           <a:ln w="25400">
             <a:solidFill>
-              <a:srgbClr val="34D399"/>
+              <a:srgbClr val="059669"/>
             </a:solidFill>
             <a:prstDash val="solid"/>
           </a:ln>
@@ -17000,13 +17229,13 @@
       </p:sp>
       <p:sp>
         <p:nvSpPr>
-          <p:cNvPr id="25" name="Shape 23"/>
-          <p:cNvSpPr/>
-          <p:nvPr/>
-        </p:nvSpPr>
-        <p:spPr>
-          <a:xfrm>
-            <a:off x="4297680" y="1737360"/>
+          <p:cNvPr id="23" name="Shape 21"/>
+          <p:cNvSpPr/>
+          <p:nvPr/>
+        </p:nvSpPr>
+        <p:spPr>
+          <a:xfrm>
+            <a:off x="3931920" y="1737360"/>
             <a:ext cx="0" cy="182880"/>
           </a:xfrm>
           <a:prstGeom prst="line">
@@ -17015,7 +17244,7 @@
           <a:noFill/>
           <a:ln w="25400">
             <a:solidFill>
-              <a:srgbClr val="34D399"/>
+              <a:srgbClr val="059669"/>
             </a:solidFill>
             <a:prstDash val="solid"/>
           </a:ln>
@@ -17023,13 +17252,13 @@
       </p:sp>
       <p:sp>
         <p:nvSpPr>
-          <p:cNvPr id="26" name="Shape 24"/>
-          <p:cNvSpPr/>
-          <p:nvPr/>
-        </p:nvSpPr>
-        <p:spPr>
-          <a:xfrm>
-            <a:off x="4480560" y="1737360"/>
+          <p:cNvPr id="24" name="Shape 22"/>
+          <p:cNvSpPr/>
+          <p:nvPr/>
+        </p:nvSpPr>
+        <p:spPr>
+          <a:xfrm>
+            <a:off x="4114800" y="1737360"/>
             <a:ext cx="0" cy="182880"/>
           </a:xfrm>
           <a:prstGeom prst="line">
@@ -17038,7 +17267,7 @@
           <a:noFill/>
           <a:ln w="25400">
             <a:solidFill>
-              <a:srgbClr val="34D399"/>
+              <a:srgbClr val="059669"/>
             </a:solidFill>
             <a:prstDash val="solid"/>
           </a:ln>
@@ -17046,13 +17275,13 @@
       </p:sp>
       <p:sp>
         <p:nvSpPr>
-          <p:cNvPr id="27" name="Shape 25"/>
-          <p:cNvSpPr/>
-          <p:nvPr/>
-        </p:nvSpPr>
-        <p:spPr>
-          <a:xfrm>
-            <a:off x="4663440" y="1737360"/>
+          <p:cNvPr id="25" name="Shape 23"/>
+          <p:cNvSpPr/>
+          <p:nvPr/>
+        </p:nvSpPr>
+        <p:spPr>
+          <a:xfrm>
+            <a:off x="4297680" y="1737360"/>
             <a:ext cx="0" cy="182880"/>
           </a:xfrm>
           <a:prstGeom prst="line">
@@ -17061,7 +17290,7 @@
           <a:noFill/>
           <a:ln w="25400">
             <a:solidFill>
-              <a:srgbClr val="34D399"/>
+              <a:srgbClr val="059669"/>
             </a:solidFill>
             <a:prstDash val="solid"/>
           </a:ln>
@@ -17069,13 +17298,13 @@
       </p:sp>
       <p:sp>
         <p:nvSpPr>
-          <p:cNvPr id="28" name="Shape 26"/>
-          <p:cNvSpPr/>
-          <p:nvPr/>
-        </p:nvSpPr>
-        <p:spPr>
-          <a:xfrm>
-            <a:off x="4846320" y="1737360"/>
+          <p:cNvPr id="26" name="Shape 24"/>
+          <p:cNvSpPr/>
+          <p:nvPr/>
+        </p:nvSpPr>
+        <p:spPr>
+          <a:xfrm>
+            <a:off x="4480560" y="1737360"/>
             <a:ext cx="0" cy="182880"/>
           </a:xfrm>
           <a:prstGeom prst="line">
@@ -17084,7 +17313,7 @@
           <a:noFill/>
           <a:ln w="25400">
             <a:solidFill>
-              <a:srgbClr val="34D399"/>
+              <a:srgbClr val="059669"/>
             </a:solidFill>
             <a:prstDash val="solid"/>
           </a:ln>
@@ -17092,13 +17321,13 @@
       </p:sp>
       <p:sp>
         <p:nvSpPr>
-          <p:cNvPr id="29" name="Shape 27"/>
-          <p:cNvSpPr/>
-          <p:nvPr/>
-        </p:nvSpPr>
-        <p:spPr>
-          <a:xfrm>
-            <a:off x="5029200" y="1737360"/>
+          <p:cNvPr id="27" name="Shape 25"/>
+          <p:cNvSpPr/>
+          <p:nvPr/>
+        </p:nvSpPr>
+        <p:spPr>
+          <a:xfrm>
+            <a:off x="4663440" y="1737360"/>
             <a:ext cx="0" cy="182880"/>
           </a:xfrm>
           <a:prstGeom prst="line">
@@ -17107,7 +17336,7 @@
           <a:noFill/>
           <a:ln w="25400">
             <a:solidFill>
-              <a:srgbClr val="34D399"/>
+              <a:srgbClr val="059669"/>
             </a:solidFill>
             <a:prstDash val="solid"/>
           </a:ln>
@@ -17115,170 +17344,13 @@
       </p:sp>
       <p:sp>
         <p:nvSpPr>
-          <p:cNvPr id="30" name="Shape 28"/>
-          <p:cNvSpPr/>
-          <p:nvPr/>
-        </p:nvSpPr>
-        <p:spPr>
-          <a:xfrm>
-            <a:off x="3657600" y="2057400"/>
-            <a:ext cx="1645920" cy="365760"/>
-          </a:xfrm>
-          <a:prstGeom prst="rect">
-            <a:avLst/>
-          </a:prstGeom>
-          <a:solidFill>
-            <a:srgbClr val="34D399"/>
-          </a:solidFill>
-          <a:ln/>
-        </p:spPr>
-      </p:sp>
-      <p:sp>
-        <p:nvSpPr>
-          <p:cNvPr id="31" name="Text 29"/>
-          <p:cNvSpPr/>
-          <p:nvPr/>
-        </p:nvSpPr>
-        <p:spPr>
-          <a:xfrm>
-            <a:off x="3657600" y="2057400"/>
-            <a:ext cx="1645920" cy="365760"/>
-          </a:xfrm>
-          <a:prstGeom prst="rect">
-            <a:avLst/>
-          </a:prstGeom>
-          <a:noFill/>
-          <a:ln/>
-        </p:spPr>
-        <p:txBody>
-          <a:bodyPr wrap="square" lIns="0" tIns="0" rIns="0" bIns="0" rtlCol="0" anchor="ctr"/>
-          <a:lstStyle/>
-          <a:p>
-            <a:pPr algn="ctr" indent="0" marL="0">
-              <a:buNone/>
-            </a:pPr>
-            <a:r>
-              <a:rPr lang="en-US" sz="1000" b="1" dirty="0">
-                <a:solidFill>
-                  <a:srgbClr val="0F1117"/>
-                </a:solidFill>
-                <a:latin typeface="Apple SD Gothic Neo" pitchFamily="34" charset="0"/>
-                <a:ea typeface="Apple SD Gothic Neo" pitchFamily="34" charset="-122"/>
-                <a:cs typeface="Apple SD Gothic Neo" pitchFamily="34" charset="-120"/>
-              </a:rPr>
-              <a:t>세션 2 (10:10~10:55)</a:t>
-            </a:r>
-            <a:endParaRPr lang="en-US" sz="1000" dirty="0"/>
-          </a:p>
-        </p:txBody>
-      </p:sp>
-      <p:sp>
-        <p:nvSpPr>
-          <p:cNvPr id="32" name="Shape 30"/>
-          <p:cNvSpPr/>
-          <p:nvPr/>
-        </p:nvSpPr>
-        <p:spPr>
-          <a:xfrm>
-            <a:off x="5486400" y="1280160"/>
-            <a:ext cx="914400" cy="365760"/>
-          </a:xfrm>
-          <a:prstGeom prst="rect">
-            <a:avLst/>
-          </a:prstGeom>
-          <a:solidFill>
-            <a:srgbClr val="3D1515"/>
-          </a:solidFill>
-          <a:ln/>
-        </p:spPr>
-      </p:sp>
-      <p:sp>
-        <p:nvSpPr>
-          <p:cNvPr id="33" name="Text 31"/>
-          <p:cNvSpPr/>
-          <p:nvPr/>
-        </p:nvSpPr>
-        <p:spPr>
-          <a:xfrm>
-            <a:off x="5486400" y="1280160"/>
-            <a:ext cx="914400" cy="365760"/>
-          </a:xfrm>
-          <a:prstGeom prst="rect">
-            <a:avLst/>
-          </a:prstGeom>
-          <a:noFill/>
-          <a:ln/>
-        </p:spPr>
-        <p:txBody>
-          <a:bodyPr wrap="square" lIns="0" tIns="0" rIns="0" bIns="0" rtlCol="0" anchor="ctr"/>
-          <a:lstStyle/>
-          <a:p>
-            <a:pPr algn="ctr" indent="0" marL="0">
-              <a:buNone/>
-            </a:pPr>
-            <a:r>
-              <a:rPr lang="en-US" sz="1000" b="1" dirty="0">
-                <a:solidFill>
-                  <a:srgbClr val="F87171"/>
-                </a:solidFill>
-                <a:latin typeface="Apple SD Gothic Neo" pitchFamily="34" charset="0"/>
-                <a:ea typeface="Apple SD Gothic Neo" pitchFamily="34" charset="-122"/>
-                <a:cs typeface="Apple SD Gothic Neo" pitchFamily="34" charset="-120"/>
-              </a:rPr>
-              <a:t>45분 gap</a:t>
-            </a:r>
-            <a:endParaRPr lang="en-US" sz="1000" dirty="0"/>
-          </a:p>
-        </p:txBody>
-      </p:sp>
-      <p:sp>
-        <p:nvSpPr>
-          <p:cNvPr id="34" name="Text 32"/>
-          <p:cNvSpPr/>
-          <p:nvPr/>
-        </p:nvSpPr>
-        <p:spPr>
-          <a:xfrm>
-            <a:off x="5577840" y="1691640"/>
-            <a:ext cx="731520" cy="274320"/>
-          </a:xfrm>
-          <a:prstGeom prst="rect">
-            <a:avLst/>
-          </a:prstGeom>
-          <a:noFill/>
-          <a:ln/>
-        </p:spPr>
-        <p:txBody>
-          <a:bodyPr wrap="square" lIns="0" tIns="0" rIns="0" bIns="0" rtlCol="0" anchor="ctr"/>
-          <a:lstStyle/>
-          <a:p>
-            <a:pPr algn="ctr" indent="0" marL="0">
-              <a:buNone/>
-            </a:pPr>
-            <a:r>
-              <a:rPr lang="en-US" sz="2000" dirty="0">
-                <a:solidFill>
-                  <a:srgbClr val="F87171"/>
-                </a:solidFill>
-                <a:latin typeface="Apple SD Gothic Neo" pitchFamily="34" charset="0"/>
-                <a:ea typeface="Apple SD Gothic Neo" pitchFamily="34" charset="-122"/>
-                <a:cs typeface="Apple SD Gothic Neo" pitchFamily="34" charset="-120"/>
-              </a:rPr>
-              <a:t>···</a:t>
-            </a:r>
-            <a:endParaRPr lang="en-US" sz="2000" dirty="0"/>
-          </a:p>
-        </p:txBody>
-      </p:sp>
-      <p:sp>
-        <p:nvSpPr>
-          <p:cNvPr id="35" name="Shape 33"/>
-          <p:cNvSpPr/>
-          <p:nvPr/>
-        </p:nvSpPr>
-        <p:spPr>
-          <a:xfrm>
-            <a:off x="6583680" y="1737360"/>
+          <p:cNvPr id="28" name="Shape 26"/>
+          <p:cNvSpPr/>
+          <p:nvPr/>
+        </p:nvSpPr>
+        <p:spPr>
+          <a:xfrm>
+            <a:off x="4846320" y="1737360"/>
             <a:ext cx="0" cy="182880"/>
           </a:xfrm>
           <a:prstGeom prst="line">
@@ -17287,7 +17359,7 @@
           <a:noFill/>
           <a:ln w="25400">
             <a:solidFill>
-              <a:srgbClr val="FBBF24"/>
+              <a:srgbClr val="059669"/>
             </a:solidFill>
             <a:prstDash val="solid"/>
           </a:ln>
@@ -17295,13 +17367,13 @@
       </p:sp>
       <p:sp>
         <p:nvSpPr>
-          <p:cNvPr id="36" name="Shape 34"/>
-          <p:cNvSpPr/>
-          <p:nvPr/>
-        </p:nvSpPr>
-        <p:spPr>
-          <a:xfrm>
-            <a:off x="6766560" y="1737360"/>
+          <p:cNvPr id="29" name="Shape 27"/>
+          <p:cNvSpPr/>
+          <p:nvPr/>
+        </p:nvSpPr>
+        <p:spPr>
+          <a:xfrm>
+            <a:off x="5029200" y="1737360"/>
             <a:ext cx="0" cy="182880"/>
           </a:xfrm>
           <a:prstGeom prst="line">
@@ -17310,7 +17382,7 @@
           <a:noFill/>
           <a:ln w="25400">
             <a:solidFill>
-              <a:srgbClr val="FBBF24"/>
+              <a:srgbClr val="059669"/>
             </a:solidFill>
             <a:prstDash val="solid"/>
           </a:ln>
@@ -17318,22 +17390,24 @@
       </p:sp>
       <p:sp>
         <p:nvSpPr>
-          <p:cNvPr id="37" name="Shape 35"/>
-          <p:cNvSpPr/>
-          <p:nvPr/>
-        </p:nvSpPr>
-        <p:spPr>
-          <a:xfrm>
-            <a:off x="6949440" y="1737360"/>
-            <a:ext cx="0" cy="182880"/>
-          </a:xfrm>
-          <a:prstGeom prst="line">
-            <a:avLst/>
-          </a:prstGeom>
-          <a:noFill/>
-          <a:ln w="25400">
+          <p:cNvPr id="30" name="Shape 28"/>
+          <p:cNvSpPr/>
+          <p:nvPr/>
+        </p:nvSpPr>
+        <p:spPr>
+          <a:xfrm>
+            <a:off x="3657600" y="2057400"/>
+            <a:ext cx="1645920" cy="365760"/>
+          </a:xfrm>
+          <a:prstGeom prst="rect">
+            <a:avLst/>
+          </a:prstGeom>
+          <a:solidFill>
+            <a:srgbClr val="059669"/>
+          </a:solidFill>
+          <a:ln w="9525">
             <a:solidFill>
-              <a:srgbClr val="FBBF24"/>
+              <a:srgbClr val="D1D5E0"/>
             </a:solidFill>
             <a:prstDash val="solid"/>
           </a:ln>
@@ -17341,22 +17415,63 @@
       </p:sp>
       <p:sp>
         <p:nvSpPr>
-          <p:cNvPr id="38" name="Shape 36"/>
-          <p:cNvSpPr/>
-          <p:nvPr/>
-        </p:nvSpPr>
-        <p:spPr>
-          <a:xfrm>
-            <a:off x="7132320" y="1737360"/>
-            <a:ext cx="0" cy="182880"/>
-          </a:xfrm>
-          <a:prstGeom prst="line">
-            <a:avLst/>
-          </a:prstGeom>
-          <a:noFill/>
-          <a:ln w="25400">
+          <p:cNvPr id="31" name="Text 29"/>
+          <p:cNvSpPr/>
+          <p:nvPr/>
+        </p:nvSpPr>
+        <p:spPr>
+          <a:xfrm>
+            <a:off x="3657600" y="2057400"/>
+            <a:ext cx="1645920" cy="365760"/>
+          </a:xfrm>
+          <a:prstGeom prst="rect">
+            <a:avLst/>
+          </a:prstGeom>
+          <a:noFill/>
+          <a:ln/>
+        </p:spPr>
+        <p:txBody>
+          <a:bodyPr wrap="square" lIns="0" tIns="0" rIns="0" bIns="0" rtlCol="0" anchor="ctr"/>
+          <a:lstStyle/>
+          <a:p>
+            <a:pPr algn="ctr" indent="0" marL="0">
+              <a:buNone/>
+            </a:pPr>
+            <a:r>
+              <a:rPr lang="en-US" sz="1000" b="1" dirty="0">
+                <a:solidFill>
+                  <a:srgbClr val="FFFFFF"/>
+                </a:solidFill>
+                <a:latin typeface="Apple SD Gothic Neo" pitchFamily="34" charset="0"/>
+                <a:ea typeface="Apple SD Gothic Neo" pitchFamily="34" charset="-122"/>
+                <a:cs typeface="Apple SD Gothic Neo" pitchFamily="34" charset="-120"/>
+              </a:rPr>
+              <a:t>세션 2 (10:10~10:55)</a:t>
+            </a:r>
+            <a:endParaRPr lang="en-US" sz="1000" dirty="0"/>
+          </a:p>
+        </p:txBody>
+      </p:sp>
+      <p:sp>
+        <p:nvSpPr>
+          <p:cNvPr id="32" name="Shape 30"/>
+          <p:cNvSpPr/>
+          <p:nvPr/>
+        </p:nvSpPr>
+        <p:spPr>
+          <a:xfrm>
+            <a:off x="5486400" y="1280160"/>
+            <a:ext cx="914400" cy="365760"/>
+          </a:xfrm>
+          <a:prstGeom prst="rect">
+            <a:avLst/>
+          </a:prstGeom>
+          <a:solidFill>
+            <a:srgbClr val="FEF2F2"/>
+          </a:solidFill>
+          <a:ln w="9525">
             <a:solidFill>
-              <a:srgbClr val="FBBF24"/>
+              <a:srgbClr val="D1D5E0"/>
             </a:solidFill>
             <a:prstDash val="solid"/>
           </a:ln>
@@ -17364,13 +17479,91 @@
       </p:sp>
       <p:sp>
         <p:nvSpPr>
-          <p:cNvPr id="39" name="Shape 37"/>
-          <p:cNvSpPr/>
-          <p:nvPr/>
-        </p:nvSpPr>
-        <p:spPr>
-          <a:xfrm>
-            <a:off x="7315200" y="1737360"/>
+          <p:cNvPr id="33" name="Text 31"/>
+          <p:cNvSpPr/>
+          <p:nvPr/>
+        </p:nvSpPr>
+        <p:spPr>
+          <a:xfrm>
+            <a:off x="5486400" y="1280160"/>
+            <a:ext cx="914400" cy="365760"/>
+          </a:xfrm>
+          <a:prstGeom prst="rect">
+            <a:avLst/>
+          </a:prstGeom>
+          <a:noFill/>
+          <a:ln/>
+        </p:spPr>
+        <p:txBody>
+          <a:bodyPr wrap="square" lIns="0" tIns="0" rIns="0" bIns="0" rtlCol="0" anchor="ctr"/>
+          <a:lstStyle/>
+          <a:p>
+            <a:pPr algn="ctr" indent="0" marL="0">
+              <a:buNone/>
+            </a:pPr>
+            <a:r>
+              <a:rPr lang="en-US" sz="1000" b="1" dirty="0">
+                <a:solidFill>
+                  <a:srgbClr val="DC2626"/>
+                </a:solidFill>
+                <a:latin typeface="Apple SD Gothic Neo" pitchFamily="34" charset="0"/>
+                <a:ea typeface="Apple SD Gothic Neo" pitchFamily="34" charset="-122"/>
+                <a:cs typeface="Apple SD Gothic Neo" pitchFamily="34" charset="-120"/>
+              </a:rPr>
+              <a:t>45분 gap</a:t>
+            </a:r>
+            <a:endParaRPr lang="en-US" sz="1000" dirty="0"/>
+          </a:p>
+        </p:txBody>
+      </p:sp>
+      <p:sp>
+        <p:nvSpPr>
+          <p:cNvPr id="34" name="Text 32"/>
+          <p:cNvSpPr/>
+          <p:nvPr/>
+        </p:nvSpPr>
+        <p:spPr>
+          <a:xfrm>
+            <a:off x="5577840" y="1691640"/>
+            <a:ext cx="731520" cy="274320"/>
+          </a:xfrm>
+          <a:prstGeom prst="rect">
+            <a:avLst/>
+          </a:prstGeom>
+          <a:noFill/>
+          <a:ln/>
+        </p:spPr>
+        <p:txBody>
+          <a:bodyPr wrap="square" lIns="0" tIns="0" rIns="0" bIns="0" rtlCol="0" anchor="ctr"/>
+          <a:lstStyle/>
+          <a:p>
+            <a:pPr algn="ctr" indent="0" marL="0">
+              <a:buNone/>
+            </a:pPr>
+            <a:r>
+              <a:rPr lang="en-US" sz="2000" dirty="0">
+                <a:solidFill>
+                  <a:srgbClr val="DC2626"/>
+                </a:solidFill>
+                <a:latin typeface="Apple SD Gothic Neo" pitchFamily="34" charset="0"/>
+                <a:ea typeface="Apple SD Gothic Neo" pitchFamily="34" charset="-122"/>
+                <a:cs typeface="Apple SD Gothic Neo" pitchFamily="34" charset="-120"/>
+              </a:rPr>
+              <a:t>···</a:t>
+            </a:r>
+            <a:endParaRPr lang="en-US" sz="2000" dirty="0"/>
+          </a:p>
+        </p:txBody>
+      </p:sp>
+      <p:sp>
+        <p:nvSpPr>
+          <p:cNvPr id="35" name="Shape 33"/>
+          <p:cNvSpPr/>
+          <p:nvPr/>
+        </p:nvSpPr>
+        <p:spPr>
+          <a:xfrm>
+            <a:off x="6583680" y="1737360"/>
             <a:ext cx="0" cy="182880"/>
           </a:xfrm>
           <a:prstGeom prst="line">
@@ -17379,7 +17572,7 @@
           <a:noFill/>
           <a:ln w="25400">
             <a:solidFill>
-              <a:srgbClr val="FBBF24"/>
+              <a:srgbClr val="D97706"/>
             </a:solidFill>
             <a:prstDash val="solid"/>
           </a:ln>
@@ -17387,13 +17580,13 @@
       </p:sp>
       <p:sp>
         <p:nvSpPr>
-          <p:cNvPr id="40" name="Shape 38"/>
-          <p:cNvSpPr/>
-          <p:nvPr/>
-        </p:nvSpPr>
-        <p:spPr>
-          <a:xfrm>
-            <a:off x="7498080" y="1737360"/>
+          <p:cNvPr id="36" name="Shape 34"/>
+          <p:cNvSpPr/>
+          <p:nvPr/>
+        </p:nvSpPr>
+        <p:spPr>
+          <a:xfrm>
+            <a:off x="6766560" y="1737360"/>
             <a:ext cx="0" cy="182880"/>
           </a:xfrm>
           <a:prstGeom prst="line">
@@ -17402,7 +17595,7 @@
           <a:noFill/>
           <a:ln w="25400">
             <a:solidFill>
-              <a:srgbClr val="FBBF24"/>
+              <a:srgbClr val="D97706"/>
             </a:solidFill>
             <a:prstDash val="solid"/>
           </a:ln>
@@ -17410,13 +17603,13 @@
       </p:sp>
       <p:sp>
         <p:nvSpPr>
-          <p:cNvPr id="41" name="Shape 39"/>
-          <p:cNvSpPr/>
-          <p:nvPr/>
-        </p:nvSpPr>
-        <p:spPr>
-          <a:xfrm>
-            <a:off x="7680960" y="1737360"/>
+          <p:cNvPr id="37" name="Shape 35"/>
+          <p:cNvSpPr/>
+          <p:nvPr/>
+        </p:nvSpPr>
+        <p:spPr>
+          <a:xfrm>
+            <a:off x="6949440" y="1737360"/>
             <a:ext cx="0" cy="182880"/>
           </a:xfrm>
           <a:prstGeom prst="line">
@@ -17425,7 +17618,7 @@
           <a:noFill/>
           <a:ln w="25400">
             <a:solidFill>
-              <a:srgbClr val="FBBF24"/>
+              <a:srgbClr val="D97706"/>
             </a:solidFill>
             <a:prstDash val="solid"/>
           </a:ln>
@@ -17433,81 +17626,22 @@
       </p:sp>
       <p:sp>
         <p:nvSpPr>
-          <p:cNvPr id="42" name="Shape 40"/>
-          <p:cNvSpPr/>
-          <p:nvPr/>
-        </p:nvSpPr>
-        <p:spPr>
-          <a:xfrm>
-            <a:off x="6492240" y="2057400"/>
-            <a:ext cx="1554480" cy="365760"/>
-          </a:xfrm>
-          <a:prstGeom prst="rect">
-            <a:avLst/>
-          </a:prstGeom>
-          <a:solidFill>
-            <a:srgbClr val="FBBF24"/>
-          </a:solidFill>
-          <a:ln/>
-        </p:spPr>
-      </p:sp>
-      <p:sp>
-        <p:nvSpPr>
-          <p:cNvPr id="43" name="Text 41"/>
-          <p:cNvSpPr/>
-          <p:nvPr/>
-        </p:nvSpPr>
-        <p:spPr>
-          <a:xfrm>
-            <a:off x="6492240" y="2057400"/>
-            <a:ext cx="1554480" cy="365760"/>
-          </a:xfrm>
-          <a:prstGeom prst="rect">
-            <a:avLst/>
-          </a:prstGeom>
-          <a:noFill/>
-          <a:ln/>
-        </p:spPr>
-        <p:txBody>
-          <a:bodyPr wrap="square" lIns="0" tIns="0" rIns="0" bIns="0" rtlCol="0" anchor="ctr"/>
-          <a:lstStyle/>
-          <a:p>
-            <a:pPr algn="ctr" indent="0" marL="0">
-              <a:buNone/>
-            </a:pPr>
-            <a:r>
-              <a:rPr lang="en-US" sz="1000" b="1" dirty="0">
-                <a:solidFill>
-                  <a:srgbClr val="0F1117"/>
-                </a:solidFill>
-                <a:latin typeface="Apple SD Gothic Neo" pitchFamily="34" charset="0"/>
-                <a:ea typeface="Apple SD Gothic Neo" pitchFamily="34" charset="-122"/>
-                <a:cs typeface="Apple SD Gothic Neo" pitchFamily="34" charset="-120"/>
-              </a:rPr>
-              <a:t>세션 3 (11:40~)</a:t>
-            </a:r>
-            <a:endParaRPr lang="en-US" sz="1000" dirty="0"/>
-          </a:p>
-        </p:txBody>
-      </p:sp>
-      <p:sp>
-        <p:nvSpPr>
-          <p:cNvPr id="44" name="Shape 42"/>
-          <p:cNvSpPr/>
-          <p:nvPr/>
-        </p:nvSpPr>
-        <p:spPr>
-          <a:xfrm>
-            <a:off x="457200" y="2926080"/>
-            <a:ext cx="8229600" cy="0"/>
+          <p:cNvPr id="38" name="Shape 36"/>
+          <p:cNvSpPr/>
+          <p:nvPr/>
+        </p:nvSpPr>
+        <p:spPr>
+          <a:xfrm>
+            <a:off x="7132320" y="1737360"/>
+            <a:ext cx="0" cy="182880"/>
           </a:xfrm>
           <a:prstGeom prst="line">
             <a:avLst/>
           </a:prstGeom>
           <a:noFill/>
-          <a:ln w="12700">
+          <a:ln w="25400">
             <a:solidFill>
-              <a:srgbClr val="2A2D3A"/>
+              <a:srgbClr val="D97706"/>
             </a:solidFill>
             <a:prstDash val="solid"/>
           </a:ln>
@@ -17515,6 +17649,162 @@
       </p:sp>
       <p:sp>
         <p:nvSpPr>
+          <p:cNvPr id="39" name="Shape 37"/>
+          <p:cNvSpPr/>
+          <p:nvPr/>
+        </p:nvSpPr>
+        <p:spPr>
+          <a:xfrm>
+            <a:off x="7315200" y="1737360"/>
+            <a:ext cx="0" cy="182880"/>
+          </a:xfrm>
+          <a:prstGeom prst="line">
+            <a:avLst/>
+          </a:prstGeom>
+          <a:noFill/>
+          <a:ln w="25400">
+            <a:solidFill>
+              <a:srgbClr val="D97706"/>
+            </a:solidFill>
+            <a:prstDash val="solid"/>
+          </a:ln>
+        </p:spPr>
+      </p:sp>
+      <p:sp>
+        <p:nvSpPr>
+          <p:cNvPr id="40" name="Shape 38"/>
+          <p:cNvSpPr/>
+          <p:nvPr/>
+        </p:nvSpPr>
+        <p:spPr>
+          <a:xfrm>
+            <a:off x="7498080" y="1737360"/>
+            <a:ext cx="0" cy="182880"/>
+          </a:xfrm>
+          <a:prstGeom prst="line">
+            <a:avLst/>
+          </a:prstGeom>
+          <a:noFill/>
+          <a:ln w="25400">
+            <a:solidFill>
+              <a:srgbClr val="D97706"/>
+            </a:solidFill>
+            <a:prstDash val="solid"/>
+          </a:ln>
+        </p:spPr>
+      </p:sp>
+      <p:sp>
+        <p:nvSpPr>
+          <p:cNvPr id="41" name="Shape 39"/>
+          <p:cNvSpPr/>
+          <p:nvPr/>
+        </p:nvSpPr>
+        <p:spPr>
+          <a:xfrm>
+            <a:off x="7680960" y="1737360"/>
+            <a:ext cx="0" cy="182880"/>
+          </a:xfrm>
+          <a:prstGeom prst="line">
+            <a:avLst/>
+          </a:prstGeom>
+          <a:noFill/>
+          <a:ln w="25400">
+            <a:solidFill>
+              <a:srgbClr val="D97706"/>
+            </a:solidFill>
+            <a:prstDash val="solid"/>
+          </a:ln>
+        </p:spPr>
+      </p:sp>
+      <p:sp>
+        <p:nvSpPr>
+          <p:cNvPr id="42" name="Shape 40"/>
+          <p:cNvSpPr/>
+          <p:nvPr/>
+        </p:nvSpPr>
+        <p:spPr>
+          <a:xfrm>
+            <a:off x="6492240" y="2057400"/>
+            <a:ext cx="1554480" cy="365760"/>
+          </a:xfrm>
+          <a:prstGeom prst="rect">
+            <a:avLst/>
+          </a:prstGeom>
+          <a:solidFill>
+            <a:srgbClr val="D97706"/>
+          </a:solidFill>
+          <a:ln w="9525">
+            <a:solidFill>
+              <a:srgbClr val="D1D5E0"/>
+            </a:solidFill>
+            <a:prstDash val="solid"/>
+          </a:ln>
+        </p:spPr>
+      </p:sp>
+      <p:sp>
+        <p:nvSpPr>
+          <p:cNvPr id="43" name="Text 41"/>
+          <p:cNvSpPr/>
+          <p:nvPr/>
+        </p:nvSpPr>
+        <p:spPr>
+          <a:xfrm>
+            <a:off x="6492240" y="2057400"/>
+            <a:ext cx="1554480" cy="365760"/>
+          </a:xfrm>
+          <a:prstGeom prst="rect">
+            <a:avLst/>
+          </a:prstGeom>
+          <a:noFill/>
+          <a:ln/>
+        </p:spPr>
+        <p:txBody>
+          <a:bodyPr wrap="square" lIns="0" tIns="0" rIns="0" bIns="0" rtlCol="0" anchor="ctr"/>
+          <a:lstStyle/>
+          <a:p>
+            <a:pPr algn="ctr" indent="0" marL="0">
+              <a:buNone/>
+            </a:pPr>
+            <a:r>
+              <a:rPr lang="en-US" sz="1000" b="1" dirty="0">
+                <a:solidFill>
+                  <a:srgbClr val="FFFFFF"/>
+                </a:solidFill>
+                <a:latin typeface="Apple SD Gothic Neo" pitchFamily="34" charset="0"/>
+                <a:ea typeface="Apple SD Gothic Neo" pitchFamily="34" charset="-122"/>
+                <a:cs typeface="Apple SD Gothic Neo" pitchFamily="34" charset="-120"/>
+              </a:rPr>
+              <a:t>세션 3 (11:40~)</a:t>
+            </a:r>
+            <a:endParaRPr lang="en-US" sz="1000" dirty="0"/>
+          </a:p>
+        </p:txBody>
+      </p:sp>
+      <p:sp>
+        <p:nvSpPr>
+          <p:cNvPr id="44" name="Shape 42"/>
+          <p:cNvSpPr/>
+          <p:nvPr/>
+        </p:nvSpPr>
+        <p:spPr>
+          <a:xfrm>
+            <a:off x="457200" y="2926080"/>
+            <a:ext cx="8229600" cy="0"/>
+          </a:xfrm>
+          <a:prstGeom prst="line">
+            <a:avLst/>
+          </a:prstGeom>
+          <a:noFill/>
+          <a:ln w="12700">
+            <a:solidFill>
+              <a:srgbClr val="D1D5E0"/>
+            </a:solidFill>
+            <a:prstDash val="solid"/>
+          </a:ln>
+        </p:spPr>
+      </p:sp>
+      <p:sp>
+        <p:nvSpPr>
           <p:cNvPr id="45" name="Text 43"/>
           <p:cNvSpPr/>
           <p:nvPr/>
@@ -17540,7 +17830,7 @@
             <a:r>
               <a:rPr lang="en-US" sz="1400" b="1" dirty="0">
                 <a:solidFill>
-                  <a:srgbClr val="E4E6ED"/>
+                  <a:srgbClr val="1E2030"/>
                 </a:solidFill>
                 <a:latin typeface="Apple SD Gothic Neo" pitchFamily="34" charset="0"/>
                 <a:ea typeface="Apple SD Gothic Neo" pitchFamily="34" charset="-122"/>
@@ -17579,7 +17869,7 @@
             <a:r>
               <a:rPr lang="en-US" sz="1200" dirty="0">
                 <a:solidFill>
-                  <a:srgbClr val="8B8FA3"/>
+                  <a:srgbClr val="4B5068"/>
                 </a:solidFill>
                 <a:latin typeface="Apple SD Gothic Neo" pitchFamily="34" charset="0"/>
                 <a:ea typeface="Apple SD Gothic Neo" pitchFamily="34" charset="-122"/>
@@ -17618,7 +17908,7 @@
             <a:r>
               <a:rPr lang="en-US" sz="1200" dirty="0">
                 <a:solidFill>
-                  <a:srgbClr val="8B8FA3"/>
+                  <a:srgbClr val="4B5068"/>
                 </a:solidFill>
                 <a:latin typeface="Apple SD Gothic Neo" pitchFamily="34" charset="0"/>
                 <a:ea typeface="Apple SD Gothic Neo" pitchFamily="34" charset="-122"/>
@@ -17645,9 +17935,14 @@
             <a:avLst/>
           </a:prstGeom>
           <a:solidFill>
-            <a:srgbClr val="0D3320"/>
+            <a:srgbClr val="ECFDF5"/>
           </a:solidFill>
-          <a:ln/>
+          <a:ln w="9525">
+            <a:solidFill>
+              <a:srgbClr val="D1D5E0"/>
+            </a:solidFill>
+            <a:prstDash val="solid"/>
+          </a:ln>
         </p:spPr>
       </p:sp>
       <p:sp>
@@ -17677,7 +17972,7 @@
             <a:r>
               <a:rPr lang="en-US" sz="1300" b="1" dirty="0">
                 <a:solidFill>
-                  <a:srgbClr val="34D399"/>
+                  <a:srgbClr val="059669"/>
                 </a:solidFill>
                 <a:latin typeface="Apple SD Gothic Neo" pitchFamily="34" charset="0"/>
                 <a:ea typeface="Apple SD Gothic Neo" pitchFamily="34" charset="-122"/>
